--- a/presentation/climate-futures-pricing-proposal.pptx
+++ b/presentation/climate-futures-pricing-proposal.pptx
@@ -4,6 +4,9 @@
   <p:sldMasterIdLst>
     <p:sldMasterId id="2147483648" r:id="rId1"/>
   </p:sldMasterIdLst>
+  <p:notesMasterIdLst>
+    <p:notesMasterId r:id="rId15"/>
+  </p:notesMasterIdLst>
   <p:sldIdLst>
     <p:sldId id="256" r:id="rId2"/>
     <p:sldId id="257" r:id="rId3"/>
@@ -19,9 +22,6 @@
     <p:sldId id="267" r:id="rId13"/>
     <p:sldId id="268" r:id="rId14"/>
   </p:sldIdLst>
-  <p:notesMasterIdLst>
-    <p:notesMasterId r:id="rId15"/>
-  </p:notesMasterIdLst>
   <p:sldSz cx="12192000" cy="6858000"/>
   <p:notesSz cx="6858000" cy="12192000"/>
   <p:defaultTextStyle>
@@ -116,13 +116,20 @@
       </a:defRPr>
     </a:lvl9pPr>
   </p:defaultTextStyle>
+  <p:extLst>
+    <p:ext uri="{EFAFB233-063F-42B5-8137-9DF3F51BA10A}">
+      <p15:sldGuideLst xmlns:p15="http://schemas.microsoft.com/office/powerpoint/2012/main"/>
+    </p:ext>
+  </p:extLst>
 </p:presentation>
 </file>
 
 <file path=ppt/charts/chart1.xml><?xml version="1.0" encoding="utf-8"?>
-<c:chartSpace xmlns:c="http://schemas.openxmlformats.org/drawingml/2006/chart" xmlns:a="http://schemas.openxmlformats.org/drawingml/2006/main" xmlns:r="http://schemas.openxmlformats.org/officeDocument/2006/relationships">
+<c:chartSpace xmlns:c="http://schemas.openxmlformats.org/drawingml/2006/chart" xmlns:a="http://schemas.openxmlformats.org/drawingml/2006/main" xmlns:r="http://schemas.openxmlformats.org/officeDocument/2006/relationships" xmlns:c16r2="http://schemas.microsoft.com/office/drawing/2015/06/chart">
   <c:date1904 val="0"/>
+  <c:lang val="en-US"/>
   <c:roundedCorners val="1"/>
+  <c:style val="2"/>
   <c:chart>
     <c:autoTitleDeleted val="1"/>
     <c:plotArea>
@@ -145,9 +152,6 @@
             </c:strRef>
           </c:tx>
           <c:spPr>
-            <a:solidFill>
-              <a:srgbClr val="2E6B4F"/>
-            </a:solidFill>
             <a:ln>
               <a:noFill/>
             </a:ln>
@@ -187,6 +191,11 @@
               </c:spPr>
             </c:marker>
             <c:bubble3D val="0"/>
+            <c:extLst>
+              <c:ext xmlns:c16="http://schemas.microsoft.com/office/drawing/2014/chart" uri="{C3380CC4-5D6E-409C-BE32-E72D297353CC}">
+                <c16:uniqueId val="{00000000-73B1-9E46-B44F-9618F47C8CFE}"/>
+              </c:ext>
+            </c:extLst>
           </c:dPt>
           <c:xVal>
             <c:numRef>
@@ -195,7 +204,7 @@
                 <c:formatCode>General</c:formatCode>
                 <c:ptCount val="26"/>
                 <c:pt idx="0">
-                  <c:v>-1.247</c:v>
+                  <c:v>-1.2470000000000001</c:v>
                 </c:pt>
                 <c:pt idx="1">
                   <c:v>-1.026</c:v>
@@ -204,73 +213,73 @@
                   <c:v>-1.004</c:v>
                 </c:pt>
                 <c:pt idx="3">
-                  <c:v>-0.828</c:v>
+                  <c:v>-0.82799999999999996</c:v>
                 </c:pt>
                 <c:pt idx="4">
-                  <c:v>-0.787</c:v>
+                  <c:v>-0.78700000000000003</c:v>
                 </c:pt>
                 <c:pt idx="5">
-                  <c:v>-0.763</c:v>
+                  <c:v>-0.76300000000000001</c:v>
                 </c:pt>
                 <c:pt idx="6">
                   <c:v>-0.623</c:v>
                 </c:pt>
                 <c:pt idx="7">
-                  <c:v>-0.523</c:v>
+                  <c:v>-0.52300000000000002</c:v>
                 </c:pt>
                 <c:pt idx="8">
-                  <c:v>-0.519</c:v>
+                  <c:v>-0.51900000000000002</c:v>
                 </c:pt>
                 <c:pt idx="9">
                   <c:v>-0.5</c:v>
                 </c:pt>
                 <c:pt idx="10">
-                  <c:v>-0.475</c:v>
+                  <c:v>-0.47499999999999998</c:v>
                 </c:pt>
                 <c:pt idx="11">
-                  <c:v>0.017</c:v>
+                  <c:v>1.7000000000000001E-2</c:v>
                 </c:pt>
                 <c:pt idx="12">
-                  <c:v>0.074</c:v>
+                  <c:v>7.3999999999999996E-2</c:v>
                 </c:pt>
                 <c:pt idx="13">
-                  <c:v>0.077</c:v>
+                  <c:v>7.6999999999999999E-2</c:v>
                 </c:pt>
                 <c:pt idx="14">
-                  <c:v>0.084</c:v>
+                  <c:v>8.4000000000000005E-2</c:v>
                 </c:pt>
                 <c:pt idx="15">
-                  <c:v>0.167</c:v>
+                  <c:v>0.16700000000000001</c:v>
                 </c:pt>
                 <c:pt idx="16">
-                  <c:v>0.181</c:v>
+                  <c:v>0.18099999999999999</c:v>
                 </c:pt>
                 <c:pt idx="17">
                   <c:v>0.222</c:v>
                 </c:pt>
                 <c:pt idx="18">
-                  <c:v>0.266</c:v>
+                  <c:v>0.26600000000000001</c:v>
                 </c:pt>
                 <c:pt idx="19">
-                  <c:v>0.362</c:v>
+                  <c:v>0.36199999999999999</c:v>
                 </c:pt>
                 <c:pt idx="20">
-                  <c:v>0.548</c:v>
+                  <c:v>0.54800000000000004</c:v>
                 </c:pt>
                 <c:pt idx="21">
-                  <c:v>0.582</c:v>
+                  <c:v>0.58199999999999996</c:v>
                 </c:pt>
                 <c:pt idx="22">
-                  <c:v>0.669</c:v>
+                  <c:v>0.66900000000000004</c:v>
                 </c:pt>
                 <c:pt idx="23">
-                  <c:v>0.916</c:v>
+                  <c:v>0.91600000000000004</c:v>
                 </c:pt>
                 <c:pt idx="24">
-                  <c:v>1.062</c:v>
+                  <c:v>1.0620000000000001</c:v>
                 </c:pt>
                 <c:pt idx="25">
-                  <c:v>3.065</c:v>
+                  <c:v>3.0649999999999999</c:v>
                 </c:pt>
               </c:numCache>
             </c:numRef>
@@ -288,7 +297,7 @@
                   <c:v>5.25</c:v>
                 </c:pt>
                 <c:pt idx="2">
-                  <c:v>2.49</c:v>
+                  <c:v>2.4900000000000002</c:v>
                 </c:pt>
                 <c:pt idx="3">
                   <c:v>7.3</c:v>
@@ -312,10 +321,10 @@
                   <c:v>2.02</c:v>
                 </c:pt>
                 <c:pt idx="10">
-                  <c:v>-2.45</c:v>
+                  <c:v>-2.4500000000000002</c:v>
                 </c:pt>
                 <c:pt idx="11">
-                  <c:v>5.11</c:v>
+                  <c:v>5.1100000000000003</c:v>
                 </c:pt>
                 <c:pt idx="12">
                   <c:v>0.23</c:v>
@@ -363,23 +372,13 @@
             </c:numRef>
           </c:yVal>
           <c:smooth val="0"/>
+          <c:extLst>
+            <c:ext xmlns:c16="http://schemas.microsoft.com/office/drawing/2014/chart" uri="{C3380CC4-5D6E-409C-BE32-E72D297353CC}">
+              <c16:uniqueId val="{00000001-73B1-9E46-B44F-9618F47C8CFE}"/>
+            </c:ext>
+          </c:extLst>
         </c:ser>
         <c:dLbls>
-          <c:numFmt formatCode="General" sourceLinked="0"/>
-          <c:txPr>
-            <a:bodyPr/>
-            <a:lstStyle/>
-            <a:p>
-              <a:pPr>
-                <a:defRPr b="0" i="0" strike="noStrike" sz="1200" u="none">
-                  <a:solidFill>
-                    <a:srgbClr val="000000"/>
-                  </a:solidFill>
-                  <a:latin typeface="Arial"/>
-                </a:defRPr>
-              </a:pPr>
-            </a:p>
-          </c:txPr>
           <c:showLegendKey val="0"/>
           <c:showVal val="0"/>
           <c:showCatName val="0"/>
@@ -414,7 +413,7 @@
                   </a:defRPr>
                 </a:pPr>
                 <a:r>
-                  <a:rPr sz="1200" b="0" i="0" u="none" strike="noStrike">
+                  <a:rPr lang="en-US" sz="1200" b="0" i="0" u="none" strike="noStrike">
                     <a:solidFill>
                       <a:srgbClr val="5E6A64"/>
                     </a:solidFill>
@@ -425,7 +424,6 @@
               </a:p>
             </c:rich>
           </c:tx>
-          <c:layout/>
           <c:overlay val="0"/>
         </c:title>
         <c:numFmt formatCode="General" sourceLinked="1"/>
@@ -458,9 +456,7 @@
         </c:txPr>
         <c:crossAx val="2094734552"/>
         <c:crossesAt val="-25"/>
-        <c:auto val="1"/>
-        <c:lblAlgn val="ctr"/>
-        <c:noMultiLvlLbl val="1"/>
+        <c:crossBetween val="midCat"/>
         <c:majorUnit val="1"/>
       </c:valAx>
       <c:valAx>
@@ -498,7 +494,7 @@
                   </a:defRPr>
                 </a:pPr>
                 <a:r>
-                  <a:rPr sz="1200" b="0" i="0" u="none" strike="noStrike">
+                  <a:rPr lang="en-US" sz="1200" b="0" i="0" u="none" strike="noStrike">
                     <a:solidFill>
                       <a:srgbClr val="5E6A64"/>
                     </a:solidFill>
@@ -509,7 +505,6 @@
               </a:p>
             </c:rich>
           </c:tx>
-          <c:layout/>
           <c:overlay val="0"/>
         </c:title>
         <c:numFmt formatCode="General" sourceLinked="0"/>
@@ -569,14 +564,17 @@
 </file>
 
 <file path=ppt/charts/chart2.xml><?xml version="1.0" encoding="utf-8"?>
-<c:chartSpace xmlns:c="http://schemas.openxmlformats.org/drawingml/2006/chart" xmlns:a="http://schemas.openxmlformats.org/drawingml/2006/main" xmlns:r="http://schemas.openxmlformats.org/officeDocument/2006/relationships">
+<c:chartSpace xmlns:c="http://schemas.openxmlformats.org/drawingml/2006/chart" xmlns:a="http://schemas.openxmlformats.org/drawingml/2006/main" xmlns:r="http://schemas.openxmlformats.org/officeDocument/2006/relationships" xmlns:c16r2="http://schemas.microsoft.com/office/drawing/2015/06/chart">
   <c:date1904 val="0"/>
+  <c:lang val="en-US"/>
   <c:roundedCorners val="1"/>
+  <c:style val="2"/>
   <c:chart>
     <c:autoTitleDeleted val="1"/>
     <c:plotArea>
       <c:layout/>
       <c:lineChart>
+        <c:grouping val="standard"/>
         <c:varyColors val="0"/>
         <c:ser>
           <c:idx val="0"/>
@@ -593,9 +591,6 @@
             </c:strRef>
           </c:tx>
           <c:spPr>
-            <a:solidFill>
-              <a:srgbClr val="2E6B4F"/>
-            </a:solidFill>
             <a:ln w="38100" cap="flat">
               <a:solidFill>
                 <a:srgbClr val="2E6B4F"/>
@@ -605,108 +600,67 @@
             </a:ln>
             <a:effectLst/>
           </c:spPr>
-          <c:invertIfNegative val="0"/>
-          <c:dLbls>
-            <c:numFmt formatCode="#,##0" sourceLinked="0"/>
-            <c:txPr>
-              <a:bodyPr/>
-              <a:lstStyle/>
-              <a:p>
-                <a:pPr>
-                  <a:defRPr b="0" i="0" strike="noStrike" sz="1200" u="none">
-                    <a:solidFill>
-                      <a:srgbClr val="000000"/>
-                    </a:solidFill>
-                    <a:latin typeface="Arial"/>
-                  </a:defRPr>
-                </a:pPr>
-              </a:p>
-            </c:txPr>
-            <c:showLegendKey val="0"/>
-            <c:showVal val="0"/>
-            <c:showCatName val="0"/>
-            <c:showSerName val="0"/>
-            <c:showPercent val="0"/>
-            <c:showBubbleSize val="0"/>
-            <c:showLeaderLines val="0"/>
-          </c:dLbls>
           <c:marker>
             <c:symbol val="none"/>
-            <c:size val="6"/>
-            <c:spPr>
-              <a:solidFill>
-                <a:srgbClr val="2E6B4F"/>
-              </a:solidFill>
-              <a:ln w="9525" cap="flat">
-                <a:solidFill>
-                  <a:srgbClr val="2E6B4F"/>
-                </a:solidFill>
-                <a:prstDash val="solid"/>
-                <a:round/>
-              </a:ln>
-              <a:effectLst/>
-            </c:spPr>
           </c:marker>
           <c:cat>
-            <c:multiLvlStrRef>
+            <c:strRef>
               <c:f>Sheet1!$A$2:$A$18</c:f>
-              <c:multiLvlStrCache>
+              <c:strCache>
                 <c:ptCount val="17"/>
-                <c:lvl>
-                  <c:pt idx="0">
-                    <c:v>Jun 5</c:v>
-                  </c:pt>
-                  <c:pt idx="1">
-                    <c:v>Jun 12</c:v>
-                  </c:pt>
-                  <c:pt idx="2">
-                    <c:v>Jun 19</c:v>
-                  </c:pt>
-                  <c:pt idx="3">
-                    <c:v>Jun 26</c:v>
-                  </c:pt>
-                  <c:pt idx="4">
-                    <c:v>Jul 3</c:v>
-                  </c:pt>
-                  <c:pt idx="5">
-                    <c:v>Jul 10</c:v>
-                  </c:pt>
-                  <c:pt idx="6">
-                    <c:v>Jul 17</c:v>
-                  </c:pt>
-                  <c:pt idx="7">
-                    <c:v>Jul 24</c:v>
-                  </c:pt>
-                  <c:pt idx="8">
-                    <c:v>Jul 31</c:v>
-                  </c:pt>
-                  <c:pt idx="9">
-                    <c:v>Aug 7</c:v>
-                  </c:pt>
-                  <c:pt idx="10">
-                    <c:v>Aug 14</c:v>
-                  </c:pt>
-                  <c:pt idx="11">
-                    <c:v>Aug 21</c:v>
-                  </c:pt>
-                  <c:pt idx="12">
-                    <c:v>Aug 28</c:v>
-                  </c:pt>
-                  <c:pt idx="13">
-                    <c:v>Sep 4</c:v>
-                  </c:pt>
-                  <c:pt idx="14">
-                    <c:v>Sep 11</c:v>
-                  </c:pt>
-                  <c:pt idx="15">
-                    <c:v>Sep 18</c:v>
-                  </c:pt>
-                  <c:pt idx="16">
-                    <c:v>Sep 25</c:v>
-                  </c:pt>
-                </c:lvl>
-              </c:multiLvlStrCache>
-            </c:multiLvlStrRef>
+                <c:pt idx="0">
+                  <c:v>Jun 5</c:v>
+                </c:pt>
+                <c:pt idx="1">
+                  <c:v>Jun 12</c:v>
+                </c:pt>
+                <c:pt idx="2">
+                  <c:v>Jun 19</c:v>
+                </c:pt>
+                <c:pt idx="3">
+                  <c:v>Jun 26</c:v>
+                </c:pt>
+                <c:pt idx="4">
+                  <c:v>Jul 3</c:v>
+                </c:pt>
+                <c:pt idx="5">
+                  <c:v>Jul 10</c:v>
+                </c:pt>
+                <c:pt idx="6">
+                  <c:v>Jul 17</c:v>
+                </c:pt>
+                <c:pt idx="7">
+                  <c:v>Jul 24</c:v>
+                </c:pt>
+                <c:pt idx="8">
+                  <c:v>Jul 31</c:v>
+                </c:pt>
+                <c:pt idx="9">
+                  <c:v>Aug 7</c:v>
+                </c:pt>
+                <c:pt idx="10">
+                  <c:v>Aug 14</c:v>
+                </c:pt>
+                <c:pt idx="11">
+                  <c:v>Aug 21</c:v>
+                </c:pt>
+                <c:pt idx="12">
+                  <c:v>Aug 28</c:v>
+                </c:pt>
+                <c:pt idx="13">
+                  <c:v>Sep 4</c:v>
+                </c:pt>
+                <c:pt idx="14">
+                  <c:v>Sep 11</c:v>
+                </c:pt>
+                <c:pt idx="15">
+                  <c:v>Sep 18</c:v>
+                </c:pt>
+                <c:pt idx="16">
+                  <c:v>Sep 25</c:v>
+                </c:pt>
+              </c:strCache>
+            </c:strRef>
           </c:cat>
           <c:val>
             <c:numRef>
@@ -724,7 +678,7 @@
                   <c:v>11.1</c:v>
                 </c:pt>
                 <c:pt idx="3">
-                  <c:v>17.1</c:v>
+                  <c:v>17.100000000000001</c:v>
                 </c:pt>
                 <c:pt idx="4">
                   <c:v>30.3</c:v>
@@ -760,7 +714,7 @@
                   <c:v>41.8</c:v>
                 </c:pt>
                 <c:pt idx="15">
-                  <c:v>34.2</c:v>
+                  <c:v>34.200000000000003</c:v>
                 </c:pt>
                 <c:pt idx="16">
                   <c:v>34.9</c:v>
@@ -769,6 +723,11 @@
             </c:numRef>
           </c:val>
           <c:smooth val="0"/>
+          <c:extLst>
+            <c:ext xmlns:c16="http://schemas.microsoft.com/office/drawing/2014/chart" uri="{C3380CC4-5D6E-409C-BE32-E72D297353CC}">
+              <c16:uniqueId val="{00000000-4327-A349-B4C4-3A6C9708A124}"/>
+            </c:ext>
+          </c:extLst>
         </c:ser>
         <c:ser>
           <c:idx val="1"/>
@@ -785,9 +744,6 @@
             </c:strRef>
           </c:tx>
           <c:spPr>
-            <a:solidFill>
-              <a:srgbClr val="C2502D"/>
-            </a:solidFill>
             <a:ln w="38100" cap="flat">
               <a:solidFill>
                 <a:srgbClr val="C2502D"/>
@@ -797,108 +753,67 @@
             </a:ln>
             <a:effectLst/>
           </c:spPr>
-          <c:invertIfNegative val="0"/>
-          <c:dLbls>
-            <c:numFmt formatCode="#,##0" sourceLinked="0"/>
-            <c:txPr>
-              <a:bodyPr/>
-              <a:lstStyle/>
-              <a:p>
-                <a:pPr>
-                  <a:defRPr b="0" i="0" strike="noStrike" sz="1200" u="none">
-                    <a:solidFill>
-                      <a:srgbClr val="000000"/>
-                    </a:solidFill>
-                    <a:latin typeface="Arial"/>
-                  </a:defRPr>
-                </a:pPr>
-              </a:p>
-            </c:txPr>
-            <c:showLegendKey val="0"/>
-            <c:showVal val="0"/>
-            <c:showCatName val="0"/>
-            <c:showSerName val="0"/>
-            <c:showPercent val="0"/>
-            <c:showBubbleSize val="0"/>
-            <c:showLeaderLines val="0"/>
-          </c:dLbls>
           <c:marker>
             <c:symbol val="none"/>
-            <c:size val="6"/>
-            <c:spPr>
-              <a:solidFill>
-                <a:srgbClr val="C2502D"/>
-              </a:solidFill>
-              <a:ln w="9525" cap="flat">
-                <a:solidFill>
-                  <a:srgbClr val="C2502D"/>
-                </a:solidFill>
-                <a:prstDash val="solid"/>
-                <a:round/>
-              </a:ln>
-              <a:effectLst/>
-            </c:spPr>
           </c:marker>
           <c:cat>
-            <c:multiLvlStrRef>
+            <c:strRef>
               <c:f>Sheet1!$A$2:$A$18</c:f>
-              <c:multiLvlStrCache>
+              <c:strCache>
                 <c:ptCount val="17"/>
-                <c:lvl>
-                  <c:pt idx="0">
-                    <c:v>Jun 5</c:v>
-                  </c:pt>
-                  <c:pt idx="1">
-                    <c:v>Jun 12</c:v>
-                  </c:pt>
-                  <c:pt idx="2">
-                    <c:v>Jun 19</c:v>
-                  </c:pt>
-                  <c:pt idx="3">
-                    <c:v>Jun 26</c:v>
-                  </c:pt>
-                  <c:pt idx="4">
-                    <c:v>Jul 3</c:v>
-                  </c:pt>
-                  <c:pt idx="5">
-                    <c:v>Jul 10</c:v>
-                  </c:pt>
-                  <c:pt idx="6">
-                    <c:v>Jul 17</c:v>
-                  </c:pt>
-                  <c:pt idx="7">
-                    <c:v>Jul 24</c:v>
-                  </c:pt>
-                  <c:pt idx="8">
-                    <c:v>Jul 31</c:v>
-                  </c:pt>
-                  <c:pt idx="9">
-                    <c:v>Aug 7</c:v>
-                  </c:pt>
-                  <c:pt idx="10">
-                    <c:v>Aug 14</c:v>
-                  </c:pt>
-                  <c:pt idx="11">
-                    <c:v>Aug 21</c:v>
-                  </c:pt>
-                  <c:pt idx="12">
-                    <c:v>Aug 28</c:v>
-                  </c:pt>
-                  <c:pt idx="13">
-                    <c:v>Sep 4</c:v>
-                  </c:pt>
-                  <c:pt idx="14">
-                    <c:v>Sep 11</c:v>
-                  </c:pt>
-                  <c:pt idx="15">
-                    <c:v>Sep 18</c:v>
-                  </c:pt>
-                  <c:pt idx="16">
-                    <c:v>Sep 25</c:v>
-                  </c:pt>
-                </c:lvl>
-              </c:multiLvlStrCache>
-            </c:multiLvlStrRef>
+                <c:pt idx="0">
+                  <c:v>Jun 5</c:v>
+                </c:pt>
+                <c:pt idx="1">
+                  <c:v>Jun 12</c:v>
+                </c:pt>
+                <c:pt idx="2">
+                  <c:v>Jun 19</c:v>
+                </c:pt>
+                <c:pt idx="3">
+                  <c:v>Jun 26</c:v>
+                </c:pt>
+                <c:pt idx="4">
+                  <c:v>Jul 3</c:v>
+                </c:pt>
+                <c:pt idx="5">
+                  <c:v>Jul 10</c:v>
+                </c:pt>
+                <c:pt idx="6">
+                  <c:v>Jul 17</c:v>
+                </c:pt>
+                <c:pt idx="7">
+                  <c:v>Jul 24</c:v>
+                </c:pt>
+                <c:pt idx="8">
+                  <c:v>Jul 31</c:v>
+                </c:pt>
+                <c:pt idx="9">
+                  <c:v>Aug 7</c:v>
+                </c:pt>
+                <c:pt idx="10">
+                  <c:v>Aug 14</c:v>
+                </c:pt>
+                <c:pt idx="11">
+                  <c:v>Aug 21</c:v>
+                </c:pt>
+                <c:pt idx="12">
+                  <c:v>Aug 28</c:v>
+                </c:pt>
+                <c:pt idx="13">
+                  <c:v>Sep 4</c:v>
+                </c:pt>
+                <c:pt idx="14">
+                  <c:v>Sep 11</c:v>
+                </c:pt>
+                <c:pt idx="15">
+                  <c:v>Sep 18</c:v>
+                </c:pt>
+                <c:pt idx="16">
+                  <c:v>Sep 25</c:v>
+                </c:pt>
+              </c:strCache>
+            </c:strRef>
           </c:cat>
           <c:val>
             <c:numRef>
@@ -961,35 +876,23 @@
             </c:numRef>
           </c:val>
           <c:smooth val="0"/>
+          <c:extLst>
+            <c:ext xmlns:c16="http://schemas.microsoft.com/office/drawing/2014/chart" uri="{C3380CC4-5D6E-409C-BE32-E72D297353CC}">
+              <c16:uniqueId val="{00000001-4327-A349-B4C4-3A6C9708A124}"/>
+            </c:ext>
+          </c:extLst>
         </c:ser>
         <c:dLbls>
-          <c:numFmt formatCode="#,##0" sourceLinked="0"/>
-          <c:txPr>
-            <a:bodyPr/>
-            <a:lstStyle/>
-            <a:p>
-              <a:pPr>
-                <a:defRPr b="0" i="0" strike="noStrike" sz="1200" u="none">
-                  <a:solidFill>
-                    <a:srgbClr val="000000"/>
-                  </a:solidFill>
-                  <a:latin typeface="Arial"/>
-                </a:defRPr>
-              </a:pPr>
-            </a:p>
-          </c:txPr>
           <c:showLegendKey val="0"/>
           <c:showVal val="0"/>
           <c:showCatName val="0"/>
           <c:showSerName val="0"/>
           <c:showPercent val="0"/>
           <c:showBubbleSize val="0"/>
-          <c:showLeaderLines val="0"/>
         </c:dLbls>
-        <c:marker val="1"/>
+        <c:smooth val="0"/>
         <c:axId val="2094734554"/>
         <c:axId val="2094734552"/>
-        <c:axId val="2094734556"/>
       </c:lineChart>
       <c:catAx>
         <c:axId val="2094734554"/>
@@ -1030,8 +933,9 @@
         <c:crosses val="autoZero"/>
         <c:auto val="1"/>
         <c:lblAlgn val="ctr"/>
+        <c:lblOffset val="100"/>
+        <c:tickLblSkip val="2"/>
         <c:noMultiLvlLbl val="1"/>
-        <c:tickLblSkip val="2"/>
       </c:catAx>
       <c:valAx>
         <c:axId val="2094734552"/>
@@ -1114,6 +1018,7 @@
     </c:legend>
     <c:plotVisOnly val="1"/>
     <c:dispBlanksAs val="span"/>
+    <c:showDLblsOverMax val="1"/>
   </c:chart>
   <c:spPr>
     <a:noFill/>
@@ -1129,9 +1034,11 @@
 </file>
 
 <file path=ppt/charts/chart3.xml><?xml version="1.0" encoding="utf-8"?>
-<c:chartSpace xmlns:c="http://schemas.openxmlformats.org/drawingml/2006/chart" xmlns:a="http://schemas.openxmlformats.org/drawingml/2006/main" xmlns:r="http://schemas.openxmlformats.org/officeDocument/2006/relationships">
+<c:chartSpace xmlns:c="http://schemas.openxmlformats.org/drawingml/2006/chart" xmlns:a="http://schemas.openxmlformats.org/drawingml/2006/main" xmlns:r="http://schemas.openxmlformats.org/officeDocument/2006/relationships" xmlns:c16r2="http://schemas.microsoft.com/office/drawing/2015/06/chart">
   <c:date1904 val="0"/>
+  <c:lang val="en-US"/>
   <c:roundedCorners val="1"/>
+  <c:style val="2"/>
   <c:chart>
     <c:autoTitleDeleted val="1"/>
     <c:plotArea>
@@ -1161,62 +1068,35 @@
             <a:effectLst/>
           </c:spPr>
           <c:invertIfNegative val="0"/>
-          <c:dLbls>
-            <c:numFmt formatCode="+0.00;-0.00;0.00" sourceLinked="0"/>
-            <c:txPr>
-              <a:bodyPr/>
-              <a:lstStyle/>
-              <a:p>
-                <a:pPr>
-                  <a:defRPr b="1" i="0" strike="noStrike" sz="1300" u="none">
-                    <a:solidFill>
-                      <a:srgbClr val="1D2723"/>
-                    </a:solidFill>
-                    <a:latin typeface="Arial"/>
-                  </a:defRPr>
-                </a:pPr>
-              </a:p>
-            </c:txPr>
-            <c:showLegendKey val="0"/>
-            <c:showVal val="1"/>
-            <c:showCatName val="0"/>
-            <c:showSerName val="0"/>
-            <c:showPercent val="0"/>
-            <c:showBubbleSize val="0"/>
-            <c:showLeaderLines val="0"/>
-          </c:dLbls>
           <c:dPt>
             <c:idx val="0"/>
             <c:invertIfNegative val="0"/>
             <c:bubble3D val="0"/>
-            <c:spPr>
-              <a:solidFill>
-                <a:srgbClr val="2E6B4F"/>
-              </a:solidFill>
-              <a:effectLst/>
-            </c:spPr>
+            <c:extLst>
+              <c:ext xmlns:c16="http://schemas.microsoft.com/office/drawing/2014/chart" uri="{C3380CC4-5D6E-409C-BE32-E72D297353CC}">
+                <c16:uniqueId val="{00000001-2BDB-9540-8630-E4E080106463}"/>
+              </c:ext>
+            </c:extLst>
           </c:dPt>
           <c:dPt>
             <c:idx val="1"/>
             <c:invertIfNegative val="0"/>
             <c:bubble3D val="0"/>
-            <c:spPr>
-              <a:solidFill>
-                <a:srgbClr val="2E6B4F"/>
-              </a:solidFill>
-              <a:effectLst/>
-            </c:spPr>
+            <c:extLst>
+              <c:ext xmlns:c16="http://schemas.microsoft.com/office/drawing/2014/chart" uri="{C3380CC4-5D6E-409C-BE32-E72D297353CC}">
+                <c16:uniqueId val="{00000003-2BDB-9540-8630-E4E080106463}"/>
+              </c:ext>
+            </c:extLst>
           </c:dPt>
           <c:dPt>
             <c:idx val="2"/>
             <c:invertIfNegative val="0"/>
             <c:bubble3D val="0"/>
-            <c:spPr>
-              <a:solidFill>
-                <a:srgbClr val="2E6B4F"/>
-              </a:solidFill>
-              <a:effectLst/>
-            </c:spPr>
+            <c:extLst>
+              <c:ext xmlns:c16="http://schemas.microsoft.com/office/drawing/2014/chart" uri="{C3380CC4-5D6E-409C-BE32-E72D297353CC}">
+                <c16:uniqueId val="{00000005-2BDB-9540-8630-E4E080106463}"/>
+              </c:ext>
+            </c:extLst>
           </c:dPt>
           <c:dPt>
             <c:idx val="3"/>
@@ -1228,6 +1108,11 @@
               </a:solidFill>
               <a:effectLst/>
             </c:spPr>
+            <c:extLst>
+              <c:ext xmlns:c16="http://schemas.microsoft.com/office/drawing/2014/chart" uri="{C3380CC4-5D6E-409C-BE32-E72D297353CC}">
+                <c16:uniqueId val="{00000007-2BDB-9540-8630-E4E080106463}"/>
+              </c:ext>
+            </c:extLst>
           </c:dPt>
           <c:dPt>
             <c:idx val="4"/>
@@ -1239,6 +1124,11 @@
               </a:solidFill>
               <a:effectLst/>
             </c:spPr>
+            <c:extLst>
+              <c:ext xmlns:c16="http://schemas.microsoft.com/office/drawing/2014/chart" uri="{C3380CC4-5D6E-409C-BE32-E72D297353CC}">
+                <c16:uniqueId val="{00000009-2BDB-9540-8630-E4E080106463}"/>
+              </c:ext>
+            </c:extLst>
           </c:dPt>
           <c:dPt>
             <c:idx val="5"/>
@@ -1250,6 +1140,11 @@
               </a:solidFill>
               <a:effectLst/>
             </c:spPr>
+            <c:extLst>
+              <c:ext xmlns:c16="http://schemas.microsoft.com/office/drawing/2014/chart" uri="{C3380CC4-5D6E-409C-BE32-E72D297353CC}">
+                <c16:uniqueId val="{0000000B-2BDB-9540-8630-E4E080106463}"/>
+              </c:ext>
+            </c:extLst>
           </c:dPt>
           <c:dPt>
             <c:idx val="6"/>
@@ -1261,48 +1156,88 @@
               </a:solidFill>
               <a:effectLst/>
             </c:spPr>
+            <c:extLst>
+              <c:ext xmlns:c16="http://schemas.microsoft.com/office/drawing/2014/chart" uri="{C3380CC4-5D6E-409C-BE32-E72D297353CC}">
+                <c16:uniqueId val="{0000000D-2BDB-9540-8630-E4E080106463}"/>
+              </c:ext>
+            </c:extLst>
           </c:dPt>
+          <c:dLbls>
+            <c:numFmt formatCode="\+0.00;\-0.00;0.00" sourceLinked="0"/>
+            <c:spPr>
+              <a:noFill/>
+              <a:ln>
+                <a:noFill/>
+              </a:ln>
+              <a:effectLst/>
+            </c:spPr>
+            <c:txPr>
+              <a:bodyPr/>
+              <a:lstStyle/>
+              <a:p>
+                <a:pPr>
+                  <a:defRPr sz="1300" b="1" i="0" u="none" strike="noStrike">
+                    <a:solidFill>
+                      <a:srgbClr val="1D2723"/>
+                    </a:solidFill>
+                    <a:latin typeface="Arial"/>
+                  </a:defRPr>
+                </a:pPr>
+                <a:endParaRPr lang="en-US"/>
+              </a:p>
+            </c:txPr>
+            <c:showLegendKey val="0"/>
+            <c:showVal val="1"/>
+            <c:showCatName val="0"/>
+            <c:showSerName val="0"/>
+            <c:showPercent val="0"/>
+            <c:showBubbleSize val="0"/>
+            <c:showLeaderLines val="0"/>
+            <c:extLst>
+              <c:ext xmlns:c15="http://schemas.microsoft.com/office/drawing/2012/chart" uri="{CE6537A1-D6FC-4f65-9D91-7224C49458BB}">
+                <c15:showLeaderLines val="0"/>
+              </c:ext>
+            </c:extLst>
+          </c:dLbls>
           <c:cat>
-            <c:multiLvlStrRef>
+            <c:strRef>
               <c:f>Sheet1!$A$2:$A$8</c:f>
-              <c:multiLvlStrCache>
+              <c:strCache>
                 <c:ptCount val="7"/>
-                <c:lvl>
-                  <c:pt idx="0">
-                    <c:v>3 wks
+                <c:pt idx="0">
+                  <c:v>3 wks
 before
 *</c:v>
-                  </c:pt>
-                  <c:pt idx="1">
-                    <c:v>2 wks
+                </c:pt>
+                <c:pt idx="1">
+                  <c:v>2 wks
 before
 ***</c:v>
-                  </c:pt>
-                  <c:pt idx="2">
-                    <c:v>1 wk
+                </c:pt>
+                <c:pt idx="2">
+                  <c:v>1 wk
 before
 **</c:v>
-                  </c:pt>
-                  <c:pt idx="3">
-                    <c:v>Publication
+                </c:pt>
+                <c:pt idx="3">
+                  <c:v>Publication
 week</c:v>
-                  </c:pt>
-                  <c:pt idx="4">
-                    <c:v>1 wk
+                </c:pt>
+                <c:pt idx="4">
+                  <c:v>1 wk
 after</c:v>
-                  </c:pt>
-                  <c:pt idx="5">
-                    <c:v>2 wks
+                </c:pt>
+                <c:pt idx="5">
+                  <c:v>2 wks
 after
 *</c:v>
-                  </c:pt>
-                  <c:pt idx="6">
-                    <c:v>3 wks
+                </c:pt>
+                <c:pt idx="6">
+                  <c:v>3 wks
 after</c:v>
-                  </c:pt>
-                </c:lvl>
-              </c:multiLvlStrCache>
-            </c:multiLvlStrRef>
+                </c:pt>
+              </c:strCache>
+            </c:strRef>
           </c:cat>
           <c:val>
             <c:numRef>
@@ -1311,7 +1246,7 @@
                 <c:formatCode>General</c:formatCode>
                 <c:ptCount val="7"/>
                 <c:pt idx="0">
-                  <c:v>0.07493199895744185</c:v>
+                  <c:v>7.4931998957441848E-2</c:v>
                 </c:pt>
                 <c:pt idx="1">
                   <c:v>0.14242849115617315</c:v>
@@ -1320,50 +1255,37 @@
                   <c:v>0.10350314264585725</c:v>
                 </c:pt>
                 <c:pt idx="3">
-                  <c:v>0.004112438518055141</c:v>
+                  <c:v>4.1124385180551408E-3</c:v>
                 </c:pt>
                 <c:pt idx="4">
-                  <c:v>0.0668811341861205</c:v>
+                  <c:v>6.6881134186120503E-2</c:v>
                 </c:pt>
                 <c:pt idx="5">
-                  <c:v>0.07489383348567841</c:v>
+                  <c:v>7.4893833485678407E-2</c:v>
                 </c:pt>
                 <c:pt idx="6">
-                  <c:v>0.012265542936572267</c:v>
+                  <c:v>1.2265542936572267E-2</c:v>
                 </c:pt>
               </c:numCache>
             </c:numRef>
           </c:val>
+          <c:extLst>
+            <c:ext xmlns:c16="http://schemas.microsoft.com/office/drawing/2014/chart" uri="{C3380CC4-5D6E-409C-BE32-E72D297353CC}">
+              <c16:uniqueId val="{0000000E-2BDB-9540-8630-E4E080106463}"/>
+            </c:ext>
+          </c:extLst>
         </c:ser>
         <c:dLbls>
-          <c:numFmt formatCode="+0.00;-0.00;0.00" sourceLinked="0"/>
-          <c:txPr>
-            <a:bodyPr/>
-            <a:lstStyle/>
-            <a:p>
-              <a:pPr>
-                <a:defRPr b="1" i="0" strike="noStrike" sz="1300" u="none">
-                  <a:solidFill>
-                    <a:srgbClr val="1D2723"/>
-                  </a:solidFill>
-                  <a:latin typeface="Arial"/>
-                </a:defRPr>
-              </a:pPr>
-            </a:p>
-          </c:txPr>
           <c:showLegendKey val="0"/>
           <c:showVal val="1"/>
           <c:showCatName val="0"/>
           <c:showSerName val="0"/>
           <c:showPercent val="0"/>
           <c:showBubbleSize val="0"/>
-          <c:showLeaderLines val="0"/>
         </c:dLbls>
         <c:gapWidth val="50"/>
-        <c:overlap val="0"/>
         <c:axId val="2094734554"/>
         <c:axId val="2094734552"/>
-        <c:axId val="2094734556"/>
       </c:barChart>
       <c:catAx>
         <c:axId val="2094734554"/>
@@ -1404,6 +1326,7 @@
         <c:crosses val="autoZero"/>
         <c:auto val="1"/>
         <c:lblAlgn val="ctr"/>
+        <c:lblOffset val="100"/>
         <c:noMultiLvlLbl val="1"/>
       </c:catAx>
       <c:valAx>
@@ -1419,30 +1342,6 @@
         <c:majorTickMark val="out"/>
         <c:minorTickMark val="none"/>
         <c:tickLblPos val="nextTo"/>
-        <c:spPr>
-          <a:ln w="12700" cap="flat">
-            <a:solidFill>
-              <a:srgbClr val="888888"/>
-            </a:solidFill>
-            <a:prstDash val="solid"/>
-            <a:round/>
-          </a:ln>
-        </c:spPr>
-        <c:txPr>
-          <a:bodyPr/>
-          <a:lstStyle/>
-          <a:p>
-            <a:pPr>
-              <a:defRPr sz="1100" b="0" i="0" u="none" strike="noStrike">
-                <a:solidFill>
-                  <a:srgbClr val="5E6A64"/>
-                </a:solidFill>
-                <a:latin typeface="Arial"/>
-              </a:defRPr>
-            </a:pPr>
-            <a:endParaRPr lang="en-US"/>
-          </a:p>
-        </c:txPr>
         <c:crossAx val="2094734554"/>
         <c:crosses val="autoZero"/>
         <c:crossBetween val="between"/>
@@ -1457,6 +1356,7 @@
     </c:plotArea>
     <c:plotVisOnly val="1"/>
     <c:dispBlanksAs val="span"/>
+    <c:showDLblsOverMax val="1"/>
   </c:chart>
   <c:spPr>
     <a:noFill/>
@@ -1493,234 +1393,10 @@
           <a:chExt cx="0" cy="0"/>
         </a:xfrm>
       </p:grpSpPr>
-      <p:sp>
-        <p:nvSpPr>
-          <p:cNvPr id="2" name="Header Placeholder 1"/>
-          <p:cNvSpPr>
-            <a:spLocks noGrp="1"/>
-          </p:cNvSpPr>
-          <p:nvPr>
-            <p:ph type="hdr" sz="quarter"/>
-          </p:nvPr>
-        </p:nvSpPr>
-        <p:spPr>
-          <a:xfrm>
-            <a:off x="0" y="0"/>
-            <a:ext cx="2971800" cy="458788"/>
-          </a:xfrm>
-          <a:prstGeom prst="rect">
-            <a:avLst/>
-          </a:prstGeom>
-        </p:spPr>
-        <p:txBody>
-          <a:bodyPr vert="horz" lIns="91440" tIns="45720" rIns="91440" bIns="45720" rtlCol="0"/>
-          <a:lstStyle>
-            <a:lvl1pPr algn="l">
-              <a:defRPr sz="1200"/>
-            </a:lvl1pPr>
-          </a:lstStyle>
-          <a:p>
-            <a:endParaRPr lang="en-US"/>
-          </a:p>
-        </p:txBody>
-      </p:sp>
-      <p:sp>
-        <p:nvSpPr>
-          <p:cNvPr id="3" name="Date Placeholder 2"/>
-          <p:cNvSpPr>
-            <a:spLocks noGrp="1"/>
-          </p:cNvSpPr>
-          <p:nvPr>
-            <p:ph type="dt" idx="1"/>
-          </p:nvPr>
-        </p:nvSpPr>
-        <p:spPr>
-          <a:xfrm>
-            <a:off x="3884613" y="0"/>
-            <a:ext cx="2971800" cy="458788"/>
-          </a:xfrm>
-          <a:prstGeom prst="rect">
-            <a:avLst/>
-          </a:prstGeom>
-        </p:spPr>
-        <p:txBody>
-          <a:bodyPr vert="horz" lIns="91440" tIns="45720" rIns="91440" bIns="45720" rtlCol="0"/>
-          <a:lstStyle>
-            <a:lvl1pPr algn="r">
-              <a:defRPr sz="1200"/>
-            </a:lvl1pPr>
-          </a:lstStyle>
-          <a:p>
-            <a:fld id="{5282F153-3F37-0F45-9E97-73ACFA13230C}" type="datetimeFigureOut">
-              <a:rPr lang="en-US"/>
-              <a:t>7/23/19</a:t>
-            </a:fld>
-            <a:endParaRPr lang="en-US"/>
-          </a:p>
-        </p:txBody>
-      </p:sp>
-      <p:sp>
-        <p:nvSpPr>
-          <p:cNvPr id="4" name="Slide Image Placeholder 3"/>
-          <p:cNvSpPr>
-            <a:spLocks noGrp="1" noRot="1" noChangeAspect="1"/>
-          </p:cNvSpPr>
-          <p:nvPr>
-            <p:ph type="sldImg" idx="2"/>
-          </p:nvPr>
-        </p:nvSpPr>
-        <p:spPr>
-          <a:xfrm>
-            <a:off x="685800" y="1143000"/>
-            <a:ext cx="5486400" cy="3086100"/>
-          </a:xfrm>
-          <a:prstGeom prst="rect">
-            <a:avLst/>
-          </a:prstGeom>
-          <a:noFill/>
-          <a:ln w="12700">
-            <a:solidFill>
-              <a:prstClr val="black"/>
-            </a:solidFill>
-          </a:ln>
-        </p:spPr>
-        <p:txBody>
-          <a:bodyPr vert="horz" lIns="91440" tIns="45720" rIns="91440" bIns="45720" rtlCol="0" anchor="ctr"/>
-          <a:lstStyle/>
-          <a:p>
-            <a:endParaRPr lang="en-US"/>
-          </a:p>
-        </p:txBody>
-      </p:sp>
-      <p:sp>
-        <p:nvSpPr>
-          <p:cNvPr id="5" name="Notes Placeholder 4"/>
-          <p:cNvSpPr>
-            <a:spLocks noGrp="1"/>
-          </p:cNvSpPr>
-          <p:nvPr>
-            <p:ph type="body" sz="quarter" idx="3"/>
-          </p:nvPr>
-        </p:nvSpPr>
-        <p:spPr>
-          <a:xfrm>
-            <a:off x="685800" y="4400550"/>
-            <a:ext cx="5486400" cy="3600450"/>
-          </a:xfrm>
-          <a:prstGeom prst="rect">
-            <a:avLst/>
-          </a:prstGeom>
-        </p:spPr>
-        <p:txBody>
-          <a:bodyPr vert="horz" lIns="91440" tIns="45720" rIns="91440" bIns="45720" rtlCol="0"/>
-          <a:lstStyle/>
-          <a:p>
-            <a:pPr lvl="0"/>
-            <a:r>
-              <a:rPr lang="en-US"/>
-              <a:t>Click to edit Master text styles</a:t>
-            </a:r>
-          </a:p>
-          <a:p>
-            <a:pPr lvl="1"/>
-            <a:r>
-              <a:rPr lang="en-US"/>
-              <a:t>Second level</a:t>
-            </a:r>
-          </a:p>
-          <a:p>
-            <a:pPr lvl="2"/>
-            <a:r>
-              <a:rPr lang="en-US"/>
-              <a:t>Third level</a:t>
-            </a:r>
-          </a:p>
-          <a:p>
-            <a:pPr lvl="3"/>
-            <a:r>
-              <a:rPr lang="en-US"/>
-              <a:t>Fourth level</a:t>
-            </a:r>
-          </a:p>
-          <a:p>
-            <a:pPr lvl="4"/>
-            <a:r>
-              <a:rPr lang="en-US"/>
-              <a:t>Fifth level</a:t>
-            </a:r>
-          </a:p>
-        </p:txBody>
-      </p:sp>
-      <p:sp>
-        <p:nvSpPr>
-          <p:cNvPr id="6" name="Footer Placeholder 5"/>
-          <p:cNvSpPr>
-            <a:spLocks noGrp="1"/>
-          </p:cNvSpPr>
-          <p:nvPr>
-            <p:ph type="ftr" sz="quarter" idx="4"/>
-          </p:nvPr>
-        </p:nvSpPr>
-        <p:spPr>
-          <a:xfrm>
-            <a:off x="0" y="8685213"/>
-            <a:ext cx="2971800" cy="458787"/>
-          </a:xfrm>
-          <a:prstGeom prst="rect">
-            <a:avLst/>
-          </a:prstGeom>
-        </p:spPr>
-        <p:txBody>
-          <a:bodyPr vert="horz" lIns="91440" tIns="45720" rIns="91440" bIns="45720" rtlCol="0" anchor="b"/>
-          <a:lstStyle>
-            <a:lvl1pPr algn="l">
-              <a:defRPr sz="1200"/>
-            </a:lvl1pPr>
-          </a:lstStyle>
-          <a:p>
-            <a:endParaRPr lang="en-US"/>
-          </a:p>
-        </p:txBody>
-      </p:sp>
-      <p:sp>
-        <p:nvSpPr>
-          <p:cNvPr id="7" name="Slide Number Placeholder 6"/>
-          <p:cNvSpPr>
-            <a:spLocks noGrp="1"/>
-          </p:cNvSpPr>
-          <p:nvPr>
-            <p:ph type="sldNum" sz="quarter" idx="5"/>
-          </p:nvPr>
-        </p:nvSpPr>
-        <p:spPr>
-          <a:xfrm>
-            <a:off x="3884613" y="8685213"/>
-            <a:ext cx="2971800" cy="458787"/>
-          </a:xfrm>
-          <a:prstGeom prst="rect">
-            <a:avLst/>
-          </a:prstGeom>
-        </p:spPr>
-        <p:txBody>
-          <a:bodyPr vert="horz" lIns="91440" tIns="45720" rIns="91440" bIns="45720" rtlCol="0" anchor="b"/>
-          <a:lstStyle>
-            <a:lvl1pPr algn="r">
-              <a:defRPr sz="1200"/>
-            </a:lvl1pPr>
-          </a:lstStyle>
-          <a:p>
-            <a:fld id="{CE5E9CC1-C706-0F49-92D6-E571CC5EEA8F}" type="slidenum">
-              <a:rPr lang="en-US"/>
-              <a:t>‹#›</a:t>
-            </a:fld>
-            <a:endParaRPr lang="en-US"/>
-          </a:p>
-        </p:txBody>
-      </p:sp>
     </p:spTree>
     <p:extLst>
       <p:ext uri="{BB962C8B-B14F-4D97-AF65-F5344CB8AC3E}">
-        <p14:creationId xmlns:p14="http://schemas.microsoft.com/office/powerpoint/2010/main" val="1024086991"/>
+        <p14:creationId xmlns:p14="http://schemas.microsoft.com/office/powerpoint/2010/main" val="130670617"/>
       </p:ext>
     </p:extLst>
   </p:cSld>
@@ -1871,7 +1547,6 @@
 • One question: does the futures market price weather before the data does?
 • Road map: the problem, the data and who needs it, then the plan</a:t>
             </a:r>
-            <a:endParaRPr lang="en-US" dirty="0"/>
           </a:p>
         </p:txBody>
       </p:sp>
@@ -1966,7 +1641,6 @@
 • Phases follow CRISP-ML(Q): each has a validation gate
 • Guardrails: publication-date data, out of sample, every result re-run without 2012</a:t>
             </a:r>
-            <a:endParaRPr lang="en-US" dirty="0"/>
           </a:p>
         </p:txBody>
       </p:sp>
@@ -2059,7 +1733,6 @@
 • Extensions alongside, as time allows
 • Early December — write-up and final presentation</a:t>
             </a:r>
-            <a:endParaRPr lang="en-US" dirty="0"/>
           </a:p>
         </p:txBody>
       </p:sp>
@@ -2152,7 +1825,6 @@
 • Contract rolls → cross-check the CORN fund, control roll dates
 • Five points too crude → USDA county weights</a:t>
             </a:r>
-            <a:endParaRPr lang="en-US" dirty="0"/>
           </a:p>
         </p:txBody>
       </p:sp>
@@ -2244,7 +1916,6 @@
 • Test whether a risk score adds anything new
 • Thanks — happy to take questions</a:t>
             </a:r>
-            <a:endParaRPr lang="en-US" dirty="0"/>
           </a:p>
         </p:txBody>
       </p:sp>
@@ -2338,7 +2009,6 @@
 • Hard part 2: observations publish late; markets trade forecasts continuously
 • So: can free climate data measure supply shocks, and tell the market anything new?</a:t>
             </a:r>
-            <a:endParaRPr lang="en-US" dirty="0"/>
           </a:p>
         </p:txBody>
       </p:sp>
@@ -2430,7 +2100,6 @@
 • Value — does a risk score beat what prices already contain? Out of sample
 • Stretch: are cocoa and coffee slower? does it reach agribusiness stocks?</a:t>
             </a:r>
-            <a:endParaRPr lang="en-US" dirty="0"/>
           </a:p>
         </p:txBody>
       </p:sp>
@@ -2525,7 +2194,6 @@
 • Policymakers and consumers — food security, prices
 • Land this: a validated score helps everyone who does not trade</a:t>
             </a:r>
-            <a:endParaRPr lang="en-US" dirty="0"/>
           </a:p>
         </p:txBody>
       </p:sp>
@@ -2620,7 +2288,6 @@
 • Next: NOAA Storm Events, and USDA county production (free key) for weights
 • Everything but USDA already pulled and checked</a:t>
             </a:r>
-            <a:endParaRPr lang="en-US" dirty="0"/>
           </a:p>
         </p:txBody>
       </p:sp>
@@ -2713,7 +2380,6 @@
 • Without 2012: −0.43, still significant. July heat alone −0.78
 • Point: the measurement works even this crude</a:t>
             </a:r>
-            <a:endParaRPr lang="en-US" dirty="0"/>
           </a:p>
         </p:txBody>
       </p:sp>
@@ -2807,7 +2473,6 @@
 • Maps publish two days after their date
 • Drought was real: yields −22% vs trend. The market did not wait for the data</a:t>
             </a:r>
-            <a:endParaRPr lang="en-US" dirty="0"/>
           </a:p>
         </p:txBody>
       </p:sp>
@@ -2901,7 +2566,6 @@
 • Annual story is almost all 2012: +0.42 → +0.07
 • So the market may already know — the project measures how early</a:t>
             </a:r>
-            <a:endParaRPr lang="en-US" dirty="0"/>
           </a:p>
         </p:txBody>
       </p:sp>
@@ -2995,7 +2659,6 @@
 • If the market already prices weather, that was only the 10%
 • Caveat: enterprise rule, I am one person — it guides effort, not a change programme</a:t>
             </a:r>
-            <a:endParaRPr lang="en-US" dirty="0"/>
           </a:p>
         </p:txBody>
       </p:sp>
@@ -3077,7 +2740,7 @@
           </a:prstGeom>
           <a:extLst>
             <a:ext uri="{C572A759-6A51-4108-AA02-DFA0A04FC94B}">
-              <ma14:wrappingTextBoxFlag xmlns:ma14="http://schemas.microsoft.com/office/mac/drawingml/2011/main" val="0"/>
+              <ma14:wrappingTextBoxFlag xmlns:ma14="http://schemas.microsoft.com/office/mac/drawingml/2011/main" xmlns="" val="0"/>
             </a:ext>
           </a:extLst>
         </p:spPr>
@@ -3098,8 +2761,8 @@
           <a:p>
             <a:pPr algn="r"/>
             <a:fld id="{F7021451-1387-4CA6-816F-3879F97B5CBC}" type="slidenum">
-              <a:rPr b="0" lang="en-US"/>
-              <a:t>1000</a:t>
+              <a:rPr lang="en-US" b="0"/>
+              <a:t>‹#›</a:t>
             </a:fld>
             <a:endParaRPr lang="en-US"/>
           </a:p>
@@ -3116,6 +2779,11 @@
 <file path=ppt/slideMasters/slideMaster1.xml><?xml version="1.0" encoding="utf-8"?>
 <p:sldMaster xmlns:a="http://schemas.openxmlformats.org/drawingml/2006/main" xmlns:r="http://schemas.openxmlformats.org/officeDocument/2006/relationships" xmlns:p="http://schemas.openxmlformats.org/presentationml/2006/main">
   <p:cSld>
+    <p:bg>
+      <p:bgRef idx="1001">
+        <a:schemeClr val="bg1"/>
+      </p:bgRef>
+    </p:bg>
     <p:spTree>
       <p:nvGrpSpPr>
         <p:cNvPr id="1" name=""/>
@@ -3150,7 +2818,7 @@
           </a:prstGeom>
           <a:extLst>
             <a:ext uri="{C572A759-6A51-4108-AA02-DFA0A04FC94B}">
-              <ma14:wrappingTextBoxFlag xmlns:ma14="http://schemas.microsoft.com/office/mac/drawingml/2011/main" val="0"/>
+              <ma14:wrappingTextBoxFlag xmlns:ma14="http://schemas.microsoft.com/office/mac/drawingml/2011/main" xmlns="" val="0"/>
             </a:ext>
           </a:extLst>
         </p:spPr>
@@ -3171,8 +2839,8 @@
           <a:p>
             <a:pPr algn="r"/>
             <a:fld id="{F7021451-1387-4CA6-816F-3879F97B5CBC}" type="slidenum">
-              <a:rPr b="0" lang="en-US"/>
-              <a:t>null</a:t>
+              <a:rPr lang="en-US" b="0"/>
+              <a:t>‹#›</a:t>
             </a:fld>
             <a:endParaRPr lang="en-US"/>
           </a:p>
@@ -3446,6 +3114,7 @@
         <a:solidFill>
           <a:srgbClr val="16302A"/>
         </a:solidFill>
+        <a:effectLst/>
       </p:bgPr>
     </p:bg>
     <p:spTree>
@@ -3483,11 +3152,11 @@
           <a:bodyPr wrap="square" lIns="0" tIns="0" rIns="0" bIns="0" rtlCol="0" anchor="ctr"/>
           <a:lstStyle/>
           <a:p>
-            <a:pPr indent="0" marL="0">
+            <a:pPr marL="0" indent="0">
               <a:buNone/>
             </a:pPr>
             <a:r>
-              <a:rPr lang="en-US" sz="1300" b="1" spc="200" kern="0" dirty="0">
+              <a:rPr lang="en-US" sz="1300" b="1" kern="0" spc="200" dirty="0">
                 <a:solidFill>
                   <a:srgbClr val="E1A624"/>
                 </a:solidFill>
@@ -3522,7 +3191,7 @@
           <a:bodyPr wrap="square" lIns="0" tIns="0" rIns="0" bIns="0" rtlCol="0" anchor="t"/>
           <a:lstStyle/>
           <a:p>
-            <a:pPr indent="0" marL="0">
+            <a:pPr marL="0" indent="0">
               <a:buNone/>
             </a:pPr>
             <a:r>
@@ -3561,7 +3230,7 @@
           <a:bodyPr wrap="square" lIns="0" tIns="0" rIns="0" bIns="0" rtlCol="0" anchor="t"/>
           <a:lstStyle/>
           <a:p>
-            <a:pPr indent="0" marL="0">
+            <a:pPr marL="0" indent="0">
               <a:buNone/>
             </a:pPr>
             <a:r>
@@ -3600,7 +3269,7 @@
           <a:bodyPr wrap="square" lIns="0" tIns="0" rIns="0" bIns="0" rtlCol="0" anchor="ctr"/>
           <a:lstStyle/>
           <a:p>
-            <a:pPr indent="0" marL="0">
+            <a:pPr marL="0" indent="0">
               <a:buNone/>
             </a:pPr>
             <a:r>
@@ -3642,17 +3311,24 @@
             <a:prstDash val="solid"/>
           </a:ln>
         </p:spPr>
+        <p:txBody>
+          <a:bodyPr/>
+          <a:lstStyle/>
+          <a:p>
+            <a:endParaRPr lang="en-US"/>
+          </a:p>
+        </p:txBody>
       </p:sp>
       <p:pic>
         <p:nvPicPr>
-          <p:cNvPr id="7" name="Image 0" descr="preencoded.png">    </p:cNvPr>
+          <p:cNvPr id="7" name="Image 0" descr="preencoded.png"/>
           <p:cNvPicPr>
             <a:picLocks noChangeAspect="1"/>
           </p:cNvPicPr>
           <p:nvPr/>
         </p:nvPicPr>
         <p:blipFill>
-          <a:blip r:embed="rId1"/>
+          <a:blip r:embed="rId3"/>
           <a:stretch>
             <a:fillRect/>
           </a:stretch>
@@ -3691,17 +3367,24 @@
             <a:prstDash val="solid"/>
           </a:ln>
         </p:spPr>
+        <p:txBody>
+          <a:bodyPr/>
+          <a:lstStyle/>
+          <a:p>
+            <a:endParaRPr lang="en-US"/>
+          </a:p>
+        </p:txBody>
       </p:sp>
       <p:pic>
         <p:nvPicPr>
-          <p:cNvPr id="9" name="Image 1" descr="preencoded.png">    </p:cNvPr>
+          <p:cNvPr id="9" name="Image 1" descr="preencoded.png"/>
           <p:cNvPicPr>
             <a:picLocks noChangeAspect="1"/>
           </p:cNvPicPr>
           <p:nvPr/>
         </p:nvPicPr>
         <p:blipFill>
-          <a:blip r:embed="rId2"/>
+          <a:blip r:embed="rId4"/>
           <a:stretch>
             <a:fillRect/>
           </a:stretch>
@@ -3740,17 +3423,24 @@
             <a:prstDash val="solid"/>
           </a:ln>
         </p:spPr>
+        <p:txBody>
+          <a:bodyPr/>
+          <a:lstStyle/>
+          <a:p>
+            <a:endParaRPr lang="en-US"/>
+          </a:p>
+        </p:txBody>
       </p:sp>
       <p:pic>
         <p:nvPicPr>
-          <p:cNvPr id="11" name="Image 2" descr="preencoded.png">    </p:cNvPr>
+          <p:cNvPr id="11" name="Image 2" descr="preencoded.png"/>
           <p:cNvPicPr>
             <a:picLocks noChangeAspect="1"/>
           </p:cNvPicPr>
           <p:nvPr/>
         </p:nvPicPr>
         <p:blipFill>
-          <a:blip r:embed="rId3"/>
+          <a:blip r:embed="rId5"/>
           <a:stretch>
             <a:fillRect/>
           </a:stretch>
@@ -3811,7 +3501,7 @@
           <a:bodyPr wrap="square" lIns="0" tIns="0" rIns="0" bIns="0" rtlCol="0" anchor="ctr"/>
           <a:lstStyle/>
           <a:p>
-            <a:pPr indent="0" marL="0">
+            <a:pPr marL="0" indent="0">
               <a:buNone/>
             </a:pPr>
             <a:r>
@@ -3850,7 +3540,7 @@
           <a:bodyPr wrap="square" lIns="0" tIns="0" rIns="0" bIns="0" rtlCol="0" anchor="ctr"/>
           <a:lstStyle/>
           <a:p>
-            <a:pPr indent="0" marL="0">
+            <a:pPr marL="0" indent="0">
               <a:buNone/>
             </a:pPr>
             <a:r>
@@ -3890,6 +3580,13 @@
             <a:prstDash val="solid"/>
           </a:ln>
         </p:spPr>
+        <p:txBody>
+          <a:bodyPr/>
+          <a:lstStyle/>
+          <a:p>
+            <a:endParaRPr lang="en-US"/>
+          </a:p>
+        </p:txBody>
       </p:sp>
       <p:sp>
         <p:nvSpPr>
@@ -3915,6 +3612,13 @@
             <a:prstDash val="solid"/>
           </a:ln>
         </p:spPr>
+        <p:txBody>
+          <a:bodyPr/>
+          <a:lstStyle/>
+          <a:p>
+            <a:endParaRPr lang="en-US"/>
+          </a:p>
+        </p:txBody>
       </p:sp>
       <p:sp>
         <p:nvSpPr>
@@ -3937,7 +3641,7 @@
           <a:bodyPr wrap="square" lIns="0" tIns="0" rIns="0" bIns="0" rtlCol="0" anchor="ctr"/>
           <a:lstStyle/>
           <a:p>
-            <a:pPr algn="ctr" indent="0" marL="0">
+            <a:pPr marL="0" indent="0" algn="ctr">
               <a:buNone/>
             </a:pPr>
             <a:r>
@@ -3981,17 +3685,24 @@
             <a:prstDash val="solid"/>
           </a:ln>
         </p:spPr>
+        <p:txBody>
+          <a:bodyPr/>
+          <a:lstStyle/>
+          <a:p>
+            <a:endParaRPr lang="en-US"/>
+          </a:p>
+        </p:txBody>
       </p:sp>
       <p:pic>
         <p:nvPicPr>
-          <p:cNvPr id="8" name="Image 0" descr="preencoded.png">    </p:cNvPr>
+          <p:cNvPr id="8" name="Image 0" descr="preencoded.png"/>
           <p:cNvPicPr>
             <a:picLocks noChangeAspect="1"/>
           </p:cNvPicPr>
           <p:nvPr/>
         </p:nvPicPr>
         <p:blipFill>
-          <a:blip r:embed="rId1"/>
+          <a:blip r:embed="rId3"/>
           <a:stretch>
             <a:fillRect/>
           </a:stretch>
@@ -4027,7 +3738,7 @@
           <a:bodyPr wrap="square" lIns="0" tIns="0" rIns="0" bIns="0" rtlCol="0" anchor="t"/>
           <a:lstStyle/>
           <a:p>
-            <a:pPr indent="0" marL="0">
+            <a:pPr marL="0" indent="0">
               <a:buNone/>
             </a:pPr>
             <a:r>
@@ -4066,7 +3777,7 @@
           <a:bodyPr wrap="square" lIns="0" tIns="0" rIns="0" bIns="0" rtlCol="0" anchor="t"/>
           <a:lstStyle/>
           <a:p>
-            <a:pPr indent="0" marL="0">
+            <a:pPr marL="0" indent="0">
               <a:buNone/>
             </a:pPr>
             <a:r>
@@ -4108,6 +3819,13 @@
             <a:prstDash val="solid"/>
           </a:ln>
         </p:spPr>
+        <p:txBody>
+          <a:bodyPr/>
+          <a:lstStyle/>
+          <a:p>
+            <a:endParaRPr lang="en-US"/>
+          </a:p>
+        </p:txBody>
       </p:sp>
       <p:sp>
         <p:nvSpPr>
@@ -4130,7 +3848,7 @@
           <a:bodyPr wrap="square" lIns="0" tIns="0" rIns="0" bIns="0" rtlCol="0" anchor="ctr"/>
           <a:lstStyle/>
           <a:p>
-            <a:pPr algn="ctr" indent="0" marL="0">
+            <a:pPr marL="0" indent="0" algn="ctr">
               <a:buNone/>
             </a:pPr>
             <a:r>
@@ -4174,17 +3892,24 @@
             <a:prstDash val="solid"/>
           </a:ln>
         </p:spPr>
+        <p:txBody>
+          <a:bodyPr/>
+          <a:lstStyle/>
+          <a:p>
+            <a:endParaRPr lang="en-US"/>
+          </a:p>
+        </p:txBody>
       </p:sp>
       <p:pic>
         <p:nvPicPr>
-          <p:cNvPr id="14" name="Image 1" descr="preencoded.png">    </p:cNvPr>
+          <p:cNvPr id="14" name="Image 1" descr="preencoded.png"/>
           <p:cNvPicPr>
             <a:picLocks noChangeAspect="1"/>
           </p:cNvPicPr>
           <p:nvPr/>
         </p:nvPicPr>
         <p:blipFill>
-          <a:blip r:embed="rId2"/>
+          <a:blip r:embed="rId4"/>
           <a:stretch>
             <a:fillRect/>
           </a:stretch>
@@ -4220,7 +3945,7 @@
           <a:bodyPr wrap="square" lIns="0" tIns="0" rIns="0" bIns="0" rtlCol="0" anchor="t"/>
           <a:lstStyle/>
           <a:p>
-            <a:pPr indent="0" marL="0">
+            <a:pPr marL="0" indent="0">
               <a:buNone/>
             </a:pPr>
             <a:r>
@@ -4259,7 +3984,7 @@
           <a:bodyPr wrap="square" lIns="0" tIns="0" rIns="0" bIns="0" rtlCol="0" anchor="t"/>
           <a:lstStyle/>
           <a:p>
-            <a:pPr indent="0" marL="0">
+            <a:pPr marL="0" indent="0">
               <a:buNone/>
             </a:pPr>
             <a:r>
@@ -4301,6 +4026,13 @@
             <a:prstDash val="solid"/>
           </a:ln>
         </p:spPr>
+        <p:txBody>
+          <a:bodyPr/>
+          <a:lstStyle/>
+          <a:p>
+            <a:endParaRPr lang="en-US"/>
+          </a:p>
+        </p:txBody>
       </p:sp>
       <p:sp>
         <p:nvSpPr>
@@ -4323,7 +4055,7 @@
           <a:bodyPr wrap="square" lIns="0" tIns="0" rIns="0" bIns="0" rtlCol="0" anchor="ctr"/>
           <a:lstStyle/>
           <a:p>
-            <a:pPr algn="ctr" indent="0" marL="0">
+            <a:pPr marL="0" indent="0" algn="ctr">
               <a:buNone/>
             </a:pPr>
             <a:r>
@@ -4367,17 +4099,24 @@
             <a:prstDash val="solid"/>
           </a:ln>
         </p:spPr>
+        <p:txBody>
+          <a:bodyPr/>
+          <a:lstStyle/>
+          <a:p>
+            <a:endParaRPr lang="en-US"/>
+          </a:p>
+        </p:txBody>
       </p:sp>
       <p:pic>
         <p:nvPicPr>
-          <p:cNvPr id="20" name="Image 2" descr="preencoded.png">    </p:cNvPr>
+          <p:cNvPr id="20" name="Image 2" descr="preencoded.png"/>
           <p:cNvPicPr>
             <a:picLocks noChangeAspect="1"/>
           </p:cNvPicPr>
           <p:nvPr/>
         </p:nvPicPr>
         <p:blipFill>
-          <a:blip r:embed="rId3"/>
+          <a:blip r:embed="rId5"/>
           <a:stretch>
             <a:fillRect/>
           </a:stretch>
@@ -4413,7 +4152,7 @@
           <a:bodyPr wrap="square" lIns="0" tIns="0" rIns="0" bIns="0" rtlCol="0" anchor="t"/>
           <a:lstStyle/>
           <a:p>
-            <a:pPr indent="0" marL="0">
+            <a:pPr marL="0" indent="0">
               <a:buNone/>
             </a:pPr>
             <a:r>
@@ -4452,7 +4191,7 @@
           <a:bodyPr wrap="square" lIns="0" tIns="0" rIns="0" bIns="0" rtlCol="0" anchor="t"/>
           <a:lstStyle/>
           <a:p>
-            <a:pPr indent="0" marL="0">
+            <a:pPr marL="0" indent="0">
               <a:buNone/>
             </a:pPr>
             <a:r>
@@ -4494,6 +4233,13 @@
             <a:prstDash val="solid"/>
           </a:ln>
         </p:spPr>
+        <p:txBody>
+          <a:bodyPr/>
+          <a:lstStyle/>
+          <a:p>
+            <a:endParaRPr lang="en-US"/>
+          </a:p>
+        </p:txBody>
       </p:sp>
       <p:sp>
         <p:nvSpPr>
@@ -4516,7 +4262,7 @@
           <a:bodyPr wrap="square" lIns="0" tIns="0" rIns="0" bIns="0" rtlCol="0" anchor="ctr"/>
           <a:lstStyle/>
           <a:p>
-            <a:pPr algn="ctr" indent="0" marL="0">
+            <a:pPr marL="0" indent="0" algn="ctr">
               <a:buNone/>
             </a:pPr>
             <a:r>
@@ -4560,17 +4306,24 @@
             <a:prstDash val="solid"/>
           </a:ln>
         </p:spPr>
+        <p:txBody>
+          <a:bodyPr/>
+          <a:lstStyle/>
+          <a:p>
+            <a:endParaRPr lang="en-US"/>
+          </a:p>
+        </p:txBody>
       </p:sp>
       <p:pic>
         <p:nvPicPr>
-          <p:cNvPr id="26" name="Image 3" descr="preencoded.png">    </p:cNvPr>
+          <p:cNvPr id="26" name="Image 3" descr="preencoded.png"/>
           <p:cNvPicPr>
             <a:picLocks noChangeAspect="1"/>
           </p:cNvPicPr>
           <p:nvPr/>
         </p:nvPicPr>
         <p:blipFill>
-          <a:blip r:embed="rId4"/>
+          <a:blip r:embed="rId6"/>
           <a:stretch>
             <a:fillRect/>
           </a:stretch>
@@ -4606,7 +4359,7 @@
           <a:bodyPr wrap="square" lIns="0" tIns="0" rIns="0" bIns="0" rtlCol="0" anchor="t"/>
           <a:lstStyle/>
           <a:p>
-            <a:pPr indent="0" marL="0">
+            <a:pPr marL="0" indent="0">
               <a:buNone/>
             </a:pPr>
             <a:r>
@@ -4645,7 +4398,7 @@
           <a:bodyPr wrap="square" lIns="0" tIns="0" rIns="0" bIns="0" rtlCol="0" anchor="t"/>
           <a:lstStyle/>
           <a:p>
-            <a:pPr indent="0" marL="0">
+            <a:pPr marL="0" indent="0">
               <a:buNone/>
             </a:pPr>
             <a:r>
@@ -4687,6 +4440,13 @@
             <a:prstDash val="solid"/>
           </a:ln>
         </p:spPr>
+        <p:txBody>
+          <a:bodyPr/>
+          <a:lstStyle/>
+          <a:p>
+            <a:endParaRPr lang="en-US"/>
+          </a:p>
+        </p:txBody>
       </p:sp>
       <p:sp>
         <p:nvSpPr>
@@ -4709,7 +4469,7 @@
           <a:bodyPr wrap="square" lIns="0" tIns="0" rIns="0" bIns="0" rtlCol="0" anchor="ctr"/>
           <a:lstStyle/>
           <a:p>
-            <a:pPr algn="ctr" indent="0" marL="0">
+            <a:pPr marL="0" indent="0" algn="ctr">
               <a:buNone/>
             </a:pPr>
             <a:r>
@@ -4753,17 +4513,24 @@
             <a:prstDash val="solid"/>
           </a:ln>
         </p:spPr>
+        <p:txBody>
+          <a:bodyPr/>
+          <a:lstStyle/>
+          <a:p>
+            <a:endParaRPr lang="en-US"/>
+          </a:p>
+        </p:txBody>
       </p:sp>
       <p:pic>
         <p:nvPicPr>
-          <p:cNvPr id="32" name="Image 4" descr="preencoded.png">    </p:cNvPr>
+          <p:cNvPr id="32" name="Image 4" descr="preencoded.png"/>
           <p:cNvPicPr>
             <a:picLocks noChangeAspect="1"/>
           </p:cNvPicPr>
           <p:nvPr/>
         </p:nvPicPr>
         <p:blipFill>
-          <a:blip r:embed="rId5"/>
+          <a:blip r:embed="rId7"/>
           <a:stretch>
             <a:fillRect/>
           </a:stretch>
@@ -4799,7 +4566,7 @@
           <a:bodyPr wrap="square" lIns="0" tIns="0" rIns="0" bIns="0" rtlCol="0" anchor="t"/>
           <a:lstStyle/>
           <a:p>
-            <a:pPr indent="0" marL="0">
+            <a:pPr marL="0" indent="0">
               <a:buNone/>
             </a:pPr>
             <a:r>
@@ -4838,7 +4605,7 @@
           <a:bodyPr wrap="square" lIns="0" tIns="0" rIns="0" bIns="0" rtlCol="0" anchor="t"/>
           <a:lstStyle/>
           <a:p>
-            <a:pPr indent="0" marL="0">
+            <a:pPr marL="0" indent="0">
               <a:buNone/>
             </a:pPr>
             <a:r>
@@ -4877,11 +4644,11 @@
           <a:bodyPr wrap="square" lIns="0" tIns="0" rIns="0" bIns="0" rtlCol="0" anchor="ctr"/>
           <a:lstStyle/>
           <a:p>
-            <a:pPr indent="0" marL="0">
+            <a:pPr marL="0" indent="0">
               <a:buNone/>
             </a:pPr>
             <a:r>
-              <a:rPr lang="en-US" sz="1200" b="1" spc="200" kern="0" dirty="0">
+              <a:rPr lang="en-US" sz="1200" b="1" kern="0" spc="200" dirty="0">
                 <a:solidFill>
                   <a:srgbClr val="5E6A64"/>
                 </a:solidFill>
@@ -4919,17 +4686,24 @@
             <a:prstDash val="solid"/>
           </a:ln>
         </p:spPr>
+        <p:txBody>
+          <a:bodyPr/>
+          <a:lstStyle/>
+          <a:p>
+            <a:endParaRPr lang="en-US"/>
+          </a:p>
+        </p:txBody>
       </p:sp>
       <p:pic>
         <p:nvPicPr>
-          <p:cNvPr id="37" name="Image 5" descr="preencoded.png">    </p:cNvPr>
+          <p:cNvPr id="37" name="Image 5" descr="preencoded.png"/>
           <p:cNvPicPr>
             <a:picLocks noChangeAspect="1"/>
           </p:cNvPicPr>
           <p:nvPr/>
         </p:nvPicPr>
         <p:blipFill>
-          <a:blip r:embed="rId6"/>
+          <a:blip r:embed="rId8"/>
           <a:stretch>
             <a:fillRect/>
           </a:stretch>
@@ -4965,7 +4739,7 @@
           <a:bodyPr wrap="square" lIns="0" tIns="0" rIns="0" bIns="0" rtlCol="0" anchor="ctr"/>
           <a:lstStyle/>
           <a:p>
-            <a:pPr indent="0" marL="0">
+            <a:pPr marL="0" indent="0">
               <a:buNone/>
             </a:pPr>
             <a:r>
@@ -5007,17 +4781,24 @@
             <a:prstDash val="solid"/>
           </a:ln>
         </p:spPr>
+        <p:txBody>
+          <a:bodyPr/>
+          <a:lstStyle/>
+          <a:p>
+            <a:endParaRPr lang="en-US"/>
+          </a:p>
+        </p:txBody>
       </p:sp>
       <p:pic>
         <p:nvPicPr>
-          <p:cNvPr id="40" name="Image 6" descr="preencoded.png">    </p:cNvPr>
+          <p:cNvPr id="40" name="Image 6" descr="preencoded.png"/>
           <p:cNvPicPr>
             <a:picLocks noChangeAspect="1"/>
           </p:cNvPicPr>
           <p:nvPr/>
         </p:nvPicPr>
         <p:blipFill>
-          <a:blip r:embed="rId7"/>
+          <a:blip r:embed="rId8"/>
           <a:stretch>
             <a:fillRect/>
           </a:stretch>
@@ -5053,7 +4834,7 @@
           <a:bodyPr wrap="square" lIns="0" tIns="0" rIns="0" bIns="0" rtlCol="0" anchor="ctr"/>
           <a:lstStyle/>
           <a:p>
-            <a:pPr indent="0" marL="0">
+            <a:pPr marL="0" indent="0">
               <a:buNone/>
             </a:pPr>
             <a:r>
@@ -5095,10 +4876,17 @@
             <a:prstDash val="solid"/>
           </a:ln>
         </p:spPr>
+        <p:txBody>
+          <a:bodyPr/>
+          <a:lstStyle/>
+          <a:p>
+            <a:endParaRPr lang="en-US"/>
+          </a:p>
+        </p:txBody>
       </p:sp>
       <p:pic>
         <p:nvPicPr>
-          <p:cNvPr id="43" name="Image 7" descr="preencoded.png">    </p:cNvPr>
+          <p:cNvPr id="43" name="Image 7" descr="preencoded.png"/>
           <p:cNvPicPr>
             <a:picLocks noChangeAspect="1"/>
           </p:cNvPicPr>
@@ -5141,7 +4929,7 @@
           <a:bodyPr wrap="square" lIns="0" tIns="0" rIns="0" bIns="0" rtlCol="0" anchor="ctr"/>
           <a:lstStyle/>
           <a:p>
-            <a:pPr indent="0" marL="0">
+            <a:pPr marL="0" indent="0">
               <a:buNone/>
             </a:pPr>
             <a:r>
@@ -5161,7 +4949,7 @@
       </p:sp>
       <p:sp>
         <p:nvSpPr>
-          <p:cNvPr id="25" name="Slide Number Placeholder 0"/>
+          <p:cNvPr id="45" name="Slide Number Placeholder 0"/>
           <p:cNvSpPr>
             <a:spLocks noGrp="1"/>
           </p:cNvSpPr>
@@ -5179,7 +4967,7 @@
           </a:prstGeom>
           <a:extLst>
             <a:ext uri="{C572A759-6A51-4108-AA02-DFA0A04FC94B}">
-              <ma14:wrappingTextBoxFlag xmlns:ma14="http://schemas.microsoft.com/office/mac/drawingml/2011/main" val="0"/>
+              <ma14:wrappingTextBoxFlag xmlns:ma14="http://schemas.microsoft.com/office/mac/drawingml/2011/main" xmlns="" val="0"/>
             </a:ext>
           </a:extLst>
         </p:spPr>
@@ -5200,7 +4988,7 @@
           <a:p>
             <a:pPr algn="r"/>
             <a:fld id="{F7021451-1387-4CA6-816F-3879F97B5CBC}" type="slidenum">
-              <a:rPr b="0" lang="en-US"/>
+              <a:rPr lang="en-US" b="0"/>
               <a:t>10</a:t>
             </a:fld>
             <a:endParaRPr lang="en-US"/>
@@ -5253,7 +5041,7 @@
           <a:bodyPr wrap="square" lIns="0" tIns="0" rIns="0" bIns="0" rtlCol="0" anchor="ctr"/>
           <a:lstStyle/>
           <a:p>
-            <a:pPr indent="0" marL="0">
+            <a:pPr marL="0" indent="0">
               <a:buNone/>
             </a:pPr>
             <a:r>
@@ -5292,7 +5080,7 @@
           <a:bodyPr wrap="square" lIns="0" tIns="0" rIns="0" bIns="0" rtlCol="0" anchor="ctr"/>
           <a:lstStyle/>
           <a:p>
-            <a:pPr indent="0" marL="0">
+            <a:pPr marL="0" indent="0">
               <a:buNone/>
             </a:pPr>
             <a:r>
@@ -5331,7 +5119,7 @@
           <a:bodyPr wrap="square" lIns="0" tIns="0" rIns="0" bIns="0" rtlCol="0" anchor="ctr"/>
           <a:lstStyle/>
           <a:p>
-            <a:pPr algn="ctr" indent="0" marL="0">
+            <a:pPr marL="0" indent="0" algn="ctr">
               <a:buNone/>
             </a:pPr>
             <a:r>
@@ -5373,6 +5161,13 @@
             <a:prstDash val="solid"/>
           </a:ln>
         </p:spPr>
+        <p:txBody>
+          <a:bodyPr/>
+          <a:lstStyle/>
+          <a:p>
+            <a:endParaRPr lang="en-US"/>
+          </a:p>
+        </p:txBody>
       </p:sp>
       <p:sp>
         <p:nvSpPr>
@@ -5395,7 +5190,7 @@
           <a:bodyPr wrap="square" lIns="0" tIns="0" rIns="0" bIns="0" rtlCol="0" anchor="ctr"/>
           <a:lstStyle/>
           <a:p>
-            <a:pPr algn="ctr" indent="0" marL="0">
+            <a:pPr marL="0" indent="0" algn="ctr">
               <a:buNone/>
             </a:pPr>
             <a:r>
@@ -5434,7 +5229,7 @@
           <a:bodyPr wrap="square" lIns="0" tIns="0" rIns="0" bIns="0" rtlCol="0" anchor="ctr"/>
           <a:lstStyle/>
           <a:p>
-            <a:pPr algn="ctr" indent="0" marL="0">
+            <a:pPr marL="0" indent="0" algn="ctr">
               <a:buNone/>
             </a:pPr>
             <a:r>
@@ -5476,6 +5271,13 @@
             <a:prstDash val="solid"/>
           </a:ln>
         </p:spPr>
+        <p:txBody>
+          <a:bodyPr/>
+          <a:lstStyle/>
+          <a:p>
+            <a:endParaRPr lang="en-US"/>
+          </a:p>
+        </p:txBody>
       </p:sp>
       <p:sp>
         <p:nvSpPr>
@@ -5498,7 +5300,7 @@
           <a:bodyPr wrap="square" lIns="0" tIns="0" rIns="0" bIns="0" rtlCol="0" anchor="ctr"/>
           <a:lstStyle/>
           <a:p>
-            <a:pPr algn="ctr" indent="0" marL="0">
+            <a:pPr marL="0" indent="0" algn="ctr">
               <a:buNone/>
             </a:pPr>
             <a:r>
@@ -5537,7 +5339,7 @@
           <a:bodyPr wrap="square" lIns="0" tIns="0" rIns="0" bIns="0" rtlCol="0" anchor="ctr"/>
           <a:lstStyle/>
           <a:p>
-            <a:pPr indent="0" marL="0">
+            <a:pPr marL="0" indent="0">
               <a:buNone/>
             </a:pPr>
             <a:r>
@@ -5554,7 +5356,7 @@
             <a:endParaRPr lang="en-US" sz="1400" dirty="0"/>
           </a:p>
           <a:p>
-            <a:pPr indent="0" marL="0">
+            <a:pPr marL="0" indent="0">
               <a:buNone/>
             </a:pPr>
             <a:r>
@@ -5598,6 +5400,13 @@
             <a:prstDash val="solid"/>
           </a:ln>
         </p:spPr>
+        <p:txBody>
+          <a:bodyPr/>
+          <a:lstStyle/>
+          <a:p>
+            <a:endParaRPr lang="en-US"/>
+          </a:p>
+        </p:txBody>
       </p:sp>
       <p:sp>
         <p:nvSpPr>
@@ -5620,7 +5429,7 @@
           <a:bodyPr wrap="square" lIns="0" tIns="0" rIns="0" bIns="0" rtlCol="0" anchor="ctr"/>
           <a:lstStyle/>
           <a:p>
-            <a:pPr indent="0" marL="0">
+            <a:pPr marL="0" indent="0">
               <a:buNone/>
             </a:pPr>
             <a:r>
@@ -5637,7 +5446,7 @@
             <a:endParaRPr lang="en-US" sz="1400" dirty="0"/>
           </a:p>
           <a:p>
-            <a:pPr indent="0" marL="0">
+            <a:pPr marL="0" indent="0">
               <a:buNone/>
             </a:pPr>
             <a:r>
@@ -5681,6 +5490,13 @@
             <a:prstDash val="solid"/>
           </a:ln>
         </p:spPr>
+        <p:txBody>
+          <a:bodyPr/>
+          <a:lstStyle/>
+          <a:p>
+            <a:endParaRPr lang="en-US"/>
+          </a:p>
+        </p:txBody>
       </p:sp>
       <p:sp>
         <p:nvSpPr>
@@ -5703,7 +5519,7 @@
           <a:bodyPr wrap="square" lIns="0" tIns="0" rIns="0" bIns="0" rtlCol="0" anchor="ctr"/>
           <a:lstStyle/>
           <a:p>
-            <a:pPr indent="0" marL="0">
+            <a:pPr marL="0" indent="0">
               <a:buNone/>
             </a:pPr>
             <a:r>
@@ -5720,7 +5536,7 @@
             <a:endParaRPr lang="en-US" sz="1400" dirty="0"/>
           </a:p>
           <a:p>
-            <a:pPr indent="0" marL="0">
+            <a:pPr marL="0" indent="0">
               <a:buNone/>
             </a:pPr>
             <a:r>
@@ -5764,6 +5580,13 @@
             <a:prstDash val="solid"/>
           </a:ln>
         </p:spPr>
+        <p:txBody>
+          <a:bodyPr/>
+          <a:lstStyle/>
+          <a:p>
+            <a:endParaRPr lang="en-US"/>
+          </a:p>
+        </p:txBody>
       </p:sp>
       <p:sp>
         <p:nvSpPr>
@@ -5786,7 +5609,7 @@
           <a:bodyPr wrap="square" lIns="0" tIns="0" rIns="0" bIns="0" rtlCol="0" anchor="ctr"/>
           <a:lstStyle/>
           <a:p>
-            <a:pPr indent="0" marL="0">
+            <a:pPr marL="0" indent="0">
               <a:buNone/>
             </a:pPr>
             <a:r>
@@ -5803,7 +5626,7 @@
             <a:endParaRPr lang="en-US" sz="1400" dirty="0"/>
           </a:p>
           <a:p>
-            <a:pPr indent="0" marL="0">
+            <a:pPr marL="0" indent="0">
               <a:buNone/>
             </a:pPr>
             <a:r>
@@ -5847,6 +5670,13 @@
             <a:prstDash val="solid"/>
           </a:ln>
         </p:spPr>
+        <p:txBody>
+          <a:bodyPr/>
+          <a:lstStyle/>
+          <a:p>
+            <a:endParaRPr lang="en-US"/>
+          </a:p>
+        </p:txBody>
       </p:sp>
       <p:sp>
         <p:nvSpPr>
@@ -5869,7 +5699,7 @@
           <a:bodyPr wrap="square" lIns="0" tIns="0" rIns="0" bIns="0" rtlCol="0" anchor="ctr"/>
           <a:lstStyle/>
           <a:p>
-            <a:pPr indent="0" marL="0">
+            <a:pPr marL="0" indent="0">
               <a:buNone/>
             </a:pPr>
             <a:r>
@@ -5886,7 +5716,7 @@
             <a:endParaRPr lang="en-US" sz="1400" dirty="0"/>
           </a:p>
           <a:p>
-            <a:pPr indent="0" marL="0">
+            <a:pPr marL="0" indent="0">
               <a:buNone/>
             </a:pPr>
             <a:r>
@@ -5930,6 +5760,13 @@
             <a:prstDash val="dash"/>
           </a:ln>
         </p:spPr>
+        <p:txBody>
+          <a:bodyPr/>
+          <a:lstStyle/>
+          <a:p>
+            <a:endParaRPr lang="en-US"/>
+          </a:p>
+        </p:txBody>
       </p:sp>
       <p:sp>
         <p:nvSpPr>
@@ -5952,7 +5789,7 @@
           <a:bodyPr wrap="square" lIns="0" tIns="0" rIns="0" bIns="0" rtlCol="0" anchor="ctr"/>
           <a:lstStyle/>
           <a:p>
-            <a:pPr indent="0" marL="0">
+            <a:pPr marL="0" indent="0">
               <a:buNone/>
             </a:pPr>
             <a:r>
@@ -5969,7 +5806,7 @@
             <a:endParaRPr lang="en-US" sz="1400" dirty="0"/>
           </a:p>
           <a:p>
-            <a:pPr indent="0" marL="0">
+            <a:pPr marL="0" indent="0">
               <a:buNone/>
             </a:pPr>
             <a:r>
@@ -6013,6 +5850,13 @@
             <a:prstDash val="solid"/>
           </a:ln>
         </p:spPr>
+        <p:txBody>
+          <a:bodyPr/>
+          <a:lstStyle/>
+          <a:p>
+            <a:endParaRPr lang="en-US"/>
+          </a:p>
+        </p:txBody>
       </p:sp>
       <p:sp>
         <p:nvSpPr>
@@ -6036,6 +5880,13 @@
             <a:prstDash val="dash"/>
           </a:ln>
         </p:spPr>
+        <p:txBody>
+          <a:bodyPr/>
+          <a:lstStyle/>
+          <a:p>
+            <a:endParaRPr lang="en-US"/>
+          </a:p>
+        </p:txBody>
       </p:sp>
       <p:sp>
         <p:nvSpPr>
@@ -6058,7 +5909,7 @@
           <a:bodyPr wrap="square" lIns="0" tIns="0" rIns="0" bIns="0" rtlCol="0" anchor="ctr"/>
           <a:lstStyle/>
           <a:p>
-            <a:pPr indent="0" marL="0">
+            <a:pPr marL="0" indent="0">
               <a:buNone/>
             </a:pPr>
             <a:r>
@@ -6096,7 +5947,7 @@
           </a:prstGeom>
           <a:extLst>
             <a:ext uri="{C572A759-6A51-4108-AA02-DFA0A04FC94B}">
-              <ma14:wrappingTextBoxFlag xmlns:ma14="http://schemas.microsoft.com/office/mac/drawingml/2011/main" val="0"/>
+              <ma14:wrappingTextBoxFlag xmlns:ma14="http://schemas.microsoft.com/office/mac/drawingml/2011/main" xmlns="" val="0"/>
             </a:ext>
           </a:extLst>
         </p:spPr>
@@ -6117,7 +5968,7 @@
           <a:p>
             <a:pPr algn="r"/>
             <a:fld id="{F7021451-1387-4CA6-816F-3879F97B5CBC}" type="slidenum">
-              <a:rPr b="0" lang="en-US"/>
+              <a:rPr lang="en-US" b="0"/>
               <a:t>11</a:t>
             </a:fld>
             <a:endParaRPr lang="en-US"/>
@@ -6170,7 +6021,7 @@
           <a:bodyPr wrap="square" lIns="0" tIns="0" rIns="0" bIns="0" rtlCol="0" anchor="ctr"/>
           <a:lstStyle/>
           <a:p>
-            <a:pPr indent="0" marL="0">
+            <a:pPr marL="0" indent="0">
               <a:buNone/>
             </a:pPr>
             <a:r>
@@ -6209,7 +6060,7 @@
           <a:bodyPr wrap="square" lIns="0" tIns="0" rIns="0" bIns="0" rtlCol="0" anchor="ctr"/>
           <a:lstStyle/>
           <a:p>
-            <a:pPr indent="0" marL="0">
+            <a:pPr marL="0" indent="0">
               <a:buNone/>
             </a:pPr>
             <a:r>
@@ -6248,11 +6099,11 @@
           <a:bodyPr wrap="square" lIns="0" tIns="0" rIns="0" bIns="0" rtlCol="0" anchor="ctr"/>
           <a:lstStyle/>
           <a:p>
-            <a:pPr indent="0" marL="0">
+            <a:pPr marL="0" indent="0">
               <a:buNone/>
             </a:pPr>
             <a:r>
-              <a:rPr lang="en-US" sz="1200" b="1" spc="200" kern="0" dirty="0">
+              <a:rPr lang="en-US" sz="1200" b="1" kern="0" spc="200" dirty="0">
                 <a:solidFill>
                   <a:srgbClr val="5E6A64"/>
                 </a:solidFill>
@@ -6287,11 +6138,11 @@
           <a:bodyPr wrap="square" lIns="0" tIns="0" rIns="0" bIns="0" rtlCol="0" anchor="ctr"/>
           <a:lstStyle/>
           <a:p>
-            <a:pPr indent="0" marL="0">
+            <a:pPr marL="0" indent="0">
               <a:buNone/>
             </a:pPr>
             <a:r>
-              <a:rPr lang="en-US" sz="1200" b="1" spc="200" kern="0" dirty="0">
+              <a:rPr lang="en-US" sz="1200" b="1" kern="0" spc="200" dirty="0">
                 <a:solidFill>
                   <a:srgbClr val="5E6A64"/>
                 </a:solidFill>
@@ -6331,17 +6182,24 @@
             <a:prstDash val="solid"/>
           </a:ln>
         </p:spPr>
+        <p:txBody>
+          <a:bodyPr/>
+          <a:lstStyle/>
+          <a:p>
+            <a:endParaRPr lang="en-US"/>
+          </a:p>
+        </p:txBody>
       </p:sp>
       <p:pic>
         <p:nvPicPr>
-          <p:cNvPr id="7" name="Image 0" descr="preencoded.png">    </p:cNvPr>
+          <p:cNvPr id="7" name="Image 0" descr="preencoded.png"/>
           <p:cNvPicPr>
             <a:picLocks noChangeAspect="1"/>
           </p:cNvPicPr>
           <p:nvPr/>
         </p:nvPicPr>
         <p:blipFill>
-          <a:blip r:embed="rId1"/>
+          <a:blip r:embed="rId3"/>
           <a:stretch>
             <a:fillRect/>
           </a:stretch>
@@ -6377,7 +6235,7 @@
           <a:bodyPr wrap="square" lIns="0" tIns="0" rIns="0" bIns="0" rtlCol="0" anchor="ctr"/>
           <a:lstStyle/>
           <a:p>
-            <a:pPr indent="0" marL="0">
+            <a:pPr marL="0" indent="0">
               <a:buNone/>
             </a:pPr>
             <a:r>
@@ -6397,14 +6255,14 @@
       </p:sp>
       <p:pic>
         <p:nvPicPr>
-          <p:cNvPr id="9" name="Image 1" descr="preencoded.png">    </p:cNvPr>
+          <p:cNvPr id="9" name="Image 1" descr="preencoded.png"/>
           <p:cNvPicPr>
             <a:picLocks noChangeAspect="1"/>
           </p:cNvPicPr>
           <p:nvPr/>
         </p:nvPicPr>
         <p:blipFill>
-          <a:blip r:embed="rId2"/>
+          <a:blip r:embed="rId4"/>
           <a:stretch>
             <a:fillRect/>
           </a:stretch>
@@ -6445,17 +6303,24 @@
             <a:prstDash val="solid"/>
           </a:ln>
         </p:spPr>
+        <p:txBody>
+          <a:bodyPr/>
+          <a:lstStyle/>
+          <a:p>
+            <a:endParaRPr lang="en-US"/>
+          </a:p>
+        </p:txBody>
       </p:sp>
       <p:pic>
         <p:nvPicPr>
-          <p:cNvPr id="11" name="Image 2" descr="preencoded.png">    </p:cNvPr>
+          <p:cNvPr id="11" name="Image 2" descr="preencoded.png"/>
           <p:cNvPicPr>
             <a:picLocks noChangeAspect="1"/>
           </p:cNvPicPr>
           <p:nvPr/>
         </p:nvPicPr>
         <p:blipFill>
-          <a:blip r:embed="rId3"/>
+          <a:blip r:embed="rId5"/>
           <a:stretch>
             <a:fillRect/>
           </a:stretch>
@@ -6491,7 +6356,7 @@
           <a:bodyPr wrap="square" lIns="0" tIns="0" rIns="0" bIns="0" rtlCol="0" anchor="ctr"/>
           <a:lstStyle/>
           <a:p>
-            <a:pPr indent="0" marL="0">
+            <a:pPr marL="0" indent="0">
               <a:buNone/>
             </a:pPr>
             <a:r>
@@ -6535,17 +6400,24 @@
             <a:prstDash val="solid"/>
           </a:ln>
         </p:spPr>
+        <p:txBody>
+          <a:bodyPr/>
+          <a:lstStyle/>
+          <a:p>
+            <a:endParaRPr lang="en-US"/>
+          </a:p>
+        </p:txBody>
       </p:sp>
       <p:pic>
         <p:nvPicPr>
-          <p:cNvPr id="14" name="Image 3" descr="preencoded.png">    </p:cNvPr>
+          <p:cNvPr id="14" name="Image 3" descr="preencoded.png"/>
           <p:cNvPicPr>
             <a:picLocks noChangeAspect="1"/>
           </p:cNvPicPr>
           <p:nvPr/>
         </p:nvPicPr>
         <p:blipFill>
-          <a:blip r:embed="rId4"/>
+          <a:blip r:embed="rId3"/>
           <a:stretch>
             <a:fillRect/>
           </a:stretch>
@@ -6581,7 +6453,7 @@
           <a:bodyPr wrap="square" lIns="0" tIns="0" rIns="0" bIns="0" rtlCol="0" anchor="ctr"/>
           <a:lstStyle/>
           <a:p>
-            <a:pPr indent="0" marL="0">
+            <a:pPr marL="0" indent="0">
               <a:buNone/>
             </a:pPr>
             <a:r>
@@ -6601,14 +6473,14 @@
       </p:sp>
       <p:pic>
         <p:nvPicPr>
-          <p:cNvPr id="16" name="Image 4" descr="preencoded.png">    </p:cNvPr>
+          <p:cNvPr id="16" name="Image 4" descr="preencoded.png"/>
           <p:cNvPicPr>
             <a:picLocks noChangeAspect="1"/>
           </p:cNvPicPr>
           <p:nvPr/>
         </p:nvPicPr>
         <p:blipFill>
-          <a:blip r:embed="rId5"/>
+          <a:blip r:embed="rId4"/>
           <a:stretch>
             <a:fillRect/>
           </a:stretch>
@@ -6649,17 +6521,24 @@
             <a:prstDash val="solid"/>
           </a:ln>
         </p:spPr>
+        <p:txBody>
+          <a:bodyPr/>
+          <a:lstStyle/>
+          <a:p>
+            <a:endParaRPr lang="en-US"/>
+          </a:p>
+        </p:txBody>
       </p:sp>
       <p:pic>
         <p:nvPicPr>
-          <p:cNvPr id="18" name="Image 5" descr="preencoded.png">    </p:cNvPr>
+          <p:cNvPr id="18" name="Image 5" descr="preencoded.png"/>
           <p:cNvPicPr>
             <a:picLocks noChangeAspect="1"/>
           </p:cNvPicPr>
           <p:nvPr/>
         </p:nvPicPr>
         <p:blipFill>
-          <a:blip r:embed="rId6"/>
+          <a:blip r:embed="rId5"/>
           <a:stretch>
             <a:fillRect/>
           </a:stretch>
@@ -6695,7 +6574,7 @@
           <a:bodyPr wrap="square" lIns="0" tIns="0" rIns="0" bIns="0" rtlCol="0" anchor="ctr"/>
           <a:lstStyle/>
           <a:p>
-            <a:pPr indent="0" marL="0">
+            <a:pPr marL="0" indent="0">
               <a:buNone/>
             </a:pPr>
             <a:r>
@@ -6739,17 +6618,24 @@
             <a:prstDash val="solid"/>
           </a:ln>
         </p:spPr>
+        <p:txBody>
+          <a:bodyPr/>
+          <a:lstStyle/>
+          <a:p>
+            <a:endParaRPr lang="en-US"/>
+          </a:p>
+        </p:txBody>
       </p:sp>
       <p:pic>
         <p:nvPicPr>
-          <p:cNvPr id="21" name="Image 6" descr="preencoded.png">    </p:cNvPr>
+          <p:cNvPr id="21" name="Image 6" descr="preencoded.png"/>
           <p:cNvPicPr>
             <a:picLocks noChangeAspect="1"/>
           </p:cNvPicPr>
           <p:nvPr/>
         </p:nvPicPr>
         <p:blipFill>
-          <a:blip r:embed="rId7"/>
+          <a:blip r:embed="rId3"/>
           <a:stretch>
             <a:fillRect/>
           </a:stretch>
@@ -6785,7 +6671,7 @@
           <a:bodyPr wrap="square" lIns="0" tIns="0" rIns="0" bIns="0" rtlCol="0" anchor="ctr"/>
           <a:lstStyle/>
           <a:p>
-            <a:pPr indent="0" marL="0">
+            <a:pPr marL="0" indent="0">
               <a:buNone/>
             </a:pPr>
             <a:r>
@@ -6805,14 +6691,14 @@
       </p:sp>
       <p:pic>
         <p:nvPicPr>
-          <p:cNvPr id="23" name="Image 7" descr="preencoded.png">    </p:cNvPr>
+          <p:cNvPr id="23" name="Image 7" descr="preencoded.png"/>
           <p:cNvPicPr>
             <a:picLocks noChangeAspect="1"/>
           </p:cNvPicPr>
           <p:nvPr/>
         </p:nvPicPr>
         <p:blipFill>
-          <a:blip r:embed="rId8"/>
+          <a:blip r:embed="rId4"/>
           <a:stretch>
             <a:fillRect/>
           </a:stretch>
@@ -6853,17 +6739,24 @@
             <a:prstDash val="solid"/>
           </a:ln>
         </p:spPr>
+        <p:txBody>
+          <a:bodyPr/>
+          <a:lstStyle/>
+          <a:p>
+            <a:endParaRPr lang="en-US"/>
+          </a:p>
+        </p:txBody>
       </p:sp>
       <p:pic>
         <p:nvPicPr>
-          <p:cNvPr id="25" name="Image 8" descr="preencoded.png">    </p:cNvPr>
+          <p:cNvPr id="25" name="Image 8" descr="preencoded.png"/>
           <p:cNvPicPr>
             <a:picLocks noChangeAspect="1"/>
           </p:cNvPicPr>
           <p:nvPr/>
         </p:nvPicPr>
         <p:blipFill>
-          <a:blip r:embed="rId9"/>
+          <a:blip r:embed="rId5"/>
           <a:stretch>
             <a:fillRect/>
           </a:stretch>
@@ -6899,7 +6792,7 @@
           <a:bodyPr wrap="square" lIns="0" tIns="0" rIns="0" bIns="0" rtlCol="0" anchor="ctr"/>
           <a:lstStyle/>
           <a:p>
-            <a:pPr indent="0" marL="0">
+            <a:pPr marL="0" indent="0">
               <a:buNone/>
             </a:pPr>
             <a:r>
@@ -6943,17 +6836,24 @@
             <a:prstDash val="solid"/>
           </a:ln>
         </p:spPr>
+        <p:txBody>
+          <a:bodyPr/>
+          <a:lstStyle/>
+          <a:p>
+            <a:endParaRPr lang="en-US"/>
+          </a:p>
+        </p:txBody>
       </p:sp>
       <p:pic>
         <p:nvPicPr>
-          <p:cNvPr id="28" name="Image 9" descr="preencoded.png">    </p:cNvPr>
+          <p:cNvPr id="28" name="Image 9" descr="preencoded.png"/>
           <p:cNvPicPr>
             <a:picLocks noChangeAspect="1"/>
           </p:cNvPicPr>
           <p:nvPr/>
         </p:nvPicPr>
         <p:blipFill>
-          <a:blip r:embed="rId10"/>
+          <a:blip r:embed="rId3"/>
           <a:stretch>
             <a:fillRect/>
           </a:stretch>
@@ -6989,7 +6889,7 @@
           <a:bodyPr wrap="square" lIns="0" tIns="0" rIns="0" bIns="0" rtlCol="0" anchor="ctr"/>
           <a:lstStyle/>
           <a:p>
-            <a:pPr indent="0" marL="0">
+            <a:pPr marL="0" indent="0">
               <a:buNone/>
             </a:pPr>
             <a:r>
@@ -7009,14 +6909,14 @@
       </p:sp>
       <p:pic>
         <p:nvPicPr>
-          <p:cNvPr id="30" name="Image 10" descr="preencoded.png">    </p:cNvPr>
+          <p:cNvPr id="30" name="Image 10" descr="preencoded.png"/>
           <p:cNvPicPr>
             <a:picLocks noChangeAspect="1"/>
           </p:cNvPicPr>
           <p:nvPr/>
         </p:nvPicPr>
         <p:blipFill>
-          <a:blip r:embed="rId11"/>
+          <a:blip r:embed="rId4"/>
           <a:stretch>
             <a:fillRect/>
           </a:stretch>
@@ -7057,17 +6957,24 @@
             <a:prstDash val="solid"/>
           </a:ln>
         </p:spPr>
+        <p:txBody>
+          <a:bodyPr/>
+          <a:lstStyle/>
+          <a:p>
+            <a:endParaRPr lang="en-US"/>
+          </a:p>
+        </p:txBody>
       </p:sp>
       <p:pic>
         <p:nvPicPr>
-          <p:cNvPr id="32" name="Image 11" descr="preencoded.png">    </p:cNvPr>
+          <p:cNvPr id="32" name="Image 11" descr="preencoded.png"/>
           <p:cNvPicPr>
             <a:picLocks noChangeAspect="1"/>
           </p:cNvPicPr>
           <p:nvPr/>
         </p:nvPicPr>
         <p:blipFill>
-          <a:blip r:embed="rId12"/>
+          <a:blip r:embed="rId5"/>
           <a:stretch>
             <a:fillRect/>
           </a:stretch>
@@ -7103,7 +7010,7 @@
           <a:bodyPr wrap="square" lIns="0" tIns="0" rIns="0" bIns="0" rtlCol="0" anchor="ctr"/>
           <a:lstStyle/>
           <a:p>
-            <a:pPr indent="0" marL="0">
+            <a:pPr marL="0" indent="0">
               <a:buNone/>
             </a:pPr>
             <a:r>
@@ -7147,17 +7054,24 @@
             <a:prstDash val="solid"/>
           </a:ln>
         </p:spPr>
+        <p:txBody>
+          <a:bodyPr/>
+          <a:lstStyle/>
+          <a:p>
+            <a:endParaRPr lang="en-US"/>
+          </a:p>
+        </p:txBody>
       </p:sp>
       <p:pic>
         <p:nvPicPr>
-          <p:cNvPr id="35" name="Image 12" descr="preencoded.png">    </p:cNvPr>
+          <p:cNvPr id="35" name="Image 12" descr="preencoded.png"/>
           <p:cNvPicPr>
             <a:picLocks noChangeAspect="1"/>
           </p:cNvPicPr>
           <p:nvPr/>
         </p:nvPicPr>
         <p:blipFill>
-          <a:blip r:embed="rId13"/>
+          <a:blip r:embed="rId3"/>
           <a:stretch>
             <a:fillRect/>
           </a:stretch>
@@ -7193,7 +7107,7 @@
           <a:bodyPr wrap="square" lIns="0" tIns="0" rIns="0" bIns="0" rtlCol="0" anchor="ctr"/>
           <a:lstStyle/>
           <a:p>
-            <a:pPr indent="0" marL="0">
+            <a:pPr marL="0" indent="0">
               <a:buNone/>
             </a:pPr>
             <a:r>
@@ -7213,14 +7127,14 @@
       </p:sp>
       <p:pic>
         <p:nvPicPr>
-          <p:cNvPr id="37" name="Image 13" descr="preencoded.png">    </p:cNvPr>
+          <p:cNvPr id="37" name="Image 13" descr="preencoded.png"/>
           <p:cNvPicPr>
             <a:picLocks noChangeAspect="1"/>
           </p:cNvPicPr>
           <p:nvPr/>
         </p:nvPicPr>
         <p:blipFill>
-          <a:blip r:embed="rId14"/>
+          <a:blip r:embed="rId4"/>
           <a:stretch>
             <a:fillRect/>
           </a:stretch>
@@ -7261,17 +7175,24 @@
             <a:prstDash val="solid"/>
           </a:ln>
         </p:spPr>
+        <p:txBody>
+          <a:bodyPr/>
+          <a:lstStyle/>
+          <a:p>
+            <a:endParaRPr lang="en-US"/>
+          </a:p>
+        </p:txBody>
       </p:sp>
       <p:pic>
         <p:nvPicPr>
-          <p:cNvPr id="39" name="Image 14" descr="preencoded.png">    </p:cNvPr>
+          <p:cNvPr id="39" name="Image 14" descr="preencoded.png"/>
           <p:cNvPicPr>
             <a:picLocks noChangeAspect="1"/>
           </p:cNvPicPr>
           <p:nvPr/>
         </p:nvPicPr>
         <p:blipFill>
-          <a:blip r:embed="rId15"/>
+          <a:blip r:embed="rId5"/>
           <a:stretch>
             <a:fillRect/>
           </a:stretch>
@@ -7307,7 +7228,7 @@
           <a:bodyPr wrap="square" lIns="0" tIns="0" rIns="0" bIns="0" rtlCol="0" anchor="ctr"/>
           <a:lstStyle/>
           <a:p>
-            <a:pPr indent="0" marL="0">
+            <a:pPr marL="0" indent="0">
               <a:buNone/>
             </a:pPr>
             <a:r>
@@ -7327,7 +7248,7 @@
       </p:sp>
       <p:sp>
         <p:nvSpPr>
-          <p:cNvPr id="25" name="Slide Number Placeholder 0"/>
+          <p:cNvPr id="41" name="Slide Number Placeholder 0"/>
           <p:cNvSpPr>
             <a:spLocks noGrp="1"/>
           </p:cNvSpPr>
@@ -7345,7 +7266,7 @@
           </a:prstGeom>
           <a:extLst>
             <a:ext uri="{C572A759-6A51-4108-AA02-DFA0A04FC94B}">
-              <ma14:wrappingTextBoxFlag xmlns:ma14="http://schemas.microsoft.com/office/mac/drawingml/2011/main" val="0"/>
+              <ma14:wrappingTextBoxFlag xmlns:ma14="http://schemas.microsoft.com/office/mac/drawingml/2011/main" xmlns="" val="0"/>
             </a:ext>
           </a:extLst>
         </p:spPr>
@@ -7366,7 +7287,7 @@
           <a:p>
             <a:pPr algn="r"/>
             <a:fld id="{F7021451-1387-4CA6-816F-3879F97B5CBC}" type="slidenum">
-              <a:rPr b="0" lang="en-US"/>
+              <a:rPr lang="en-US" b="0"/>
               <a:t>12</a:t>
             </a:fld>
             <a:endParaRPr lang="en-US"/>
@@ -7389,6 +7310,7 @@
         <a:solidFill>
           <a:srgbClr val="16302A"/>
         </a:solidFill>
+        <a:effectLst/>
       </p:bgPr>
     </p:bg>
     <p:spTree>
@@ -7426,11 +7348,11 @@
           <a:bodyPr wrap="square" lIns="0" tIns="0" rIns="0" bIns="0" rtlCol="0" anchor="ctr"/>
           <a:lstStyle/>
           <a:p>
-            <a:pPr indent="0" marL="0">
+            <a:pPr marL="0" indent="0">
               <a:buNone/>
             </a:pPr>
             <a:r>
-              <a:rPr lang="en-US" sz="1300" b="1" spc="200" kern="0" dirty="0">
+              <a:rPr lang="en-US" sz="1300" b="1" kern="0" spc="200" dirty="0">
                 <a:solidFill>
                   <a:srgbClr val="E1A624"/>
                 </a:solidFill>
@@ -7465,7 +7387,7 @@
           <a:bodyPr wrap="square" lIns="0" tIns="0" rIns="0" bIns="0" rtlCol="0" anchor="t"/>
           <a:lstStyle/>
           <a:p>
-            <a:pPr indent="0" marL="0">
+            <a:pPr marL="0" indent="0">
               <a:buNone/>
             </a:pPr>
             <a:r>
@@ -7507,17 +7429,24 @@
             <a:prstDash val="solid"/>
           </a:ln>
         </p:spPr>
+        <p:txBody>
+          <a:bodyPr/>
+          <a:lstStyle/>
+          <a:p>
+            <a:endParaRPr lang="en-US"/>
+          </a:p>
+        </p:txBody>
       </p:sp>
       <p:pic>
         <p:nvPicPr>
-          <p:cNvPr id="5" name="Image 0" descr="preencoded.png">    </p:cNvPr>
+          <p:cNvPr id="5" name="Image 0" descr="preencoded.png"/>
           <p:cNvPicPr>
             <a:picLocks noChangeAspect="1"/>
           </p:cNvPicPr>
           <p:nvPr/>
         </p:nvPicPr>
         <p:blipFill>
-          <a:blip r:embed="rId1"/>
+          <a:blip r:embed="rId3"/>
           <a:stretch>
             <a:fillRect/>
           </a:stretch>
@@ -7553,7 +7482,7 @@
           <a:bodyPr wrap="square" lIns="0" tIns="0" rIns="0" bIns="0" rtlCol="0" anchor="ctr"/>
           <a:lstStyle/>
           <a:p>
-            <a:pPr indent="0" marL="0">
+            <a:pPr marL="0" indent="0">
               <a:buNone/>
             </a:pPr>
             <a:r>
@@ -7570,7 +7499,7 @@
             <a:endParaRPr lang="en-US" sz="1400" dirty="0"/>
           </a:p>
           <a:p>
-            <a:pPr indent="0" marL="0">
+            <a:pPr marL="0" indent="0">
               <a:buNone/>
             </a:pPr>
             <a:r>
@@ -7587,7 +7516,7 @@
             <a:endParaRPr lang="en-US" sz="1400" dirty="0"/>
           </a:p>
           <a:p>
-            <a:pPr indent="0" marL="0">
+            <a:pPr marL="0" indent="0">
               <a:buNone/>
             </a:pPr>
             <a:r>
@@ -7629,17 +7558,24 @@
             <a:prstDash val="solid"/>
           </a:ln>
         </p:spPr>
+        <p:txBody>
+          <a:bodyPr/>
+          <a:lstStyle/>
+          <a:p>
+            <a:endParaRPr lang="en-US"/>
+          </a:p>
+        </p:txBody>
       </p:sp>
       <p:pic>
         <p:nvPicPr>
-          <p:cNvPr id="8" name="Image 1" descr="preencoded.png">    </p:cNvPr>
+          <p:cNvPr id="8" name="Image 1" descr="preencoded.png"/>
           <p:cNvPicPr>
             <a:picLocks noChangeAspect="1"/>
           </p:cNvPicPr>
           <p:nvPr/>
         </p:nvPicPr>
         <p:blipFill>
-          <a:blip r:embed="rId2"/>
+          <a:blip r:embed="rId4"/>
           <a:stretch>
             <a:fillRect/>
           </a:stretch>
@@ -7675,7 +7611,7 @@
           <a:bodyPr wrap="square" lIns="0" tIns="0" rIns="0" bIns="0" rtlCol="0" anchor="ctr"/>
           <a:lstStyle/>
           <a:p>
-            <a:pPr indent="0" marL="0">
+            <a:pPr marL="0" indent="0">
               <a:buNone/>
             </a:pPr>
             <a:r>
@@ -7692,7 +7628,7 @@
             <a:endParaRPr lang="en-US" sz="1400" dirty="0"/>
           </a:p>
           <a:p>
-            <a:pPr indent="0" marL="0">
+            <a:pPr marL="0" indent="0">
               <a:buNone/>
             </a:pPr>
             <a:r>
@@ -7709,7 +7645,7 @@
             <a:endParaRPr lang="en-US" sz="1400" dirty="0"/>
           </a:p>
           <a:p>
-            <a:pPr indent="0" marL="0">
+            <a:pPr marL="0" indent="0">
               <a:buNone/>
             </a:pPr>
             <a:r>
@@ -7751,17 +7687,24 @@
             <a:prstDash val="solid"/>
           </a:ln>
         </p:spPr>
+        <p:txBody>
+          <a:bodyPr/>
+          <a:lstStyle/>
+          <a:p>
+            <a:endParaRPr lang="en-US"/>
+          </a:p>
+        </p:txBody>
       </p:sp>
       <p:pic>
         <p:nvPicPr>
-          <p:cNvPr id="11" name="Image 2" descr="preencoded.png">    </p:cNvPr>
+          <p:cNvPr id="11" name="Image 2" descr="preencoded.png"/>
           <p:cNvPicPr>
             <a:picLocks noChangeAspect="1"/>
           </p:cNvPicPr>
           <p:nvPr/>
         </p:nvPicPr>
         <p:blipFill>
-          <a:blip r:embed="rId3"/>
+          <a:blip r:embed="rId5"/>
           <a:stretch>
             <a:fillRect/>
           </a:stretch>
@@ -7797,7 +7740,7 @@
           <a:bodyPr wrap="square" lIns="0" tIns="0" rIns="0" bIns="0" rtlCol="0" anchor="ctr"/>
           <a:lstStyle/>
           <a:p>
-            <a:pPr indent="0" marL="0">
+            <a:pPr marL="0" indent="0">
               <a:buNone/>
             </a:pPr>
             <a:r>
@@ -7814,7 +7757,7 @@
             <a:endParaRPr lang="en-US" sz="1400" dirty="0"/>
           </a:p>
           <a:p>
-            <a:pPr indent="0" marL="0">
+            <a:pPr marL="0" indent="0">
               <a:buNone/>
             </a:pPr>
             <a:r>
@@ -7831,7 +7774,7 @@
             <a:endParaRPr lang="en-US" sz="1400" dirty="0"/>
           </a:p>
           <a:p>
-            <a:pPr indent="0" marL="0">
+            <a:pPr marL="0" indent="0">
               <a:buNone/>
             </a:pPr>
             <a:r>
@@ -7870,7 +7813,7 @@
           <a:bodyPr wrap="square" lIns="0" tIns="0" rIns="0" bIns="0" rtlCol="0" anchor="ctr"/>
           <a:lstStyle/>
           <a:p>
-            <a:pPr indent="0" marL="0">
+            <a:pPr marL="0" indent="0">
               <a:buNone/>
             </a:pPr>
             <a:r>
@@ -7890,14 +7833,14 @@
       </p:sp>
       <p:pic>
         <p:nvPicPr>
-          <p:cNvPr id="14" name="Image 3" descr="preencoded.png">    </p:cNvPr>
+          <p:cNvPr id="14" name="Image 3" descr="preencoded.png"/>
           <p:cNvPicPr>
             <a:picLocks noChangeAspect="1"/>
           </p:cNvPicPr>
           <p:nvPr/>
         </p:nvPicPr>
         <p:blipFill>
-          <a:blip r:embed="rId4"/>
+          <a:blip r:embed="rId6"/>
           <a:stretch>
             <a:fillRect/>
           </a:stretch>
@@ -7933,7 +7876,7 @@
           <a:bodyPr wrap="square" lIns="0" tIns="0" rIns="0" bIns="0" rtlCol="0" anchor="ctr"/>
           <a:lstStyle/>
           <a:p>
-            <a:pPr indent="0" marL="0">
+            <a:pPr marL="0" indent="0">
               <a:buNone/>
             </a:pPr>
             <a:r>
@@ -7971,7 +7914,7 @@
           </a:prstGeom>
           <a:extLst>
             <a:ext uri="{C572A759-6A51-4108-AA02-DFA0A04FC94B}">
-              <ma14:wrappingTextBoxFlag xmlns:ma14="http://schemas.microsoft.com/office/mac/drawingml/2011/main" val="0"/>
+              <ma14:wrappingTextBoxFlag xmlns:ma14="http://schemas.microsoft.com/office/mac/drawingml/2011/main" xmlns="" val="0"/>
             </a:ext>
           </a:extLst>
         </p:spPr>
@@ -7992,10 +7935,55 @@
           <a:p>
             <a:pPr algn="r"/>
             <a:fld id="{F7021451-1387-4CA6-816F-3879F97B5CBC}" type="slidenum">
-              <a:rPr b="0" lang="en-US"/>
+              <a:rPr lang="en-US" b="0"/>
               <a:t>13</a:t>
             </a:fld>
             <a:endParaRPr lang="en-US"/>
+          </a:p>
+        </p:txBody>
+      </p:sp>
+      <p:sp>
+        <p:nvSpPr>
+          <p:cNvPr id="16" name="Text 9">
+            <a:extLst>
+              <a:ext uri="{FF2B5EF4-FFF2-40B4-BE49-F238E27FC236}">
+                <a16:creationId xmlns:a16="http://schemas.microsoft.com/office/drawing/2014/main" id="{FBC96F01-E995-47B0-0CE7-9FDF837BC2BA}"/>
+              </a:ext>
+            </a:extLst>
+          </p:cNvPr>
+          <p:cNvSpPr txBox="1"/>
+          <p:nvPr/>
+        </p:nvSpPr>
+        <p:spPr>
+          <a:xfrm>
+            <a:off x="548640" y="6254496"/>
+            <a:ext cx="5943600" cy="329184"/>
+          </a:xfrm>
+          <a:prstGeom prst="rect">
+            <a:avLst/>
+          </a:prstGeom>
+          <a:noFill/>
+          <a:ln/>
+        </p:spPr>
+        <p:txBody>
+          <a:bodyPr wrap="square" lIns="0" tIns="0" rIns="0" bIns="0" rtlCol="0" anchor="ctr"/>
+          <a:lstStyle/>
+          <a:p>
+            <a:pPr marL="285750" indent="-285750">
+              <a:buFont typeface="Arial" panose="020B0604020202020204" pitchFamily="34" charset="0"/>
+              <a:buChar char="•"/>
+            </a:pPr>
+            <a:r>
+              <a:rPr lang="en-US" sz="1500" dirty="0">
+                <a:solidFill>
+                  <a:srgbClr val="BFD3C8"/>
+                </a:solidFill>
+                <a:latin typeface="Arial" pitchFamily="34" charset="0"/>
+                <a:cs typeface="Arial" pitchFamily="34" charset="-120"/>
+              </a:rPr>
+              <a:t>Slide formatting and graphics were generated using Claude.</a:t>
+            </a:r>
+            <a:endParaRPr lang="en-US" sz="1500" dirty="0"/>
           </a:p>
         </p:txBody>
       </p:sp>
@@ -8045,7 +8033,7 @@
           <a:bodyPr wrap="square" lIns="0" tIns="0" rIns="0" bIns="0" rtlCol="0" anchor="ctr"/>
           <a:lstStyle/>
           <a:p>
-            <a:pPr indent="0" marL="0">
+            <a:pPr marL="0" indent="0">
               <a:buNone/>
             </a:pPr>
             <a:r>
@@ -8084,7 +8072,7 @@
           <a:bodyPr wrap="square" lIns="0" tIns="0" rIns="0" bIns="0" rtlCol="0" anchor="ctr"/>
           <a:lstStyle/>
           <a:p>
-            <a:pPr indent="0" marL="0">
+            <a:pPr marL="0" indent="0">
               <a:buNone/>
             </a:pPr>
             <a:r>
@@ -8126,17 +8114,24 @@
             <a:prstDash val="solid"/>
           </a:ln>
         </p:spPr>
+        <p:txBody>
+          <a:bodyPr/>
+          <a:lstStyle/>
+          <a:p>
+            <a:endParaRPr lang="en-US"/>
+          </a:p>
+        </p:txBody>
       </p:sp>
       <p:pic>
         <p:nvPicPr>
-          <p:cNvPr id="5" name="Image 0" descr="preencoded.png">    </p:cNvPr>
+          <p:cNvPr id="5" name="Image 0" descr="preencoded.png"/>
           <p:cNvPicPr>
             <a:picLocks noChangeAspect="1"/>
           </p:cNvPicPr>
           <p:nvPr/>
         </p:nvPicPr>
         <p:blipFill>
-          <a:blip r:embed="rId1"/>
+          <a:blip r:embed="rId3"/>
           <a:stretch>
             <a:fillRect/>
           </a:stretch>
@@ -8172,7 +8167,7 @@
           <a:bodyPr wrap="square" lIns="0" tIns="0" rIns="0" bIns="0" rtlCol="0" anchor="ctr"/>
           <a:lstStyle/>
           <a:p>
-            <a:pPr indent="0" marL="0">
+            <a:pPr marL="0" indent="0">
               <a:buNone/>
             </a:pPr>
             <a:r>
@@ -8189,7 +8184,7 @@
             <a:endParaRPr lang="en-US" sz="1400" dirty="0"/>
           </a:p>
           <a:p>
-            <a:pPr indent="0" marL="0">
+            <a:pPr marL="0" indent="0">
               <a:buNone/>
             </a:pPr>
             <a:r>
@@ -8230,6 +8225,13 @@
             <a:tailEnd type="triangle"/>
           </a:ln>
         </p:spPr>
+        <p:txBody>
+          <a:bodyPr/>
+          <a:lstStyle/>
+          <a:p>
+            <a:endParaRPr lang="en-US"/>
+          </a:p>
+        </p:txBody>
       </p:sp>
       <p:sp>
         <p:nvSpPr>
@@ -8255,17 +8257,24 @@
             <a:prstDash val="solid"/>
           </a:ln>
         </p:spPr>
+        <p:txBody>
+          <a:bodyPr/>
+          <a:lstStyle/>
+          <a:p>
+            <a:endParaRPr lang="en-US"/>
+          </a:p>
+        </p:txBody>
       </p:sp>
       <p:pic>
         <p:nvPicPr>
-          <p:cNvPr id="9" name="Image 1" descr="preencoded.png">    </p:cNvPr>
+          <p:cNvPr id="9" name="Image 1" descr="preencoded.png"/>
           <p:cNvPicPr>
             <a:picLocks noChangeAspect="1"/>
           </p:cNvPicPr>
           <p:nvPr/>
         </p:nvPicPr>
         <p:blipFill>
-          <a:blip r:embed="rId2"/>
+          <a:blip r:embed="rId4"/>
           <a:stretch>
             <a:fillRect/>
           </a:stretch>
@@ -8301,7 +8310,7 @@
           <a:bodyPr wrap="square" lIns="0" tIns="0" rIns="0" bIns="0" rtlCol="0" anchor="ctr"/>
           <a:lstStyle/>
           <a:p>
-            <a:pPr indent="0" marL="0">
+            <a:pPr marL="0" indent="0">
               <a:buNone/>
             </a:pPr>
             <a:r>
@@ -8318,7 +8327,7 @@
             <a:endParaRPr lang="en-US" sz="1400" dirty="0"/>
           </a:p>
           <a:p>
-            <a:pPr indent="0" marL="0">
+            <a:pPr marL="0" indent="0">
               <a:buNone/>
             </a:pPr>
             <a:r>
@@ -8359,6 +8368,13 @@
             <a:tailEnd type="triangle"/>
           </a:ln>
         </p:spPr>
+        <p:txBody>
+          <a:bodyPr/>
+          <a:lstStyle/>
+          <a:p>
+            <a:endParaRPr lang="en-US"/>
+          </a:p>
+        </p:txBody>
       </p:sp>
       <p:sp>
         <p:nvSpPr>
@@ -8384,17 +8400,24 @@
             <a:prstDash val="solid"/>
           </a:ln>
         </p:spPr>
+        <p:txBody>
+          <a:bodyPr/>
+          <a:lstStyle/>
+          <a:p>
+            <a:endParaRPr lang="en-US"/>
+          </a:p>
+        </p:txBody>
       </p:sp>
       <p:pic>
         <p:nvPicPr>
-          <p:cNvPr id="13" name="Image 2" descr="preencoded.png">    </p:cNvPr>
+          <p:cNvPr id="13" name="Image 2" descr="preencoded.png"/>
           <p:cNvPicPr>
             <a:picLocks noChangeAspect="1"/>
           </p:cNvPicPr>
           <p:nvPr/>
         </p:nvPicPr>
         <p:blipFill>
-          <a:blip r:embed="rId3"/>
+          <a:blip r:embed="rId5"/>
           <a:stretch>
             <a:fillRect/>
           </a:stretch>
@@ -8430,7 +8453,7 @@
           <a:bodyPr wrap="square" lIns="0" tIns="0" rIns="0" bIns="0" rtlCol="0" anchor="ctr"/>
           <a:lstStyle/>
           <a:p>
-            <a:pPr indent="0" marL="0">
+            <a:pPr marL="0" indent="0">
               <a:buNone/>
             </a:pPr>
             <a:r>
@@ -8447,7 +8470,7 @@
             <a:endParaRPr lang="en-US" sz="1400" dirty="0"/>
           </a:p>
           <a:p>
-            <a:pPr indent="0" marL="0">
+            <a:pPr marL="0" indent="0">
               <a:buNone/>
             </a:pPr>
             <a:r>
@@ -8491,6 +8514,13 @@
             <a:prstDash val="solid"/>
           </a:ln>
         </p:spPr>
+        <p:txBody>
+          <a:bodyPr/>
+          <a:lstStyle/>
+          <a:p>
+            <a:endParaRPr lang="en-US"/>
+          </a:p>
+        </p:txBody>
       </p:sp>
       <p:sp>
         <p:nvSpPr>
@@ -8516,17 +8546,24 @@
             <a:prstDash val="solid"/>
           </a:ln>
         </p:spPr>
+        <p:txBody>
+          <a:bodyPr/>
+          <a:lstStyle/>
+          <a:p>
+            <a:endParaRPr lang="en-US"/>
+          </a:p>
+        </p:txBody>
       </p:sp>
       <p:pic>
         <p:nvPicPr>
-          <p:cNvPr id="17" name="Image 3" descr="preencoded.png">    </p:cNvPr>
+          <p:cNvPr id="17" name="Image 3" descr="preencoded.png"/>
           <p:cNvPicPr>
             <a:picLocks noChangeAspect="1"/>
           </p:cNvPicPr>
           <p:nvPr/>
         </p:nvPicPr>
         <p:blipFill>
-          <a:blip r:embed="rId4"/>
+          <a:blip r:embed="rId6"/>
           <a:stretch>
             <a:fillRect/>
           </a:stretch>
@@ -8562,7 +8599,7 @@
           <a:bodyPr wrap="square" lIns="0" tIns="0" rIns="0" bIns="0" rtlCol="0" anchor="ctr"/>
           <a:lstStyle/>
           <a:p>
-            <a:pPr indent="0" marL="0">
+            <a:pPr marL="0" indent="0">
               <a:buNone/>
             </a:pPr>
             <a:r>
@@ -8601,7 +8638,7 @@
           <a:bodyPr wrap="square" lIns="0" tIns="0" rIns="0" bIns="0" rtlCol="0" anchor="t"/>
           <a:lstStyle/>
           <a:p>
-            <a:pPr indent="0" marL="0">
+            <a:pPr marL="0" indent="0">
               <a:buNone/>
             </a:pPr>
             <a:r>
@@ -8645,6 +8682,13 @@
             <a:prstDash val="solid"/>
           </a:ln>
         </p:spPr>
+        <p:txBody>
+          <a:bodyPr/>
+          <a:lstStyle/>
+          <a:p>
+            <a:endParaRPr lang="en-US"/>
+          </a:p>
+        </p:txBody>
       </p:sp>
       <p:sp>
         <p:nvSpPr>
@@ -8670,17 +8714,24 @@
             <a:prstDash val="solid"/>
           </a:ln>
         </p:spPr>
+        <p:txBody>
+          <a:bodyPr/>
+          <a:lstStyle/>
+          <a:p>
+            <a:endParaRPr lang="en-US"/>
+          </a:p>
+        </p:txBody>
       </p:sp>
       <p:pic>
         <p:nvPicPr>
-          <p:cNvPr id="22" name="Image 4" descr="preencoded.png">    </p:cNvPr>
+          <p:cNvPr id="22" name="Image 4" descr="preencoded.png"/>
           <p:cNvPicPr>
             <a:picLocks noChangeAspect="1"/>
           </p:cNvPicPr>
           <p:nvPr/>
         </p:nvPicPr>
         <p:blipFill>
-          <a:blip r:embed="rId5"/>
+          <a:blip r:embed="rId7"/>
           <a:stretch>
             <a:fillRect/>
           </a:stretch>
@@ -8716,7 +8767,7 @@
           <a:bodyPr wrap="square" lIns="0" tIns="0" rIns="0" bIns="0" rtlCol="0" anchor="ctr"/>
           <a:lstStyle/>
           <a:p>
-            <a:pPr indent="0" marL="0">
+            <a:pPr marL="0" indent="0">
               <a:buNone/>
             </a:pPr>
             <a:r>
@@ -8755,7 +8806,7 @@
           <a:bodyPr wrap="square" lIns="0" tIns="0" rIns="0" bIns="0" rtlCol="0" anchor="t"/>
           <a:lstStyle/>
           <a:p>
-            <a:pPr indent="0" marL="0">
+            <a:pPr marL="0" indent="0">
               <a:buNone/>
             </a:pPr>
             <a:r>
@@ -8799,6 +8850,13 @@
             <a:prstDash val="solid"/>
           </a:ln>
         </p:spPr>
+        <p:txBody>
+          <a:bodyPr/>
+          <a:lstStyle/>
+          <a:p>
+            <a:endParaRPr lang="en-US"/>
+          </a:p>
+        </p:txBody>
       </p:sp>
       <p:sp>
         <p:nvSpPr>
@@ -8821,11 +8879,11 @@
           <a:bodyPr wrap="square" lIns="0" tIns="0" rIns="0" bIns="0" rtlCol="0" anchor="ctr"/>
           <a:lstStyle/>
           <a:p>
-            <a:pPr indent="0" marL="0">
+            <a:pPr marL="0" indent="0">
               <a:buNone/>
             </a:pPr>
             <a:r>
-              <a:rPr lang="en-US" sz="1200" b="1" spc="200" kern="0" dirty="0">
+              <a:rPr lang="en-US" sz="1200" b="1" kern="0" spc="200" dirty="0">
                 <a:solidFill>
                   <a:srgbClr val="E1A624"/>
                 </a:solidFill>
@@ -8860,7 +8918,7 @@
           <a:bodyPr wrap="square" lIns="0" tIns="0" rIns="0" bIns="0" rtlCol="0" anchor="ctr"/>
           <a:lstStyle/>
           <a:p>
-            <a:pPr indent="0" marL="0">
+            <a:pPr marL="0" indent="0">
               <a:buNone/>
             </a:pPr>
             <a:r>
@@ -8880,7 +8938,7 @@
       </p:sp>
       <p:sp>
         <p:nvSpPr>
-          <p:cNvPr id="25" name="Slide Number Placeholder 0"/>
+          <p:cNvPr id="28" name="Slide Number Placeholder 0"/>
           <p:cNvSpPr>
             <a:spLocks noGrp="1"/>
           </p:cNvSpPr>
@@ -8898,7 +8956,7 @@
           </a:prstGeom>
           <a:extLst>
             <a:ext uri="{C572A759-6A51-4108-AA02-DFA0A04FC94B}">
-              <ma14:wrappingTextBoxFlag xmlns:ma14="http://schemas.microsoft.com/office/mac/drawingml/2011/main" val="0"/>
+              <ma14:wrappingTextBoxFlag xmlns:ma14="http://schemas.microsoft.com/office/mac/drawingml/2011/main" xmlns="" val="0"/>
             </a:ext>
           </a:extLst>
         </p:spPr>
@@ -8919,7 +8977,7 @@
           <a:p>
             <a:pPr algn="r"/>
             <a:fld id="{F7021451-1387-4CA6-816F-3879F97B5CBC}" type="slidenum">
-              <a:rPr b="0" lang="en-US"/>
+              <a:rPr lang="en-US" b="0"/>
               <a:t>2</a:t>
             </a:fld>
             <a:endParaRPr lang="en-US"/>
@@ -8972,7 +9030,7 @@
           <a:bodyPr wrap="square" lIns="0" tIns="0" rIns="0" bIns="0" rtlCol="0" anchor="ctr"/>
           <a:lstStyle/>
           <a:p>
-            <a:pPr indent="0" marL="0">
+            <a:pPr marL="0" indent="0">
               <a:buNone/>
             </a:pPr>
             <a:r>
@@ -9011,7 +9069,7 @@
           <a:bodyPr wrap="square" lIns="0" tIns="0" rIns="0" bIns="0" rtlCol="0" anchor="ctr"/>
           <a:lstStyle/>
           <a:p>
-            <a:pPr indent="0" marL="0">
+            <a:pPr marL="0" indent="0">
               <a:buNone/>
             </a:pPr>
             <a:r>
@@ -9055,6 +9113,13 @@
             <a:prstDash val="solid"/>
           </a:ln>
         </p:spPr>
+        <p:txBody>
+          <a:bodyPr/>
+          <a:lstStyle/>
+          <a:p>
+            <a:endParaRPr lang="en-US"/>
+          </a:p>
+        </p:txBody>
       </p:sp>
       <p:sp>
         <p:nvSpPr>
@@ -9080,6 +9145,13 @@
             <a:prstDash val="solid"/>
           </a:ln>
         </p:spPr>
+        <p:txBody>
+          <a:bodyPr/>
+          <a:lstStyle/>
+          <a:p>
+            <a:endParaRPr lang="en-US"/>
+          </a:p>
+        </p:txBody>
       </p:sp>
       <p:sp>
         <p:nvSpPr>
@@ -9102,7 +9174,7 @@
           <a:bodyPr wrap="square" lIns="0" tIns="0" rIns="0" bIns="0" rtlCol="0" anchor="ctr"/>
           <a:lstStyle/>
           <a:p>
-            <a:pPr algn="ctr" indent="0" marL="0">
+            <a:pPr marL="0" indent="0" algn="ctr">
               <a:buNone/>
             </a:pPr>
             <a:r>
@@ -9141,11 +9213,11 @@
           <a:bodyPr wrap="square" lIns="0" tIns="0" rIns="0" bIns="0" rtlCol="0" anchor="ctr"/>
           <a:lstStyle/>
           <a:p>
-            <a:pPr indent="0" marL="0">
+            <a:pPr marL="0" indent="0">
               <a:buNone/>
             </a:pPr>
             <a:r>
-              <a:rPr lang="en-US" sz="1400" b="1" spc="200" kern="0" dirty="0">
+              <a:rPr lang="en-US" sz="1400" b="1" kern="0" spc="200" dirty="0">
                 <a:solidFill>
                   <a:srgbClr val="2E6B4F"/>
                 </a:solidFill>
@@ -9180,7 +9252,7 @@
           <a:bodyPr wrap="square" lIns="0" tIns="0" rIns="0" bIns="0" rtlCol="0" anchor="t"/>
           <a:lstStyle/>
           <a:p>
-            <a:pPr indent="0" marL="0">
+            <a:pPr marL="0" indent="0">
               <a:buNone/>
             </a:pPr>
             <a:r>
@@ -9219,7 +9291,7 @@
           <a:bodyPr wrap="square" lIns="0" tIns="0" rIns="0" bIns="0" rtlCol="0" anchor="t"/>
           <a:lstStyle/>
           <a:p>
-            <a:pPr indent="0" marL="0">
+            <a:pPr marL="0" indent="0">
               <a:buNone/>
             </a:pPr>
             <a:r>
@@ -9263,6 +9335,13 @@
             <a:prstDash val="solid"/>
           </a:ln>
         </p:spPr>
+        <p:txBody>
+          <a:bodyPr/>
+          <a:lstStyle/>
+          <a:p>
+            <a:endParaRPr lang="en-US"/>
+          </a:p>
+        </p:txBody>
       </p:sp>
       <p:sp>
         <p:nvSpPr>
@@ -9288,6 +9367,13 @@
             <a:prstDash val="solid"/>
           </a:ln>
         </p:spPr>
+        <p:txBody>
+          <a:bodyPr/>
+          <a:lstStyle/>
+          <a:p>
+            <a:endParaRPr lang="en-US"/>
+          </a:p>
+        </p:txBody>
       </p:sp>
       <p:sp>
         <p:nvSpPr>
@@ -9310,7 +9396,7 @@
           <a:bodyPr wrap="square" lIns="0" tIns="0" rIns="0" bIns="0" rtlCol="0" anchor="ctr"/>
           <a:lstStyle/>
           <a:p>
-            <a:pPr algn="ctr" indent="0" marL="0">
+            <a:pPr marL="0" indent="0" algn="ctr">
               <a:buNone/>
             </a:pPr>
             <a:r>
@@ -9349,11 +9435,11 @@
           <a:bodyPr wrap="square" lIns="0" tIns="0" rIns="0" bIns="0" rtlCol="0" anchor="ctr"/>
           <a:lstStyle/>
           <a:p>
-            <a:pPr indent="0" marL="0">
+            <a:pPr marL="0" indent="0">
               <a:buNone/>
             </a:pPr>
             <a:r>
-              <a:rPr lang="en-US" sz="1400" b="1" spc="200" kern="0" dirty="0">
+              <a:rPr lang="en-US" sz="1400" b="1" kern="0" spc="200" dirty="0">
                 <a:solidFill>
                   <a:srgbClr val="2E6B4F"/>
                 </a:solidFill>
@@ -9388,7 +9474,7 @@
           <a:bodyPr wrap="square" lIns="0" tIns="0" rIns="0" bIns="0" rtlCol="0" anchor="t"/>
           <a:lstStyle/>
           <a:p>
-            <a:pPr indent="0" marL="0">
+            <a:pPr marL="0" indent="0">
               <a:buNone/>
             </a:pPr>
             <a:r>
@@ -9427,7 +9513,7 @@
           <a:bodyPr wrap="square" lIns="0" tIns="0" rIns="0" bIns="0" rtlCol="0" anchor="t"/>
           <a:lstStyle/>
           <a:p>
-            <a:pPr indent="0" marL="0">
+            <a:pPr marL="0" indent="0">
               <a:buNone/>
             </a:pPr>
             <a:r>
@@ -9471,6 +9557,13 @@
             <a:prstDash val="solid"/>
           </a:ln>
         </p:spPr>
+        <p:txBody>
+          <a:bodyPr/>
+          <a:lstStyle/>
+          <a:p>
+            <a:endParaRPr lang="en-US"/>
+          </a:p>
+        </p:txBody>
       </p:sp>
       <p:sp>
         <p:nvSpPr>
@@ -9496,6 +9589,13 @@
             <a:prstDash val="solid"/>
           </a:ln>
         </p:spPr>
+        <p:txBody>
+          <a:bodyPr/>
+          <a:lstStyle/>
+          <a:p>
+            <a:endParaRPr lang="en-US"/>
+          </a:p>
+        </p:txBody>
       </p:sp>
       <p:sp>
         <p:nvSpPr>
@@ -9518,7 +9618,7 @@
           <a:bodyPr wrap="square" lIns="0" tIns="0" rIns="0" bIns="0" rtlCol="0" anchor="ctr"/>
           <a:lstStyle/>
           <a:p>
-            <a:pPr algn="ctr" indent="0" marL="0">
+            <a:pPr marL="0" indent="0" algn="ctr">
               <a:buNone/>
             </a:pPr>
             <a:r>
@@ -9557,11 +9657,11 @@
           <a:bodyPr wrap="square" lIns="0" tIns="0" rIns="0" bIns="0" rtlCol="0" anchor="ctr"/>
           <a:lstStyle/>
           <a:p>
-            <a:pPr indent="0" marL="0">
+            <a:pPr marL="0" indent="0">
               <a:buNone/>
             </a:pPr>
             <a:r>
-              <a:rPr lang="en-US" sz="1400" b="1" spc="200" kern="0" dirty="0">
+              <a:rPr lang="en-US" sz="1400" b="1" kern="0" spc="200" dirty="0">
                 <a:solidFill>
                   <a:srgbClr val="2E6B4F"/>
                 </a:solidFill>
@@ -9596,7 +9696,7 @@
           <a:bodyPr wrap="square" lIns="0" tIns="0" rIns="0" bIns="0" rtlCol="0" anchor="t"/>
           <a:lstStyle/>
           <a:p>
-            <a:pPr indent="0" marL="0">
+            <a:pPr marL="0" indent="0">
               <a:buNone/>
             </a:pPr>
             <a:r>
@@ -9635,7 +9735,7 @@
           <a:bodyPr wrap="square" lIns="0" tIns="0" rIns="0" bIns="0" rtlCol="0" anchor="t"/>
           <a:lstStyle/>
           <a:p>
-            <a:pPr indent="0" marL="0">
+            <a:pPr marL="0" indent="0">
               <a:buNone/>
             </a:pPr>
             <a:r>
@@ -9674,11 +9774,11 @@
           <a:bodyPr wrap="square" lIns="0" tIns="0" rIns="0" bIns="0" rtlCol="0" anchor="ctr"/>
           <a:lstStyle/>
           <a:p>
-            <a:pPr indent="0" marL="0">
+            <a:pPr marL="0" indent="0">
               <a:buNone/>
             </a:pPr>
             <a:r>
-              <a:rPr lang="en-US" sz="1200" b="1" spc="200" kern="0" dirty="0">
+              <a:rPr lang="en-US" sz="1200" b="1" kern="0" spc="200" dirty="0">
                 <a:solidFill>
                   <a:srgbClr val="5E6A64"/>
                 </a:solidFill>
@@ -9716,17 +9816,24 @@
             <a:prstDash val="solid"/>
           </a:ln>
         </p:spPr>
+        <p:txBody>
+          <a:bodyPr/>
+          <a:lstStyle/>
+          <a:p>
+            <a:endParaRPr lang="en-US"/>
+          </a:p>
+        </p:txBody>
       </p:sp>
       <p:pic>
         <p:nvPicPr>
-          <p:cNvPr id="24" name="Image 0" descr="preencoded.png">    </p:cNvPr>
+          <p:cNvPr id="24" name="Image 0" descr="preencoded.png"/>
           <p:cNvPicPr>
             <a:picLocks noChangeAspect="1"/>
           </p:cNvPicPr>
           <p:nvPr/>
         </p:nvPicPr>
         <p:blipFill>
-          <a:blip r:embed="rId1"/>
+          <a:blip r:embed="rId3"/>
           <a:stretch>
             <a:fillRect/>
           </a:stretch>
@@ -9762,7 +9869,7 @@
           <a:bodyPr wrap="square" lIns="0" tIns="0" rIns="0" bIns="0" rtlCol="0" anchor="ctr"/>
           <a:lstStyle/>
           <a:p>
-            <a:pPr indent="0" marL="0">
+            <a:pPr marL="0" indent="0">
               <a:buNone/>
             </a:pPr>
             <a:r>
@@ -9776,9 +9883,6 @@
               </a:rPr>
               <a:t>4   </a:t>
             </a:r>
-            <a:pPr indent="0" marL="0">
-              <a:buNone/>
-            </a:pPr>
             <a:r>
               <a:rPr lang="en-US" sz="1600" dirty="0">
                 <a:solidFill>
@@ -9818,17 +9922,24 @@
             <a:prstDash val="solid"/>
           </a:ln>
         </p:spPr>
+        <p:txBody>
+          <a:bodyPr/>
+          <a:lstStyle/>
+          <a:p>
+            <a:endParaRPr lang="en-US"/>
+          </a:p>
+        </p:txBody>
       </p:sp>
       <p:pic>
         <p:nvPicPr>
-          <p:cNvPr id="27" name="Image 1" descr="preencoded.png">    </p:cNvPr>
+          <p:cNvPr id="27" name="Image 1" descr="preencoded.png"/>
           <p:cNvPicPr>
             <a:picLocks noChangeAspect="1"/>
           </p:cNvPicPr>
           <p:nvPr/>
         </p:nvPicPr>
         <p:blipFill>
-          <a:blip r:embed="rId2"/>
+          <a:blip r:embed="rId4"/>
           <a:stretch>
             <a:fillRect/>
           </a:stretch>
@@ -9864,7 +9975,7 @@
           <a:bodyPr wrap="square" lIns="0" tIns="0" rIns="0" bIns="0" rtlCol="0" anchor="ctr"/>
           <a:lstStyle/>
           <a:p>
-            <a:pPr indent="0" marL="0">
+            <a:pPr marL="0" indent="0">
               <a:buNone/>
             </a:pPr>
             <a:r>
@@ -9878,9 +9989,6 @@
               </a:rPr>
               <a:t>5   </a:t>
             </a:r>
-            <a:pPr indent="0" marL="0">
-              <a:buNone/>
-            </a:pPr>
             <a:r>
               <a:rPr lang="en-US" sz="1600" dirty="0">
                 <a:solidFill>
@@ -9898,7 +10006,7 @@
       </p:sp>
       <p:sp>
         <p:nvSpPr>
-          <p:cNvPr id="25" name="Slide Number Placeholder 0"/>
+          <p:cNvPr id="29" name="Slide Number Placeholder 0"/>
           <p:cNvSpPr>
             <a:spLocks noGrp="1"/>
           </p:cNvSpPr>
@@ -9916,7 +10024,7 @@
           </a:prstGeom>
           <a:extLst>
             <a:ext uri="{C572A759-6A51-4108-AA02-DFA0A04FC94B}">
-              <ma14:wrappingTextBoxFlag xmlns:ma14="http://schemas.microsoft.com/office/mac/drawingml/2011/main" val="0"/>
+              <ma14:wrappingTextBoxFlag xmlns:ma14="http://schemas.microsoft.com/office/mac/drawingml/2011/main" xmlns="" val="0"/>
             </a:ext>
           </a:extLst>
         </p:spPr>
@@ -9937,7 +10045,7 @@
           <a:p>
             <a:pPr algn="r"/>
             <a:fld id="{F7021451-1387-4CA6-816F-3879F97B5CBC}" type="slidenum">
-              <a:rPr b="0" lang="en-US"/>
+              <a:rPr lang="en-US" b="0"/>
               <a:t>3</a:t>
             </a:fld>
             <a:endParaRPr lang="en-US"/>
@@ -9990,7 +10098,7 @@
           <a:bodyPr wrap="square" lIns="0" tIns="0" rIns="0" bIns="0" rtlCol="0" anchor="ctr"/>
           <a:lstStyle/>
           <a:p>
-            <a:pPr indent="0" marL="0">
+            <a:pPr marL="0" indent="0">
               <a:buNone/>
             </a:pPr>
             <a:r>
@@ -10029,7 +10137,7 @@
           <a:bodyPr wrap="square" lIns="0" tIns="0" rIns="0" bIns="0" rtlCol="0" anchor="ctr"/>
           <a:lstStyle/>
           <a:p>
-            <a:pPr indent="0" marL="0">
+            <a:pPr marL="0" indent="0">
               <a:buNone/>
             </a:pPr>
             <a:r>
@@ -10073,6 +10181,13 @@
             <a:prstDash val="solid"/>
           </a:ln>
         </p:spPr>
+        <p:txBody>
+          <a:bodyPr/>
+          <a:lstStyle/>
+          <a:p>
+            <a:endParaRPr lang="en-US"/>
+          </a:p>
+        </p:txBody>
       </p:sp>
       <p:sp>
         <p:nvSpPr>
@@ -10098,17 +10213,24 @@
             <a:prstDash val="solid"/>
           </a:ln>
         </p:spPr>
+        <p:txBody>
+          <a:bodyPr/>
+          <a:lstStyle/>
+          <a:p>
+            <a:endParaRPr lang="en-US"/>
+          </a:p>
+        </p:txBody>
       </p:sp>
       <p:pic>
         <p:nvPicPr>
-          <p:cNvPr id="6" name="Image 0" descr="preencoded.png">    </p:cNvPr>
+          <p:cNvPr id="6" name="Image 0" descr="preencoded.png"/>
           <p:cNvPicPr>
             <a:picLocks noChangeAspect="1"/>
           </p:cNvPicPr>
           <p:nvPr/>
         </p:nvPicPr>
         <p:blipFill>
-          <a:blip r:embed="rId1"/>
+          <a:blip r:embed="rId3"/>
           <a:stretch>
             <a:fillRect/>
           </a:stretch>
@@ -10144,7 +10266,7 @@
           <a:bodyPr wrap="square" lIns="0" tIns="0" rIns="0" bIns="0" rtlCol="0" anchor="ctr"/>
           <a:lstStyle/>
           <a:p>
-            <a:pPr indent="0" marL="0">
+            <a:pPr marL="0" indent="0">
               <a:buNone/>
             </a:pPr>
             <a:r>
@@ -10183,7 +10305,7 @@
           <a:bodyPr wrap="square" lIns="0" tIns="0" rIns="0" bIns="0" rtlCol="0" anchor="t"/>
           <a:lstStyle/>
           <a:p>
-            <a:pPr indent="0" marL="0">
+            <a:pPr marL="0" indent="0">
               <a:buNone/>
             </a:pPr>
             <a:r>
@@ -10227,6 +10349,13 @@
             <a:prstDash val="solid"/>
           </a:ln>
         </p:spPr>
+        <p:txBody>
+          <a:bodyPr/>
+          <a:lstStyle/>
+          <a:p>
+            <a:endParaRPr lang="en-US"/>
+          </a:p>
+        </p:txBody>
       </p:sp>
       <p:sp>
         <p:nvSpPr>
@@ -10252,17 +10381,24 @@
             <a:prstDash val="solid"/>
           </a:ln>
         </p:spPr>
+        <p:txBody>
+          <a:bodyPr/>
+          <a:lstStyle/>
+          <a:p>
+            <a:endParaRPr lang="en-US"/>
+          </a:p>
+        </p:txBody>
       </p:sp>
       <p:pic>
         <p:nvPicPr>
-          <p:cNvPr id="11" name="Image 1" descr="preencoded.png">    </p:cNvPr>
+          <p:cNvPr id="11" name="Image 1" descr="preencoded.png"/>
           <p:cNvPicPr>
             <a:picLocks noChangeAspect="1"/>
           </p:cNvPicPr>
           <p:nvPr/>
         </p:nvPicPr>
         <p:blipFill>
-          <a:blip r:embed="rId2"/>
+          <a:blip r:embed="rId4"/>
           <a:stretch>
             <a:fillRect/>
           </a:stretch>
@@ -10298,7 +10434,7 @@
           <a:bodyPr wrap="square" lIns="0" tIns="0" rIns="0" bIns="0" rtlCol="0" anchor="ctr"/>
           <a:lstStyle/>
           <a:p>
-            <a:pPr indent="0" marL="0">
+            <a:pPr marL="0" indent="0">
               <a:buNone/>
             </a:pPr>
             <a:r>
@@ -10337,7 +10473,7 @@
           <a:bodyPr wrap="square" lIns="0" tIns="0" rIns="0" bIns="0" rtlCol="0" anchor="t"/>
           <a:lstStyle/>
           <a:p>
-            <a:pPr indent="0" marL="0">
+            <a:pPr marL="0" indent="0">
               <a:buNone/>
             </a:pPr>
             <a:r>
@@ -10381,6 +10517,13 @@
             <a:prstDash val="solid"/>
           </a:ln>
         </p:spPr>
+        <p:txBody>
+          <a:bodyPr/>
+          <a:lstStyle/>
+          <a:p>
+            <a:endParaRPr lang="en-US"/>
+          </a:p>
+        </p:txBody>
       </p:sp>
       <p:sp>
         <p:nvSpPr>
@@ -10406,17 +10549,24 @@
             <a:prstDash val="solid"/>
           </a:ln>
         </p:spPr>
+        <p:txBody>
+          <a:bodyPr/>
+          <a:lstStyle/>
+          <a:p>
+            <a:endParaRPr lang="en-US"/>
+          </a:p>
+        </p:txBody>
       </p:sp>
       <p:pic>
         <p:nvPicPr>
-          <p:cNvPr id="16" name="Image 2" descr="preencoded.png">    </p:cNvPr>
+          <p:cNvPr id="16" name="Image 2" descr="preencoded.png"/>
           <p:cNvPicPr>
             <a:picLocks noChangeAspect="1"/>
           </p:cNvPicPr>
           <p:nvPr/>
         </p:nvPicPr>
         <p:blipFill>
-          <a:blip r:embed="rId3"/>
+          <a:blip r:embed="rId5"/>
           <a:stretch>
             <a:fillRect/>
           </a:stretch>
@@ -10452,7 +10602,7 @@
           <a:bodyPr wrap="square" lIns="0" tIns="0" rIns="0" bIns="0" rtlCol="0" anchor="ctr"/>
           <a:lstStyle/>
           <a:p>
-            <a:pPr indent="0" marL="0">
+            <a:pPr marL="0" indent="0">
               <a:buNone/>
             </a:pPr>
             <a:r>
@@ -10491,7 +10641,7 @@
           <a:bodyPr wrap="square" lIns="0" tIns="0" rIns="0" bIns="0" rtlCol="0" anchor="t"/>
           <a:lstStyle/>
           <a:p>
-            <a:pPr indent="0" marL="0">
+            <a:pPr marL="0" indent="0">
               <a:buNone/>
             </a:pPr>
             <a:r>
@@ -10535,6 +10685,13 @@
             <a:prstDash val="solid"/>
           </a:ln>
         </p:spPr>
+        <p:txBody>
+          <a:bodyPr/>
+          <a:lstStyle/>
+          <a:p>
+            <a:endParaRPr lang="en-US"/>
+          </a:p>
+        </p:txBody>
       </p:sp>
       <p:sp>
         <p:nvSpPr>
@@ -10560,17 +10717,24 @@
             <a:prstDash val="solid"/>
           </a:ln>
         </p:spPr>
+        <p:txBody>
+          <a:bodyPr/>
+          <a:lstStyle/>
+          <a:p>
+            <a:endParaRPr lang="en-US"/>
+          </a:p>
+        </p:txBody>
       </p:sp>
       <p:pic>
         <p:nvPicPr>
-          <p:cNvPr id="21" name="Image 3" descr="preencoded.png">    </p:cNvPr>
+          <p:cNvPr id="21" name="Image 3" descr="preencoded.png"/>
           <p:cNvPicPr>
             <a:picLocks noChangeAspect="1"/>
           </p:cNvPicPr>
           <p:nvPr/>
         </p:nvPicPr>
         <p:blipFill>
-          <a:blip r:embed="rId4"/>
+          <a:blip r:embed="rId6"/>
           <a:stretch>
             <a:fillRect/>
           </a:stretch>
@@ -10606,7 +10770,7 @@
           <a:bodyPr wrap="square" lIns="0" tIns="0" rIns="0" bIns="0" rtlCol="0" anchor="ctr"/>
           <a:lstStyle/>
           <a:p>
-            <a:pPr indent="0" marL="0">
+            <a:pPr marL="0" indent="0">
               <a:buNone/>
             </a:pPr>
             <a:r>
@@ -10645,7 +10809,7 @@
           <a:bodyPr wrap="square" lIns="0" tIns="0" rIns="0" bIns="0" rtlCol="0" anchor="t"/>
           <a:lstStyle/>
           <a:p>
-            <a:pPr indent="0" marL="0">
+            <a:pPr marL="0" indent="0">
               <a:buNone/>
             </a:pPr>
             <a:r>
@@ -10689,6 +10853,13 @@
             <a:prstDash val="solid"/>
           </a:ln>
         </p:spPr>
+        <p:txBody>
+          <a:bodyPr/>
+          <a:lstStyle/>
+          <a:p>
+            <a:endParaRPr lang="en-US"/>
+          </a:p>
+        </p:txBody>
       </p:sp>
       <p:sp>
         <p:nvSpPr>
@@ -10714,17 +10885,24 @@
             <a:prstDash val="solid"/>
           </a:ln>
         </p:spPr>
+        <p:txBody>
+          <a:bodyPr/>
+          <a:lstStyle/>
+          <a:p>
+            <a:endParaRPr lang="en-US"/>
+          </a:p>
+        </p:txBody>
       </p:sp>
       <p:pic>
         <p:nvPicPr>
-          <p:cNvPr id="26" name="Image 4" descr="preencoded.png">    </p:cNvPr>
+          <p:cNvPr id="26" name="Image 4" descr="preencoded.png"/>
           <p:cNvPicPr>
             <a:picLocks noChangeAspect="1"/>
           </p:cNvPicPr>
           <p:nvPr/>
         </p:nvPicPr>
         <p:blipFill>
-          <a:blip r:embed="rId5"/>
+          <a:blip r:embed="rId7"/>
           <a:stretch>
             <a:fillRect/>
           </a:stretch>
@@ -10760,7 +10938,7 @@
           <a:bodyPr wrap="square" lIns="0" tIns="0" rIns="0" bIns="0" rtlCol="0" anchor="ctr"/>
           <a:lstStyle/>
           <a:p>
-            <a:pPr indent="0" marL="0">
+            <a:pPr marL="0" indent="0">
               <a:buNone/>
             </a:pPr>
             <a:r>
@@ -10799,7 +10977,7 @@
           <a:bodyPr wrap="square" lIns="0" tIns="0" rIns="0" bIns="0" rtlCol="0" anchor="t"/>
           <a:lstStyle/>
           <a:p>
-            <a:pPr indent="0" marL="0">
+            <a:pPr marL="0" indent="0">
               <a:buNone/>
             </a:pPr>
             <a:r>
@@ -10843,6 +11021,13 @@
             <a:prstDash val="solid"/>
           </a:ln>
         </p:spPr>
+        <p:txBody>
+          <a:bodyPr/>
+          <a:lstStyle/>
+          <a:p>
+            <a:endParaRPr lang="en-US"/>
+          </a:p>
+        </p:txBody>
       </p:sp>
       <p:sp>
         <p:nvSpPr>
@@ -10868,17 +11053,24 @@
             <a:prstDash val="solid"/>
           </a:ln>
         </p:spPr>
+        <p:txBody>
+          <a:bodyPr/>
+          <a:lstStyle/>
+          <a:p>
+            <a:endParaRPr lang="en-US"/>
+          </a:p>
+        </p:txBody>
       </p:sp>
       <p:pic>
         <p:nvPicPr>
-          <p:cNvPr id="31" name="Image 5" descr="preencoded.png">    </p:cNvPr>
+          <p:cNvPr id="31" name="Image 5" descr="preencoded.png"/>
           <p:cNvPicPr>
             <a:picLocks noChangeAspect="1"/>
           </p:cNvPicPr>
           <p:nvPr/>
         </p:nvPicPr>
         <p:blipFill>
-          <a:blip r:embed="rId6"/>
+          <a:blip r:embed="rId8"/>
           <a:stretch>
             <a:fillRect/>
           </a:stretch>
@@ -10914,7 +11106,7 @@
           <a:bodyPr wrap="square" lIns="0" tIns="0" rIns="0" bIns="0" rtlCol="0" anchor="ctr"/>
           <a:lstStyle/>
           <a:p>
-            <a:pPr indent="0" marL="0">
+            <a:pPr marL="0" indent="0">
               <a:buNone/>
             </a:pPr>
             <a:r>
@@ -10953,7 +11145,7 @@
           <a:bodyPr wrap="square" lIns="0" tIns="0" rIns="0" bIns="0" rtlCol="0" anchor="t"/>
           <a:lstStyle/>
           <a:p>
-            <a:pPr indent="0" marL="0">
+            <a:pPr marL="0" indent="0">
               <a:buNone/>
             </a:pPr>
             <a:r>
@@ -10992,7 +11184,7 @@
           <a:bodyPr wrap="square" lIns="0" tIns="0" rIns="0" bIns="0" rtlCol="0" anchor="ctr"/>
           <a:lstStyle/>
           <a:p>
-            <a:pPr indent="0" marL="0">
+            <a:pPr marL="0" indent="0">
               <a:buNone/>
             </a:pPr>
             <a:r>
@@ -11012,7 +11204,7 @@
       </p:sp>
       <p:sp>
         <p:nvSpPr>
-          <p:cNvPr id="25" name="Slide Number Placeholder 0"/>
+          <p:cNvPr id="35" name="Slide Number Placeholder 0"/>
           <p:cNvSpPr>
             <a:spLocks noGrp="1"/>
           </p:cNvSpPr>
@@ -11030,7 +11222,7 @@
           </a:prstGeom>
           <a:extLst>
             <a:ext uri="{C572A759-6A51-4108-AA02-DFA0A04FC94B}">
-              <ma14:wrappingTextBoxFlag xmlns:ma14="http://schemas.microsoft.com/office/mac/drawingml/2011/main" val="0"/>
+              <ma14:wrappingTextBoxFlag xmlns:ma14="http://schemas.microsoft.com/office/mac/drawingml/2011/main" xmlns="" val="0"/>
             </a:ext>
           </a:extLst>
         </p:spPr>
@@ -11051,7 +11243,7 @@
           <a:p>
             <a:pPr algn="r"/>
             <a:fld id="{F7021451-1387-4CA6-816F-3879F97B5CBC}" type="slidenum">
-              <a:rPr b="0" lang="en-US"/>
+              <a:rPr lang="en-US" b="0"/>
               <a:t>4</a:t>
             </a:fld>
             <a:endParaRPr lang="en-US"/>
@@ -11104,7 +11296,7 @@
           <a:bodyPr wrap="square" lIns="0" tIns="0" rIns="0" bIns="0" rtlCol="0" anchor="ctr"/>
           <a:lstStyle/>
           <a:p>
-            <a:pPr indent="0" marL="0">
+            <a:pPr marL="0" indent="0">
               <a:buNone/>
             </a:pPr>
             <a:r>
@@ -11143,7 +11335,7 @@
           <a:bodyPr wrap="square" lIns="0" tIns="0" rIns="0" bIns="0" rtlCol="0" anchor="ctr"/>
           <a:lstStyle/>
           <a:p>
-            <a:pPr indent="0" marL="0">
+            <a:pPr marL="0" indent="0">
               <a:buNone/>
             </a:pPr>
             <a:r>
@@ -11177,18 +11369,48 @@
         </p:nvGraphicFramePr>
         <p:xfrm>
           <a:off x="548640" y="1691640"/>
-          <a:ext cx="11094415" cy="914400"/>
+          <a:ext cx="11091672" cy="4389120"/>
         </p:xfrm>
         <a:graphic>
           <a:graphicData uri="http://schemas.openxmlformats.org/drawingml/2006/table">
             <a:tbl>
               <a:tblPr/>
               <a:tblGrid>
-                <a:gridCol w="2377440"/>
-                <a:gridCol w="4160520"/>
-                <a:gridCol w="1600200"/>
-                <a:gridCol w="1417320"/>
-                <a:gridCol w="1536192"/>
+                <a:gridCol w="2377440">
+                  <a:extLst>
+                    <a:ext uri="{9D8B030D-6E8A-4147-A177-3AD203B41FA5}">
+                      <a16:colId xmlns:a16="http://schemas.microsoft.com/office/drawing/2014/main" val="20000"/>
+                    </a:ext>
+                  </a:extLst>
+                </a:gridCol>
+                <a:gridCol w="4160520">
+                  <a:extLst>
+                    <a:ext uri="{9D8B030D-6E8A-4147-A177-3AD203B41FA5}">
+                      <a16:colId xmlns:a16="http://schemas.microsoft.com/office/drawing/2014/main" val="20001"/>
+                    </a:ext>
+                  </a:extLst>
+                </a:gridCol>
+                <a:gridCol w="1600200">
+                  <a:extLst>
+                    <a:ext uri="{9D8B030D-6E8A-4147-A177-3AD203B41FA5}">
+                      <a16:colId xmlns:a16="http://schemas.microsoft.com/office/drawing/2014/main" val="20002"/>
+                    </a:ext>
+                  </a:extLst>
+                </a:gridCol>
+                <a:gridCol w="1417320">
+                  <a:extLst>
+                    <a:ext uri="{9D8B030D-6E8A-4147-A177-3AD203B41FA5}">
+                      <a16:colId xmlns:a16="http://schemas.microsoft.com/office/drawing/2014/main" val="20003"/>
+                    </a:ext>
+                  </a:extLst>
+                </a:gridCol>
+                <a:gridCol w="1536192">
+                  <a:extLst>
+                    <a:ext uri="{9D8B030D-6E8A-4147-A177-3AD203B41FA5}">
+                      <a16:colId xmlns:a16="http://schemas.microsoft.com/office/drawing/2014/main" val="20004"/>
+                    </a:ext>
+                  </a:extLst>
+                </a:gridCol>
               </a:tblGrid>
               <a:tr h="548640">
                 <a:tc>
@@ -11196,7 +11418,7 @@
                     <a:bodyPr/>
                     <a:lstStyle/>
                     <a:p>
-                      <a:pPr indent="0" marL="0">
+                      <a:pPr marL="0" indent="0">
                         <a:buNone/>
                       </a:pPr>
                       <a:r>
@@ -11217,7 +11439,7 @@
                       </a:endParaRPr>
                     </a:p>
                   </a:txBody>
-                  <a:tcPr marL="91440" marR="91440" marT="45720" marB="45720" anchor="ctr">
+                  <a:tcPr anchor="ctr">
                     <a:lnL w="9525" cap="flat" cmpd="sng" algn="ctr">
                       <a:solidFill>
                         <a:srgbClr val="D6DDD8"/>
@@ -11264,7 +11486,7 @@
                     <a:bodyPr/>
                     <a:lstStyle/>
                     <a:p>
-                      <a:pPr indent="0" marL="0">
+                      <a:pPr marL="0" indent="0">
                         <a:buNone/>
                       </a:pPr>
                       <a:r>
@@ -11285,7 +11507,7 @@
                       </a:endParaRPr>
                     </a:p>
                   </a:txBody>
-                  <a:tcPr marL="91440" marR="91440" marT="45720" marB="45720" anchor="ctr">
+                  <a:tcPr anchor="ctr">
                     <a:lnL w="9525" cap="flat" cmpd="sng" algn="ctr">
                       <a:solidFill>
                         <a:srgbClr val="D6DDD8"/>
@@ -11332,7 +11554,7 @@
                     <a:bodyPr/>
                     <a:lstStyle/>
                     <a:p>
-                      <a:pPr indent="0" marL="0">
+                      <a:pPr marL="0" indent="0">
                         <a:buNone/>
                       </a:pPr>
                       <a:r>
@@ -11353,7 +11575,7 @@
                       </a:endParaRPr>
                     </a:p>
                   </a:txBody>
-                  <a:tcPr marL="91440" marR="91440" marT="45720" marB="45720" anchor="ctr">
+                  <a:tcPr anchor="ctr">
                     <a:lnL w="9525" cap="flat" cmpd="sng" algn="ctr">
                       <a:solidFill>
                         <a:srgbClr val="D6DDD8"/>
@@ -11400,7 +11622,7 @@
                     <a:bodyPr/>
                     <a:lstStyle/>
                     <a:p>
-                      <a:pPr indent="0" marL="0">
+                      <a:pPr marL="0" indent="0">
                         <a:buNone/>
                       </a:pPr>
                       <a:r>
@@ -11421,7 +11643,7 @@
                       </a:endParaRPr>
                     </a:p>
                   </a:txBody>
-                  <a:tcPr marL="91440" marR="91440" marT="45720" marB="45720" anchor="ctr">
+                  <a:tcPr anchor="ctr">
                     <a:lnL w="9525" cap="flat" cmpd="sng" algn="ctr">
                       <a:solidFill>
                         <a:srgbClr val="D6DDD8"/>
@@ -11468,7 +11690,7 @@
                     <a:bodyPr/>
                     <a:lstStyle/>
                     <a:p>
-                      <a:pPr indent="0" marL="0">
+                      <a:pPr marL="0" indent="0">
                         <a:buNone/>
                       </a:pPr>
                       <a:r>
@@ -11489,7 +11711,7 @@
                       </a:endParaRPr>
                     </a:p>
                   </a:txBody>
-                  <a:tcPr marL="91440" marR="91440" marT="45720" marB="45720" anchor="ctr">
+                  <a:tcPr anchor="ctr">
                     <a:lnL w="9525" cap="flat" cmpd="sng" algn="ctr">
                       <a:solidFill>
                         <a:srgbClr val="D6DDD8"/>
@@ -11531,6 +11753,11 @@
                     </a:solidFill>
                   </a:tcPr>
                 </a:tc>
+                <a:extLst>
+                  <a:ext uri="{0D108BD9-81ED-4DB2-BD59-A6C34878D82A}">
+                    <a16:rowId xmlns:a16="http://schemas.microsoft.com/office/drawing/2014/main" val="10000"/>
+                  </a:ext>
+                </a:extLst>
               </a:tr>
               <a:tr h="548640">
                 <a:tc>
@@ -11538,7 +11765,7 @@
                     <a:bodyPr/>
                     <a:lstStyle/>
                     <a:p>
-                      <a:pPr indent="0" marL="0">
+                      <a:pPr marL="0" indent="0">
                         <a:buNone/>
                       </a:pPr>
                       <a:r>
@@ -11559,7 +11786,7 @@
                       </a:endParaRPr>
                     </a:p>
                   </a:txBody>
-                  <a:tcPr marL="91440" marR="91440" marT="45720" marB="45720" anchor="ctr">
+                  <a:tcPr anchor="ctr">
                     <a:lnL w="9525" cap="flat" cmpd="sng" algn="ctr">
                       <a:solidFill>
                         <a:srgbClr val="D6DDD8"/>
@@ -11606,7 +11833,7 @@
                     <a:bodyPr/>
                     <a:lstStyle/>
                     <a:p>
-                      <a:pPr indent="0" marL="0">
+                      <a:pPr marL="0" indent="0">
                         <a:buNone/>
                       </a:pPr>
                       <a:r>
@@ -11627,7 +11854,7 @@
                       </a:endParaRPr>
                     </a:p>
                   </a:txBody>
-                  <a:tcPr marL="91440" marR="91440" marT="45720" marB="45720" anchor="ctr">
+                  <a:tcPr anchor="ctr">
                     <a:lnL w="9525" cap="flat" cmpd="sng" algn="ctr">
                       <a:solidFill>
                         <a:srgbClr val="D6DDD8"/>
@@ -11674,7 +11901,7 @@
                     <a:bodyPr/>
                     <a:lstStyle/>
                     <a:p>
-                      <a:pPr indent="0" marL="0">
+                      <a:pPr marL="0" indent="0">
                         <a:buNone/>
                       </a:pPr>
                       <a:r>
@@ -11695,7 +11922,7 @@
                       </a:endParaRPr>
                     </a:p>
                   </a:txBody>
-                  <a:tcPr marL="91440" marR="91440" marT="45720" marB="45720" anchor="ctr">
+                  <a:tcPr anchor="ctr">
                     <a:lnL w="9525" cap="flat" cmpd="sng" algn="ctr">
                       <a:solidFill>
                         <a:srgbClr val="D6DDD8"/>
@@ -11742,7 +11969,7 @@
                     <a:bodyPr/>
                     <a:lstStyle/>
                     <a:p>
-                      <a:pPr indent="0" marL="0">
+                      <a:pPr marL="0" indent="0">
                         <a:buNone/>
                       </a:pPr>
                       <a:r>
@@ -11763,7 +11990,7 @@
                       </a:endParaRPr>
                     </a:p>
                   </a:txBody>
-                  <a:tcPr marL="91440" marR="91440" marT="45720" marB="45720" anchor="ctr">
+                  <a:tcPr anchor="ctr">
                     <a:lnL w="9525" cap="flat" cmpd="sng" algn="ctr">
                       <a:solidFill>
                         <a:srgbClr val="D6DDD8"/>
@@ -11810,7 +12037,7 @@
                     <a:bodyPr/>
                     <a:lstStyle/>
                     <a:p>
-                      <a:pPr indent="0" marL="0">
+                      <a:pPr marL="0" indent="0">
                         <a:buNone/>
                       </a:pPr>
                       <a:r>
@@ -11824,9 +12051,6 @@
                         </a:rPr>
                         <a:t>● </a:t>
                       </a:r>
-                      <a:pPr indent="0" marL="0">
-                        <a:buNone/>
-                      </a:pPr>
                       <a:r>
                         <a:rPr lang="en-US" sz="1400" dirty="0">
                           <a:solidFill>
@@ -11845,7 +12069,7 @@
                       </a:endParaRPr>
                     </a:p>
                   </a:txBody>
-                  <a:tcPr marL="91440" marR="91440" marT="45720" marB="45720" anchor="ctr">
+                  <a:tcPr anchor="ctr">
                     <a:lnL w="9525" cap="flat" cmpd="sng" algn="ctr">
                       <a:solidFill>
                         <a:srgbClr val="D6DDD8"/>
@@ -11887,6 +12111,11 @@
                     </a:solidFill>
                   </a:tcPr>
                 </a:tc>
+                <a:extLst>
+                  <a:ext uri="{0D108BD9-81ED-4DB2-BD59-A6C34878D82A}">
+                    <a16:rowId xmlns:a16="http://schemas.microsoft.com/office/drawing/2014/main" val="10001"/>
+                  </a:ext>
+                </a:extLst>
               </a:tr>
               <a:tr h="548640">
                 <a:tc>
@@ -11894,7 +12123,7 @@
                     <a:bodyPr/>
                     <a:lstStyle/>
                     <a:p>
-                      <a:pPr indent="0" marL="0">
+                      <a:pPr marL="0" indent="0">
                         <a:buNone/>
                       </a:pPr>
                       <a:r>
@@ -11915,7 +12144,7 @@
                       </a:endParaRPr>
                     </a:p>
                   </a:txBody>
-                  <a:tcPr marL="91440" marR="91440" marT="45720" marB="45720" anchor="ctr">
+                  <a:tcPr anchor="ctr">
                     <a:lnL w="9525" cap="flat" cmpd="sng" algn="ctr">
                       <a:solidFill>
                         <a:srgbClr val="D6DDD8"/>
@@ -11962,7 +12191,7 @@
                     <a:bodyPr/>
                     <a:lstStyle/>
                     <a:p>
-                      <a:pPr indent="0" marL="0">
+                      <a:pPr marL="0" indent="0">
                         <a:buNone/>
                       </a:pPr>
                       <a:r>
@@ -11983,7 +12212,7 @@
                       </a:endParaRPr>
                     </a:p>
                   </a:txBody>
-                  <a:tcPr marL="91440" marR="91440" marT="45720" marB="45720" anchor="ctr">
+                  <a:tcPr anchor="ctr">
                     <a:lnL w="9525" cap="flat" cmpd="sng" algn="ctr">
                       <a:solidFill>
                         <a:srgbClr val="D6DDD8"/>
@@ -12030,7 +12259,7 @@
                     <a:bodyPr/>
                     <a:lstStyle/>
                     <a:p>
-                      <a:pPr indent="0" marL="0">
+                      <a:pPr marL="0" indent="0">
                         <a:buNone/>
                       </a:pPr>
                       <a:r>
@@ -12051,7 +12280,7 @@
                       </a:endParaRPr>
                     </a:p>
                   </a:txBody>
-                  <a:tcPr marL="91440" marR="91440" marT="45720" marB="45720" anchor="ctr">
+                  <a:tcPr anchor="ctr">
                     <a:lnL w="9525" cap="flat" cmpd="sng" algn="ctr">
                       <a:solidFill>
                         <a:srgbClr val="D6DDD8"/>
@@ -12098,7 +12327,7 @@
                     <a:bodyPr/>
                     <a:lstStyle/>
                     <a:p>
-                      <a:pPr indent="0" marL="0">
+                      <a:pPr marL="0" indent="0">
                         <a:buNone/>
                       </a:pPr>
                       <a:r>
@@ -12119,7 +12348,7 @@
                       </a:endParaRPr>
                     </a:p>
                   </a:txBody>
-                  <a:tcPr marL="91440" marR="91440" marT="45720" marB="45720" anchor="ctr">
+                  <a:tcPr anchor="ctr">
                     <a:lnL w="9525" cap="flat" cmpd="sng" algn="ctr">
                       <a:solidFill>
                         <a:srgbClr val="D6DDD8"/>
@@ -12166,7 +12395,7 @@
                     <a:bodyPr/>
                     <a:lstStyle/>
                     <a:p>
-                      <a:pPr indent="0" marL="0">
+                      <a:pPr marL="0" indent="0">
                         <a:buNone/>
                       </a:pPr>
                       <a:r>
@@ -12180,9 +12409,6 @@
                         </a:rPr>
                         <a:t>● </a:t>
                       </a:r>
-                      <a:pPr indent="0" marL="0">
-                        <a:buNone/>
-                      </a:pPr>
                       <a:r>
                         <a:rPr lang="en-US" sz="1400" dirty="0">
                           <a:solidFill>
@@ -12201,7 +12427,7 @@
                       </a:endParaRPr>
                     </a:p>
                   </a:txBody>
-                  <a:tcPr marL="91440" marR="91440" marT="45720" marB="45720" anchor="ctr">
+                  <a:tcPr anchor="ctr">
                     <a:lnL w="9525" cap="flat" cmpd="sng" algn="ctr">
                       <a:solidFill>
                         <a:srgbClr val="D6DDD8"/>
@@ -12243,6 +12469,11 @@
                     </a:solidFill>
                   </a:tcPr>
                 </a:tc>
+                <a:extLst>
+                  <a:ext uri="{0D108BD9-81ED-4DB2-BD59-A6C34878D82A}">
+                    <a16:rowId xmlns:a16="http://schemas.microsoft.com/office/drawing/2014/main" val="10002"/>
+                  </a:ext>
+                </a:extLst>
               </a:tr>
               <a:tr h="548640">
                 <a:tc>
@@ -12250,7 +12481,7 @@
                     <a:bodyPr/>
                     <a:lstStyle/>
                     <a:p>
-                      <a:pPr indent="0" marL="0">
+                      <a:pPr marL="0" indent="0">
                         <a:buNone/>
                       </a:pPr>
                       <a:r>
@@ -12271,7 +12502,7 @@
                       </a:endParaRPr>
                     </a:p>
                   </a:txBody>
-                  <a:tcPr marL="91440" marR="91440" marT="45720" marB="45720" anchor="ctr">
+                  <a:tcPr anchor="ctr">
                     <a:lnL w="9525" cap="flat" cmpd="sng" algn="ctr">
                       <a:solidFill>
                         <a:srgbClr val="D6DDD8"/>
@@ -12318,7 +12549,7 @@
                     <a:bodyPr/>
                     <a:lstStyle/>
                     <a:p>
-                      <a:pPr indent="0" marL="0">
+                      <a:pPr marL="0" indent="0">
                         <a:buNone/>
                       </a:pPr>
                       <a:r>
@@ -12339,7 +12570,7 @@
                       </a:endParaRPr>
                     </a:p>
                   </a:txBody>
-                  <a:tcPr marL="91440" marR="91440" marT="45720" marB="45720" anchor="ctr">
+                  <a:tcPr anchor="ctr">
                     <a:lnL w="9525" cap="flat" cmpd="sng" algn="ctr">
                       <a:solidFill>
                         <a:srgbClr val="D6DDD8"/>
@@ -12386,7 +12617,7 @@
                     <a:bodyPr/>
                     <a:lstStyle/>
                     <a:p>
-                      <a:pPr indent="0" marL="0">
+                      <a:pPr marL="0" indent="0">
                         <a:buNone/>
                       </a:pPr>
                       <a:r>
@@ -12407,7 +12638,7 @@
                       </a:endParaRPr>
                     </a:p>
                   </a:txBody>
-                  <a:tcPr marL="91440" marR="91440" marT="45720" marB="45720" anchor="ctr">
+                  <a:tcPr anchor="ctr">
                     <a:lnL w="9525" cap="flat" cmpd="sng" algn="ctr">
                       <a:solidFill>
                         <a:srgbClr val="D6DDD8"/>
@@ -12454,7 +12685,7 @@
                     <a:bodyPr/>
                     <a:lstStyle/>
                     <a:p>
-                      <a:pPr indent="0" marL="0">
+                      <a:pPr marL="0" indent="0">
                         <a:buNone/>
                       </a:pPr>
                       <a:r>
@@ -12475,7 +12706,7 @@
                       </a:endParaRPr>
                     </a:p>
                   </a:txBody>
-                  <a:tcPr marL="91440" marR="91440" marT="45720" marB="45720" anchor="ctr">
+                  <a:tcPr anchor="ctr">
                     <a:lnL w="9525" cap="flat" cmpd="sng" algn="ctr">
                       <a:solidFill>
                         <a:srgbClr val="D6DDD8"/>
@@ -12522,7 +12753,7 @@
                     <a:bodyPr/>
                     <a:lstStyle/>
                     <a:p>
-                      <a:pPr indent="0" marL="0">
+                      <a:pPr marL="0" indent="0">
                         <a:buNone/>
                       </a:pPr>
                       <a:r>
@@ -12536,9 +12767,6 @@
                         </a:rPr>
                         <a:t>● </a:t>
                       </a:r>
-                      <a:pPr indent="0" marL="0">
-                        <a:buNone/>
-                      </a:pPr>
                       <a:r>
                         <a:rPr lang="en-US" sz="1400" dirty="0">
                           <a:solidFill>
@@ -12557,7 +12785,7 @@
                       </a:endParaRPr>
                     </a:p>
                   </a:txBody>
-                  <a:tcPr marL="91440" marR="91440" marT="45720" marB="45720" anchor="ctr">
+                  <a:tcPr anchor="ctr">
                     <a:lnL w="9525" cap="flat" cmpd="sng" algn="ctr">
                       <a:solidFill>
                         <a:srgbClr val="D6DDD8"/>
@@ -12599,6 +12827,11 @@
                     </a:solidFill>
                   </a:tcPr>
                 </a:tc>
+                <a:extLst>
+                  <a:ext uri="{0D108BD9-81ED-4DB2-BD59-A6C34878D82A}">
+                    <a16:rowId xmlns:a16="http://schemas.microsoft.com/office/drawing/2014/main" val="10003"/>
+                  </a:ext>
+                </a:extLst>
               </a:tr>
               <a:tr h="548640">
                 <a:tc>
@@ -12606,7 +12839,7 @@
                     <a:bodyPr/>
                     <a:lstStyle/>
                     <a:p>
-                      <a:pPr indent="0" marL="0">
+                      <a:pPr marL="0" indent="0">
                         <a:buNone/>
                       </a:pPr>
                       <a:r>
@@ -12627,7 +12860,7 @@
                       </a:endParaRPr>
                     </a:p>
                   </a:txBody>
-                  <a:tcPr marL="91440" marR="91440" marT="45720" marB="45720" anchor="ctr">
+                  <a:tcPr anchor="ctr">
                     <a:lnL w="9525" cap="flat" cmpd="sng" algn="ctr">
                       <a:solidFill>
                         <a:srgbClr val="D6DDD8"/>
@@ -12674,7 +12907,7 @@
                     <a:bodyPr/>
                     <a:lstStyle/>
                     <a:p>
-                      <a:pPr indent="0" marL="0">
+                      <a:pPr marL="0" indent="0">
                         <a:buNone/>
                       </a:pPr>
                       <a:r>
@@ -12695,7 +12928,7 @@
                       </a:endParaRPr>
                     </a:p>
                   </a:txBody>
-                  <a:tcPr marL="91440" marR="91440" marT="45720" marB="45720" anchor="ctr">
+                  <a:tcPr anchor="ctr">
                     <a:lnL w="9525" cap="flat" cmpd="sng" algn="ctr">
                       <a:solidFill>
                         <a:srgbClr val="D6DDD8"/>
@@ -12742,7 +12975,7 @@
                     <a:bodyPr/>
                     <a:lstStyle/>
                     <a:p>
-                      <a:pPr indent="0" marL="0">
+                      <a:pPr marL="0" indent="0">
                         <a:buNone/>
                       </a:pPr>
                       <a:r>
@@ -12763,7 +12996,7 @@
                       </a:endParaRPr>
                     </a:p>
                   </a:txBody>
-                  <a:tcPr marL="91440" marR="91440" marT="45720" marB="45720" anchor="ctr">
+                  <a:tcPr anchor="ctr">
                     <a:lnL w="9525" cap="flat" cmpd="sng" algn="ctr">
                       <a:solidFill>
                         <a:srgbClr val="D6DDD8"/>
@@ -12810,7 +13043,7 @@
                     <a:bodyPr/>
                     <a:lstStyle/>
                     <a:p>
-                      <a:pPr indent="0" marL="0">
+                      <a:pPr marL="0" indent="0">
                         <a:buNone/>
                       </a:pPr>
                       <a:r>
@@ -12831,7 +13064,7 @@
                       </a:endParaRPr>
                     </a:p>
                   </a:txBody>
-                  <a:tcPr marL="91440" marR="91440" marT="45720" marB="45720" anchor="ctr">
+                  <a:tcPr anchor="ctr">
                     <a:lnL w="9525" cap="flat" cmpd="sng" algn="ctr">
                       <a:solidFill>
                         <a:srgbClr val="D6DDD8"/>
@@ -12878,7 +13111,7 @@
                     <a:bodyPr/>
                     <a:lstStyle/>
                     <a:p>
-                      <a:pPr indent="0" marL="0">
+                      <a:pPr marL="0" indent="0">
                         <a:buNone/>
                       </a:pPr>
                       <a:r>
@@ -12892,9 +13125,6 @@
                         </a:rPr>
                         <a:t>● </a:t>
                       </a:r>
-                      <a:pPr indent="0" marL="0">
-                        <a:buNone/>
-                      </a:pPr>
                       <a:r>
                         <a:rPr lang="en-US" sz="1400" dirty="0">
                           <a:solidFill>
@@ -12913,7 +13143,7 @@
                       </a:endParaRPr>
                     </a:p>
                   </a:txBody>
-                  <a:tcPr marL="91440" marR="91440" marT="45720" marB="45720" anchor="ctr">
+                  <a:tcPr anchor="ctr">
                     <a:lnL w="9525" cap="flat" cmpd="sng" algn="ctr">
                       <a:solidFill>
                         <a:srgbClr val="D6DDD8"/>
@@ -12955,6 +13185,11 @@
                     </a:solidFill>
                   </a:tcPr>
                 </a:tc>
+                <a:extLst>
+                  <a:ext uri="{0D108BD9-81ED-4DB2-BD59-A6C34878D82A}">
+                    <a16:rowId xmlns:a16="http://schemas.microsoft.com/office/drawing/2014/main" val="10004"/>
+                  </a:ext>
+                </a:extLst>
               </a:tr>
               <a:tr h="548640">
                 <a:tc>
@@ -12962,7 +13197,7 @@
                     <a:bodyPr/>
                     <a:lstStyle/>
                     <a:p>
-                      <a:pPr indent="0" marL="0">
+                      <a:pPr marL="0" indent="0">
                         <a:buNone/>
                       </a:pPr>
                       <a:r>
@@ -12983,7 +13218,7 @@
                       </a:endParaRPr>
                     </a:p>
                   </a:txBody>
-                  <a:tcPr marL="91440" marR="91440" marT="45720" marB="45720" anchor="ctr">
+                  <a:tcPr anchor="ctr">
                     <a:lnL w="9525" cap="flat" cmpd="sng" algn="ctr">
                       <a:solidFill>
                         <a:srgbClr val="D6DDD8"/>
@@ -13030,7 +13265,7 @@
                     <a:bodyPr/>
                     <a:lstStyle/>
                     <a:p>
-                      <a:pPr indent="0" marL="0">
+                      <a:pPr marL="0" indent="0">
                         <a:buNone/>
                       </a:pPr>
                       <a:r>
@@ -13051,7 +13286,7 @@
                       </a:endParaRPr>
                     </a:p>
                   </a:txBody>
-                  <a:tcPr marL="91440" marR="91440" marT="45720" marB="45720" anchor="ctr">
+                  <a:tcPr anchor="ctr">
                     <a:lnL w="9525" cap="flat" cmpd="sng" algn="ctr">
                       <a:solidFill>
                         <a:srgbClr val="D6DDD8"/>
@@ -13098,7 +13333,7 @@
                     <a:bodyPr/>
                     <a:lstStyle/>
                     <a:p>
-                      <a:pPr indent="0" marL="0">
+                      <a:pPr marL="0" indent="0">
                         <a:buNone/>
                       </a:pPr>
                       <a:r>
@@ -13119,7 +13354,7 @@
                       </a:endParaRPr>
                     </a:p>
                   </a:txBody>
-                  <a:tcPr marL="91440" marR="91440" marT="45720" marB="45720" anchor="ctr">
+                  <a:tcPr anchor="ctr">
                     <a:lnL w="9525" cap="flat" cmpd="sng" algn="ctr">
                       <a:solidFill>
                         <a:srgbClr val="D6DDD8"/>
@@ -13166,7 +13401,7 @@
                     <a:bodyPr/>
                     <a:lstStyle/>
                     <a:p>
-                      <a:pPr indent="0" marL="0">
+                      <a:pPr marL="0" indent="0">
                         <a:buNone/>
                       </a:pPr>
                       <a:r>
@@ -13187,7 +13422,7 @@
                       </a:endParaRPr>
                     </a:p>
                   </a:txBody>
-                  <a:tcPr marL="91440" marR="91440" marT="45720" marB="45720" anchor="ctr">
+                  <a:tcPr anchor="ctr">
                     <a:lnL w="9525" cap="flat" cmpd="sng" algn="ctr">
                       <a:solidFill>
                         <a:srgbClr val="D6DDD8"/>
@@ -13234,7 +13469,7 @@
                     <a:bodyPr/>
                     <a:lstStyle/>
                     <a:p>
-                      <a:pPr indent="0" marL="0">
+                      <a:pPr marL="0" indent="0">
                         <a:buNone/>
                       </a:pPr>
                       <a:r>
@@ -13248,9 +13483,6 @@
                         </a:rPr>
                         <a:t>● </a:t>
                       </a:r>
-                      <a:pPr indent="0" marL="0">
-                        <a:buNone/>
-                      </a:pPr>
                       <a:r>
                         <a:rPr lang="en-US" sz="1400" dirty="0">
                           <a:solidFill>
@@ -13269,7 +13501,7 @@
                       </a:endParaRPr>
                     </a:p>
                   </a:txBody>
-                  <a:tcPr marL="91440" marR="91440" marT="45720" marB="45720" anchor="ctr">
+                  <a:tcPr anchor="ctr">
                     <a:lnL w="9525" cap="flat" cmpd="sng" algn="ctr">
                       <a:solidFill>
                         <a:srgbClr val="D6DDD8"/>
@@ -13311,6 +13543,11 @@
                     </a:solidFill>
                   </a:tcPr>
                 </a:tc>
+                <a:extLst>
+                  <a:ext uri="{0D108BD9-81ED-4DB2-BD59-A6C34878D82A}">
+                    <a16:rowId xmlns:a16="http://schemas.microsoft.com/office/drawing/2014/main" val="10005"/>
+                  </a:ext>
+                </a:extLst>
               </a:tr>
               <a:tr h="548640">
                 <a:tc>
@@ -13318,7 +13555,7 @@
                     <a:bodyPr/>
                     <a:lstStyle/>
                     <a:p>
-                      <a:pPr indent="0" marL="0">
+                      <a:pPr marL="0" indent="0">
                         <a:buNone/>
                       </a:pPr>
                       <a:r>
@@ -13339,7 +13576,7 @@
                       </a:endParaRPr>
                     </a:p>
                   </a:txBody>
-                  <a:tcPr marL="91440" marR="91440" marT="45720" marB="45720" anchor="ctr">
+                  <a:tcPr anchor="ctr">
                     <a:lnL w="9525" cap="flat" cmpd="sng" algn="ctr">
                       <a:solidFill>
                         <a:srgbClr val="D6DDD8"/>
@@ -13386,7 +13623,7 @@
                     <a:bodyPr/>
                     <a:lstStyle/>
                     <a:p>
-                      <a:pPr indent="0" marL="0">
+                      <a:pPr marL="0" indent="0">
                         <a:buNone/>
                       </a:pPr>
                       <a:r>
@@ -13407,7 +13644,7 @@
                       </a:endParaRPr>
                     </a:p>
                   </a:txBody>
-                  <a:tcPr marL="91440" marR="91440" marT="45720" marB="45720" anchor="ctr">
+                  <a:tcPr anchor="ctr">
                     <a:lnL w="9525" cap="flat" cmpd="sng" algn="ctr">
                       <a:solidFill>
                         <a:srgbClr val="D6DDD8"/>
@@ -13454,7 +13691,7 @@
                     <a:bodyPr/>
                     <a:lstStyle/>
                     <a:p>
-                      <a:pPr indent="0" marL="0">
+                      <a:pPr marL="0" indent="0">
                         <a:buNone/>
                       </a:pPr>
                       <a:r>
@@ -13475,7 +13712,7 @@
                       </a:endParaRPr>
                     </a:p>
                   </a:txBody>
-                  <a:tcPr marL="91440" marR="91440" marT="45720" marB="45720" anchor="ctr">
+                  <a:tcPr anchor="ctr">
                     <a:lnL w="9525" cap="flat" cmpd="sng" algn="ctr">
                       <a:solidFill>
                         <a:srgbClr val="D6DDD8"/>
@@ -13522,7 +13759,7 @@
                     <a:bodyPr/>
                     <a:lstStyle/>
                     <a:p>
-                      <a:pPr indent="0" marL="0">
+                      <a:pPr marL="0" indent="0">
                         <a:buNone/>
                       </a:pPr>
                       <a:r>
@@ -13543,7 +13780,7 @@
                       </a:endParaRPr>
                     </a:p>
                   </a:txBody>
-                  <a:tcPr marL="91440" marR="91440" marT="45720" marB="45720" anchor="ctr">
+                  <a:tcPr anchor="ctr">
                     <a:lnL w="9525" cap="flat" cmpd="sng" algn="ctr">
                       <a:solidFill>
                         <a:srgbClr val="D6DDD8"/>
@@ -13590,7 +13827,7 @@
                     <a:bodyPr/>
                     <a:lstStyle/>
                     <a:p>
-                      <a:pPr indent="0" marL="0">
+                      <a:pPr marL="0" indent="0">
                         <a:buNone/>
                       </a:pPr>
                       <a:r>
@@ -13604,9 +13841,6 @@
                         </a:rPr>
                         <a:t>● </a:t>
                       </a:r>
-                      <a:pPr indent="0" marL="0">
-                        <a:buNone/>
-                      </a:pPr>
                       <a:r>
                         <a:rPr lang="en-US" sz="1400" dirty="0">
                           <a:solidFill>
@@ -13625,7 +13859,7 @@
                       </a:endParaRPr>
                     </a:p>
                   </a:txBody>
-                  <a:tcPr marL="91440" marR="91440" marT="45720" marB="45720" anchor="ctr">
+                  <a:tcPr anchor="ctr">
                     <a:lnL w="9525" cap="flat" cmpd="sng" algn="ctr">
                       <a:solidFill>
                         <a:srgbClr val="D6DDD8"/>
@@ -13667,6 +13901,11 @@
                     </a:solidFill>
                   </a:tcPr>
                 </a:tc>
+                <a:extLst>
+                  <a:ext uri="{0D108BD9-81ED-4DB2-BD59-A6C34878D82A}">
+                    <a16:rowId xmlns:a16="http://schemas.microsoft.com/office/drawing/2014/main" val="10006"/>
+                  </a:ext>
+                </a:extLst>
               </a:tr>
               <a:tr h="548640">
                 <a:tc>
@@ -13674,7 +13913,7 @@
                     <a:bodyPr/>
                     <a:lstStyle/>
                     <a:p>
-                      <a:pPr indent="0" marL="0">
+                      <a:pPr marL="0" indent="0">
                         <a:buNone/>
                       </a:pPr>
                       <a:r>
@@ -13695,7 +13934,7 @@
                       </a:endParaRPr>
                     </a:p>
                   </a:txBody>
-                  <a:tcPr marL="91440" marR="91440" marT="45720" marB="45720" anchor="ctr">
+                  <a:tcPr anchor="ctr">
                     <a:lnL w="9525" cap="flat" cmpd="sng" algn="ctr">
                       <a:solidFill>
                         <a:srgbClr val="D6DDD8"/>
@@ -13742,7 +13981,7 @@
                     <a:bodyPr/>
                     <a:lstStyle/>
                     <a:p>
-                      <a:pPr indent="0" marL="0">
+                      <a:pPr marL="0" indent="0">
                         <a:buNone/>
                       </a:pPr>
                       <a:r>
@@ -13763,7 +14002,7 @@
                       </a:endParaRPr>
                     </a:p>
                   </a:txBody>
-                  <a:tcPr marL="91440" marR="91440" marT="45720" marB="45720" anchor="ctr">
+                  <a:tcPr anchor="ctr">
                     <a:lnL w="9525" cap="flat" cmpd="sng" algn="ctr">
                       <a:solidFill>
                         <a:srgbClr val="D6DDD8"/>
@@ -13810,7 +14049,7 @@
                     <a:bodyPr/>
                     <a:lstStyle/>
                     <a:p>
-                      <a:pPr indent="0" marL="0">
+                      <a:pPr marL="0" indent="0">
                         <a:buNone/>
                       </a:pPr>
                       <a:r>
@@ -13831,7 +14070,7 @@
                       </a:endParaRPr>
                     </a:p>
                   </a:txBody>
-                  <a:tcPr marL="91440" marR="91440" marT="45720" marB="45720" anchor="ctr">
+                  <a:tcPr anchor="ctr">
                     <a:lnL w="9525" cap="flat" cmpd="sng" algn="ctr">
                       <a:solidFill>
                         <a:srgbClr val="D6DDD8"/>
@@ -13878,7 +14117,7 @@
                     <a:bodyPr/>
                     <a:lstStyle/>
                     <a:p>
-                      <a:pPr indent="0" marL="0">
+                      <a:pPr marL="0" indent="0">
                         <a:buNone/>
                       </a:pPr>
                       <a:r>
@@ -13899,7 +14138,7 @@
                       </a:endParaRPr>
                     </a:p>
                   </a:txBody>
-                  <a:tcPr marL="91440" marR="91440" marT="45720" marB="45720" anchor="ctr">
+                  <a:tcPr anchor="ctr">
                     <a:lnL w="9525" cap="flat" cmpd="sng" algn="ctr">
                       <a:solidFill>
                         <a:srgbClr val="D6DDD8"/>
@@ -13946,7 +14185,7 @@
                     <a:bodyPr/>
                     <a:lstStyle/>
                     <a:p>
-                      <a:pPr indent="0" marL="0">
+                      <a:pPr marL="0" indent="0">
                         <a:buNone/>
                       </a:pPr>
                       <a:r>
@@ -13960,9 +14199,6 @@
                         </a:rPr>
                         <a:t>● </a:t>
                       </a:r>
-                      <a:pPr indent="0" marL="0">
-                        <a:buNone/>
-                      </a:pPr>
                       <a:r>
                         <a:rPr lang="en-US" sz="1400" dirty="0">
                           <a:solidFill>
@@ -13981,7 +14217,7 @@
                       </a:endParaRPr>
                     </a:p>
                   </a:txBody>
-                  <a:tcPr marL="91440" marR="91440" marT="45720" marB="45720" anchor="ctr">
+                  <a:tcPr anchor="ctr">
                     <a:lnL w="9525" cap="flat" cmpd="sng" algn="ctr">
                       <a:solidFill>
                         <a:srgbClr val="D6DDD8"/>
@@ -14023,6 +14259,11 @@
                     </a:solidFill>
                   </a:tcPr>
                 </a:tc>
+                <a:extLst>
+                  <a:ext uri="{0D108BD9-81ED-4DB2-BD59-A6C34878D82A}">
+                    <a16:rowId xmlns:a16="http://schemas.microsoft.com/office/drawing/2014/main" val="10007"/>
+                  </a:ext>
+                </a:extLst>
               </a:tr>
             </a:tbl>
           </a:graphicData>
@@ -14049,7 +14290,7 @@
           <a:bodyPr wrap="square" lIns="0" tIns="0" rIns="0" bIns="0" rtlCol="0" anchor="ctr"/>
           <a:lstStyle/>
           <a:p>
-            <a:pPr indent="0" marL="0">
+            <a:pPr marL="0" indent="0">
               <a:buNone/>
             </a:pPr>
             <a:r>
@@ -14087,7 +14328,7 @@
           </a:prstGeom>
           <a:extLst>
             <a:ext uri="{C572A759-6A51-4108-AA02-DFA0A04FC94B}">
-              <ma14:wrappingTextBoxFlag xmlns:ma14="http://schemas.microsoft.com/office/mac/drawingml/2011/main" val="0"/>
+              <ma14:wrappingTextBoxFlag xmlns:ma14="http://schemas.microsoft.com/office/mac/drawingml/2011/main" xmlns="" val="0"/>
             </a:ext>
           </a:extLst>
         </p:spPr>
@@ -14108,7 +14349,7 @@
           <a:p>
             <a:pPr algn="r"/>
             <a:fld id="{F7021451-1387-4CA6-816F-3879F97B5CBC}" type="slidenum">
-              <a:rPr b="0" lang="en-US"/>
+              <a:rPr lang="en-US" b="0"/>
               <a:t>5</a:t>
             </a:fld>
             <a:endParaRPr lang="en-US"/>
@@ -14161,7 +14402,7 @@
           <a:bodyPr wrap="square" lIns="0" tIns="0" rIns="0" bIns="0" rtlCol="0" anchor="ctr"/>
           <a:lstStyle/>
           <a:p>
-            <a:pPr indent="0" marL="0">
+            <a:pPr marL="0" indent="0">
               <a:buNone/>
             </a:pPr>
             <a:r>
@@ -14200,7 +14441,7 @@
           <a:bodyPr wrap="square" lIns="0" tIns="0" rIns="0" bIns="0" rtlCol="0" anchor="ctr"/>
           <a:lstStyle/>
           <a:p>
-            <a:pPr indent="0" marL="0">
+            <a:pPr marL="0" indent="0">
               <a:buNone/>
             </a:pPr>
             <a:r>
@@ -14239,7 +14480,7 @@
           <a:bodyPr wrap="square" lIns="0" tIns="0" rIns="0" bIns="0" rtlCol="0" anchor="ctr"/>
           <a:lstStyle/>
           <a:p>
-            <a:pPr indent="0" marL="0">
+            <a:pPr marL="0" indent="0">
               <a:buNone/>
             </a:pPr>
             <a:r>
@@ -14253,9 +14494,6 @@
               </a:rPr>
               <a:t>●  </a:t>
             </a:r>
-            <a:pPr indent="0" marL="0">
-              <a:buNone/>
-            </a:pPr>
             <a:r>
               <a:rPr lang="en-US" sz="1200" dirty="0">
                 <a:solidFill>
@@ -14267,9 +14505,6 @@
               </a:rPr>
               <a:t>Each year, 2000–2025      </a:t>
             </a:r>
-            <a:pPr indent="0" marL="0">
-              <a:buNone/>
-            </a:pPr>
             <a:r>
               <a:rPr lang="en-US" sz="1200" dirty="0">
                 <a:solidFill>
@@ -14281,9 +14516,6 @@
               </a:rPr>
               <a:t>●  </a:t>
             </a:r>
-            <a:pPr indent="0" marL="0">
-              <a:buNone/>
-            </a:pPr>
             <a:r>
               <a:rPr lang="en-US" sz="1200" dirty="0">
                 <a:solidFill>
@@ -14301,7 +14533,7 @@
       </p:sp>
       <p:graphicFrame>
         <p:nvGraphicFramePr>
-          <p:cNvPr id="5" name="Chart 0" descr=""/>
+          <p:cNvPr id="5" name="Chart 0"/>
           <p:cNvGraphicFramePr/>
           <p:nvPr/>
         </p:nvGraphicFramePr>
@@ -14309,9 +14541,9 @@
           <a:off x="548640" y="1920240"/>
           <a:ext cx="7223760" cy="4251960"/>
         </p:xfrm>
-        <a:graphic xmlns:a="http://schemas.openxmlformats.org/drawingml/2006/main">
+        <a:graphic>
           <a:graphicData uri="http://schemas.openxmlformats.org/drawingml/2006/chart">
-            <c:chart xmlns:c="http://schemas.openxmlformats.org/drawingml/2006/chart" r:id="rId1"/>
+            <c:chart xmlns:c="http://schemas.openxmlformats.org/drawingml/2006/chart" xmlns:r="http://schemas.openxmlformats.org/officeDocument/2006/relationships" r:id="rId3"/>
           </a:graphicData>
         </a:graphic>
       </p:graphicFrame>
@@ -14336,7 +14568,7 @@
           <a:bodyPr wrap="square" lIns="0" tIns="0" rIns="0" bIns="0" rtlCol="0" anchor="ctr"/>
           <a:lstStyle/>
           <a:p>
-            <a:pPr indent="0" marL="0">
+            <a:pPr marL="0" indent="0">
               <a:buNone/>
             </a:pPr>
             <a:r>
@@ -14375,7 +14607,7 @@
           <a:bodyPr wrap="square" lIns="0" tIns="0" rIns="0" bIns="0" rtlCol="0" anchor="t"/>
           <a:lstStyle/>
           <a:p>
-            <a:pPr indent="0" marL="0">
+            <a:pPr marL="0" indent="0">
               <a:buNone/>
             </a:pPr>
             <a:r>
@@ -14414,7 +14646,7 @@
           <a:bodyPr wrap="square" lIns="0" tIns="0" rIns="0" bIns="0" rtlCol="0" anchor="ctr"/>
           <a:lstStyle/>
           <a:p>
-            <a:pPr indent="0" marL="0">
+            <a:pPr marL="0" indent="0">
               <a:buNone/>
             </a:pPr>
             <a:r>
@@ -14453,7 +14685,7 @@
           <a:bodyPr wrap="square" lIns="0" tIns="0" rIns="0" bIns="0" rtlCol="0" anchor="t"/>
           <a:lstStyle/>
           <a:p>
-            <a:pPr indent="0" marL="0">
+            <a:pPr marL="0" indent="0">
               <a:buNone/>
             </a:pPr>
             <a:r>
@@ -14497,6 +14729,13 @@
             <a:prstDash val="solid"/>
           </a:ln>
         </p:spPr>
+        <p:txBody>
+          <a:bodyPr/>
+          <a:lstStyle/>
+          <a:p>
+            <a:endParaRPr lang="en-US"/>
+          </a:p>
+        </p:txBody>
       </p:sp>
       <p:sp>
         <p:nvSpPr>
@@ -14519,7 +14758,7 @@
           <a:bodyPr wrap="square" lIns="0" tIns="0" rIns="0" bIns="0" rtlCol="0" anchor="ctr"/>
           <a:lstStyle/>
           <a:p>
-            <a:pPr indent="0" marL="0">
+            <a:pPr marL="0" indent="0">
               <a:spcAft>
                 <a:spcPts val="400"/>
               </a:spcAft>
@@ -14536,14 +14775,28 @@
               </a:rPr>
               <a:t>July heat alone: </a:t>
             </a:r>
-            <a:pPr indent="0" marL="0">
+            <a:r>
+              <a:rPr lang="en-US" sz="1300" dirty="0">
+                <a:solidFill>
+                  <a:srgbClr val="1D2723"/>
+                </a:solidFill>
+                <a:latin typeface="Arial" pitchFamily="34" charset="0"/>
+                <a:ea typeface="Arial" pitchFamily="34" charset="-122"/>
+                <a:cs typeface="Arial" pitchFamily="34" charset="-120"/>
+              </a:rPr>
+              <a:t>r = −0.78</a:t>
+            </a:r>
+            <a:endParaRPr lang="en-US" sz="1300" dirty="0"/>
+          </a:p>
+          <a:p>
+            <a:pPr marL="0" indent="0">
               <a:spcAft>
                 <a:spcPts val="400"/>
               </a:spcAft>
               <a:buNone/>
             </a:pPr>
             <a:r>
-              <a:rPr lang="en-US" sz="1300" dirty="0">
+              <a:rPr lang="en-US" sz="1300" b="1" dirty="0">
                 <a:solidFill>
                   <a:srgbClr val="1D2723"/>
                 </a:solidFill>
@@ -14551,38 +14804,18 @@
                 <a:ea typeface="Arial" pitchFamily="34" charset="-122"/>
                 <a:cs typeface="Arial" pitchFamily="34" charset="-120"/>
               </a:rPr>
-              <a:t>r = −0.78</a:t>
+              <a:t>Largest shortfalls:</a:t>
             </a:r>
             <a:endParaRPr lang="en-US" sz="1300" dirty="0"/>
           </a:p>
           <a:p>
-            <a:pPr indent="0" marL="0">
+            <a:pPr marL="0" indent="0">
               <a:spcAft>
                 <a:spcPts val="400"/>
               </a:spcAft>
               <a:buNone/>
             </a:pPr>
             <a:r>
-              <a:rPr lang="en-US" sz="1300" b="1" dirty="0">
-                <a:solidFill>
-                  <a:srgbClr val="1D2723"/>
-                </a:solidFill>
-                <a:latin typeface="Arial" pitchFamily="34" charset="0"/>
-                <a:ea typeface="Arial" pitchFamily="34" charset="-122"/>
-                <a:cs typeface="Arial" pitchFamily="34" charset="-120"/>
-              </a:rPr>
-              <a:t>Largest shortfalls:</a:t>
-            </a:r>
-            <a:endParaRPr lang="en-US" sz="1300" dirty="0"/>
-          </a:p>
-          <a:p>
-            <a:pPr indent="0" marL="0">
-              <a:spcAft>
-                <a:spcPts val="400"/>
-              </a:spcAft>
-              <a:buNone/>
-            </a:pPr>
-            <a:r>
               <a:rPr lang="en-US" sz="1300" dirty="0">
                 <a:solidFill>
                   <a:srgbClr val="1D2723"/>
@@ -14618,7 +14851,7 @@
           <a:bodyPr wrap="square" lIns="0" tIns="0" rIns="0" bIns="0" rtlCol="0" anchor="ctr"/>
           <a:lstStyle/>
           <a:p>
-            <a:pPr indent="0" marL="0">
+            <a:pPr marL="0" indent="0">
               <a:buNone/>
             </a:pPr>
             <a:r>
@@ -14656,7 +14889,7 @@
           </a:prstGeom>
           <a:extLst>
             <a:ext uri="{C572A759-6A51-4108-AA02-DFA0A04FC94B}">
-              <ma14:wrappingTextBoxFlag xmlns:ma14="http://schemas.microsoft.com/office/mac/drawingml/2011/main" val="0"/>
+              <ma14:wrappingTextBoxFlag xmlns:ma14="http://schemas.microsoft.com/office/mac/drawingml/2011/main" xmlns="" val="0"/>
             </a:ext>
           </a:extLst>
         </p:spPr>
@@ -14677,7 +14910,7 @@
           <a:p>
             <a:pPr algn="r"/>
             <a:fld id="{F7021451-1387-4CA6-816F-3879F97B5CBC}" type="slidenum">
-              <a:rPr b="0" lang="en-US"/>
+              <a:rPr lang="en-US" b="0"/>
               <a:t>6</a:t>
             </a:fld>
             <a:endParaRPr lang="en-US"/>
@@ -14730,7 +14963,7 @@
           <a:bodyPr wrap="square" lIns="0" tIns="0" rIns="0" bIns="0" rtlCol="0" anchor="ctr"/>
           <a:lstStyle/>
           <a:p>
-            <a:pPr indent="0" marL="0">
+            <a:pPr marL="0" indent="0">
               <a:buNone/>
             </a:pPr>
             <a:r>
@@ -14769,7 +15002,7 @@
           <a:bodyPr wrap="square" lIns="0" tIns="0" rIns="0" bIns="0" rtlCol="0" anchor="ctr"/>
           <a:lstStyle/>
           <a:p>
-            <a:pPr indent="0" marL="0">
+            <a:pPr marL="0" indent="0">
               <a:buNone/>
             </a:pPr>
             <a:r>
@@ -14789,7 +15022,7 @@
       </p:sp>
       <p:graphicFrame>
         <p:nvGraphicFramePr>
-          <p:cNvPr id="4" name="Chart 0" descr=""/>
+          <p:cNvPr id="4" name="Chart 0"/>
           <p:cNvGraphicFramePr/>
           <p:nvPr/>
         </p:nvGraphicFramePr>
@@ -14797,9 +15030,9 @@
           <a:off x="548640" y="1645920"/>
           <a:ext cx="7315200" cy="4526280"/>
         </p:xfrm>
-        <a:graphic xmlns:a="http://schemas.openxmlformats.org/drawingml/2006/main">
+        <a:graphic>
           <a:graphicData uri="http://schemas.openxmlformats.org/drawingml/2006/chart">
-            <c:chart xmlns:c="http://schemas.openxmlformats.org/drawingml/2006/chart" r:id="rId1"/>
+            <c:chart xmlns:c="http://schemas.openxmlformats.org/drawingml/2006/chart" xmlns:r="http://schemas.openxmlformats.org/officeDocument/2006/relationships" r:id="rId3"/>
           </a:graphicData>
         </a:graphic>
       </p:graphicFrame>
@@ -14824,7 +15057,7 @@
           <a:bodyPr wrap="square" lIns="0" tIns="0" rIns="0" bIns="0" rtlCol="0" anchor="ctr"/>
           <a:lstStyle/>
           <a:p>
-            <a:pPr indent="0" marL="0">
+            <a:pPr marL="0" indent="0">
               <a:buNone/>
             </a:pPr>
             <a:r>
@@ -14863,7 +15096,7 @@
           <a:bodyPr wrap="square" lIns="0" tIns="0" rIns="0" bIns="0" rtlCol="0" anchor="t"/>
           <a:lstStyle/>
           <a:p>
-            <a:pPr indent="0" marL="0">
+            <a:pPr marL="0" indent="0">
               <a:buNone/>
             </a:pPr>
             <a:r>
@@ -14902,7 +15135,7 @@
           <a:bodyPr wrap="square" lIns="0" tIns="0" rIns="0" bIns="0" rtlCol="0" anchor="ctr"/>
           <a:lstStyle/>
           <a:p>
-            <a:pPr indent="0" marL="0">
+            <a:pPr marL="0" indent="0">
               <a:buNone/>
             </a:pPr>
             <a:r>
@@ -14941,7 +15174,7 @@
           <a:bodyPr wrap="square" lIns="0" tIns="0" rIns="0" bIns="0" rtlCol="0" anchor="t"/>
           <a:lstStyle/>
           <a:p>
-            <a:pPr indent="0" marL="0">
+            <a:pPr marL="0" indent="0">
               <a:buNone/>
             </a:pPr>
             <a:r>
@@ -14980,7 +15213,7 @@
           <a:bodyPr wrap="square" lIns="0" tIns="0" rIns="0" bIns="0" rtlCol="0" anchor="ctr"/>
           <a:lstStyle/>
           <a:p>
-            <a:pPr indent="0" marL="0">
+            <a:pPr marL="0" indent="0">
               <a:buNone/>
             </a:pPr>
             <a:r>
@@ -15019,7 +15252,7 @@
           <a:bodyPr wrap="square" lIns="0" tIns="0" rIns="0" bIns="0" rtlCol="0" anchor="t"/>
           <a:lstStyle/>
           <a:p>
-            <a:pPr indent="0" marL="0">
+            <a:pPr marL="0" indent="0">
               <a:buNone/>
             </a:pPr>
             <a:r>
@@ -15058,7 +15291,7 @@
           <a:bodyPr wrap="square" lIns="0" tIns="0" rIns="0" bIns="0" rtlCol="0" anchor="ctr"/>
           <a:lstStyle/>
           <a:p>
-            <a:pPr indent="0" marL="0">
+            <a:pPr marL="0" indent="0">
               <a:buNone/>
             </a:pPr>
             <a:r>
@@ -15096,7 +15329,7 @@
           </a:prstGeom>
           <a:extLst>
             <a:ext uri="{C572A759-6A51-4108-AA02-DFA0A04FC94B}">
-              <ma14:wrappingTextBoxFlag xmlns:ma14="http://schemas.microsoft.com/office/mac/drawingml/2011/main" val="0"/>
+              <ma14:wrappingTextBoxFlag xmlns:ma14="http://schemas.microsoft.com/office/mac/drawingml/2011/main" xmlns="" val="0"/>
             </a:ext>
           </a:extLst>
         </p:spPr>
@@ -15117,7 +15350,7 @@
           <a:p>
             <a:pPr algn="r"/>
             <a:fld id="{F7021451-1387-4CA6-816F-3879F97B5CBC}" type="slidenum">
-              <a:rPr b="0" lang="en-US"/>
+              <a:rPr lang="en-US" b="0"/>
               <a:t>7</a:t>
             </a:fld>
             <a:endParaRPr lang="en-US"/>
@@ -15170,7 +15403,7 @@
           <a:bodyPr wrap="square" lIns="0" tIns="0" rIns="0" bIns="0" rtlCol="0" anchor="ctr"/>
           <a:lstStyle/>
           <a:p>
-            <a:pPr indent="0" marL="0">
+            <a:pPr marL="0" indent="0">
               <a:buNone/>
             </a:pPr>
             <a:r>
@@ -15209,7 +15442,7 @@
           <a:bodyPr wrap="square" lIns="0" tIns="0" rIns="0" bIns="0" rtlCol="0" anchor="ctr"/>
           <a:lstStyle/>
           <a:p>
-            <a:pPr indent="0" marL="0">
+            <a:pPr marL="0" indent="0">
               <a:buNone/>
             </a:pPr>
             <a:r>
@@ -15229,7 +15462,7 @@
       </p:sp>
       <p:graphicFrame>
         <p:nvGraphicFramePr>
-          <p:cNvPr id="4" name="Chart 0" descr=""/>
+          <p:cNvPr id="4" name="Chart 0"/>
           <p:cNvGraphicFramePr/>
           <p:nvPr/>
         </p:nvGraphicFramePr>
@@ -15237,9 +15470,9 @@
           <a:off x="548640" y="1645920"/>
           <a:ext cx="7223760" cy="4160520"/>
         </p:xfrm>
-        <a:graphic xmlns:a="http://schemas.openxmlformats.org/drawingml/2006/main">
+        <a:graphic>
           <a:graphicData uri="http://schemas.openxmlformats.org/drawingml/2006/chart">
-            <c:chart xmlns:c="http://schemas.openxmlformats.org/drawingml/2006/chart" r:id="rId1"/>
+            <c:chart xmlns:c="http://schemas.openxmlformats.org/drawingml/2006/chart" xmlns:r="http://schemas.openxmlformats.org/officeDocument/2006/relationships" r:id="rId3"/>
           </a:graphicData>
         </a:graphic>
       </p:graphicFrame>
@@ -15264,7 +15497,7 @@
           <a:bodyPr wrap="square" lIns="0" tIns="0" rIns="0" bIns="0" rtlCol="0" anchor="ctr"/>
           <a:lstStyle/>
           <a:p>
-            <a:pPr algn="ctr" indent="0" marL="0">
+            <a:pPr marL="0" indent="0" algn="ctr">
               <a:buNone/>
             </a:pPr>
             <a:r>
@@ -15303,7 +15536,7 @@
           <a:bodyPr wrap="square" lIns="0" tIns="0" rIns="0" bIns="0" rtlCol="0" anchor="ctr"/>
           <a:lstStyle/>
           <a:p>
-            <a:pPr indent="0" marL="0">
+            <a:pPr marL="0" indent="0">
               <a:buNone/>
             </a:pPr>
             <a:r>
@@ -15342,7 +15575,7 @@
           <a:bodyPr wrap="square" lIns="0" tIns="0" rIns="0" bIns="0" rtlCol="0" anchor="t"/>
           <a:lstStyle/>
           <a:p>
-            <a:pPr indent="0" marL="0">
+            <a:pPr marL="0" indent="0">
               <a:buNone/>
             </a:pPr>
             <a:r>
@@ -15381,7 +15614,7 @@
           <a:bodyPr wrap="square" lIns="0" tIns="0" rIns="0" bIns="0" rtlCol="0" anchor="ctr"/>
           <a:lstStyle/>
           <a:p>
-            <a:pPr indent="0" marL="0">
+            <a:pPr marL="0" indent="0">
               <a:buNone/>
             </a:pPr>
             <a:r>
@@ -15420,7 +15653,7 @@
           <a:bodyPr wrap="square" lIns="0" tIns="0" rIns="0" bIns="0" rtlCol="0" anchor="t"/>
           <a:lstStyle/>
           <a:p>
-            <a:pPr indent="0" marL="0">
+            <a:pPr marL="0" indent="0">
               <a:buNone/>
             </a:pPr>
             <a:r>
@@ -15464,6 +15697,13 @@
             <a:prstDash val="solid"/>
           </a:ln>
         </p:spPr>
+        <p:txBody>
+          <a:bodyPr/>
+          <a:lstStyle/>
+          <a:p>
+            <a:endParaRPr lang="en-US"/>
+          </a:p>
+        </p:txBody>
       </p:sp>
       <p:sp>
         <p:nvSpPr>
@@ -15486,7 +15726,7 @@
           <a:bodyPr wrap="square" lIns="0" tIns="0" rIns="0" bIns="0" rtlCol="0" anchor="ctr"/>
           <a:lstStyle/>
           <a:p>
-            <a:pPr indent="0" marL="0">
+            <a:pPr marL="0" indent="0">
               <a:buNone/>
             </a:pPr>
             <a:r>
@@ -15525,7 +15765,7 @@
           <a:bodyPr wrap="square" lIns="0" tIns="0" rIns="0" bIns="0" rtlCol="0" anchor="ctr"/>
           <a:lstStyle/>
           <a:p>
-            <a:pPr indent="0" marL="0">
+            <a:pPr marL="0" indent="0">
               <a:buNone/>
             </a:pPr>
             <a:r>
@@ -15563,7 +15803,7 @@
           </a:prstGeom>
           <a:extLst>
             <a:ext uri="{C572A759-6A51-4108-AA02-DFA0A04FC94B}">
-              <ma14:wrappingTextBoxFlag xmlns:ma14="http://schemas.microsoft.com/office/mac/drawingml/2011/main" val="0"/>
+              <ma14:wrappingTextBoxFlag xmlns:ma14="http://schemas.microsoft.com/office/mac/drawingml/2011/main" xmlns="" val="0"/>
             </a:ext>
           </a:extLst>
         </p:spPr>
@@ -15584,7 +15824,7 @@
           <a:p>
             <a:pPr algn="r"/>
             <a:fld id="{F7021451-1387-4CA6-816F-3879F97B5CBC}" type="slidenum">
-              <a:rPr b="0" lang="en-US"/>
+              <a:rPr lang="en-US" b="0"/>
               <a:t>8</a:t>
             </a:fld>
             <a:endParaRPr lang="en-US"/>
@@ -15637,7 +15877,7 @@
           <a:bodyPr wrap="square" lIns="0" tIns="0" rIns="0" bIns="0" rtlCol="0" anchor="ctr"/>
           <a:lstStyle/>
           <a:p>
-            <a:pPr indent="0" marL="0">
+            <a:pPr marL="0" indent="0">
               <a:buNone/>
             </a:pPr>
             <a:r>
@@ -15676,7 +15916,7 @@
           <a:bodyPr wrap="square" lIns="0" tIns="0" rIns="0" bIns="0" rtlCol="0" anchor="ctr"/>
           <a:lstStyle/>
           <a:p>
-            <a:pPr indent="0" marL="0">
+            <a:pPr marL="0" indent="0">
               <a:buNone/>
             </a:pPr>
             <a:r>
@@ -15720,6 +15960,13 @@
             <a:prstDash val="solid"/>
           </a:ln>
         </p:spPr>
+        <p:txBody>
+          <a:bodyPr/>
+          <a:lstStyle/>
+          <a:p>
+            <a:endParaRPr lang="en-US"/>
+          </a:p>
+        </p:txBody>
       </p:sp>
       <p:sp>
         <p:nvSpPr>
@@ -15745,17 +15992,24 @@
             <a:prstDash val="solid"/>
           </a:ln>
         </p:spPr>
+        <p:txBody>
+          <a:bodyPr/>
+          <a:lstStyle/>
+          <a:p>
+            <a:endParaRPr lang="en-US"/>
+          </a:p>
+        </p:txBody>
       </p:sp>
       <p:pic>
         <p:nvPicPr>
-          <p:cNvPr id="6" name="Image 0" descr="preencoded.png">    </p:cNvPr>
+          <p:cNvPr id="6" name="Image 0" descr="preencoded.png"/>
           <p:cNvPicPr>
             <a:picLocks noChangeAspect="1"/>
           </p:cNvPicPr>
           <p:nvPr/>
         </p:nvPicPr>
         <p:blipFill>
-          <a:blip r:embed="rId1"/>
+          <a:blip r:embed="rId3"/>
           <a:stretch>
             <a:fillRect/>
           </a:stretch>
@@ -15791,7 +16045,7 @@
           <a:bodyPr wrap="square" lIns="0" tIns="0" rIns="0" bIns="0" rtlCol="0" anchor="ctr"/>
           <a:lstStyle/>
           <a:p>
-            <a:pPr indent="0" marL="0">
+            <a:pPr marL="0" indent="0">
               <a:buNone/>
             </a:pPr>
             <a:r>
@@ -15830,7 +16084,7 @@
           <a:bodyPr wrap="square" lIns="0" tIns="0" rIns="0" bIns="0" rtlCol="0" anchor="t"/>
           <a:lstStyle/>
           <a:p>
-            <a:pPr indent="0" marL="0">
+            <a:pPr marL="0" indent="0">
               <a:buNone/>
             </a:pPr>
             <a:r>
@@ -15869,7 +16123,7 @@
           <a:bodyPr wrap="square" lIns="0" tIns="0" rIns="0" bIns="0" rtlCol="0" anchor="t"/>
           <a:lstStyle/>
           <a:p>
-            <a:pPr indent="0" marL="0">
+            <a:pPr marL="0" indent="0">
               <a:buNone/>
             </a:pPr>
             <a:r>
@@ -15913,6 +16167,13 @@
             <a:prstDash val="solid"/>
           </a:ln>
         </p:spPr>
+        <p:txBody>
+          <a:bodyPr/>
+          <a:lstStyle/>
+          <a:p>
+            <a:endParaRPr lang="en-US"/>
+          </a:p>
+        </p:txBody>
       </p:sp>
       <p:sp>
         <p:nvSpPr>
@@ -15938,17 +16199,24 @@
             <a:prstDash val="solid"/>
           </a:ln>
         </p:spPr>
+        <p:txBody>
+          <a:bodyPr/>
+          <a:lstStyle/>
+          <a:p>
+            <a:endParaRPr lang="en-US"/>
+          </a:p>
+        </p:txBody>
       </p:sp>
       <p:pic>
         <p:nvPicPr>
-          <p:cNvPr id="12" name="Image 1" descr="preencoded.png">    </p:cNvPr>
+          <p:cNvPr id="12" name="Image 1" descr="preencoded.png"/>
           <p:cNvPicPr>
             <a:picLocks noChangeAspect="1"/>
           </p:cNvPicPr>
           <p:nvPr/>
         </p:nvPicPr>
         <p:blipFill>
-          <a:blip r:embed="rId2"/>
+          <a:blip r:embed="rId4"/>
           <a:stretch>
             <a:fillRect/>
           </a:stretch>
@@ -15984,7 +16252,7 @@
           <a:bodyPr wrap="square" lIns="0" tIns="0" rIns="0" bIns="0" rtlCol="0" anchor="ctr"/>
           <a:lstStyle/>
           <a:p>
-            <a:pPr indent="0" marL="0">
+            <a:pPr marL="0" indent="0">
               <a:buNone/>
             </a:pPr>
             <a:r>
@@ -16023,7 +16291,7 @@
           <a:bodyPr wrap="square" lIns="0" tIns="0" rIns="0" bIns="0" rtlCol="0" anchor="t"/>
           <a:lstStyle/>
           <a:p>
-            <a:pPr indent="0" marL="0">
+            <a:pPr marL="0" indent="0">
               <a:buNone/>
             </a:pPr>
             <a:r>
@@ -16062,7 +16330,7 @@
           <a:bodyPr wrap="square" lIns="0" tIns="0" rIns="0" bIns="0" rtlCol="0" anchor="t"/>
           <a:lstStyle/>
           <a:p>
-            <a:pPr indent="0" marL="0">
+            <a:pPr marL="0" indent="0">
               <a:buNone/>
             </a:pPr>
             <a:r>
@@ -16106,6 +16374,13 @@
             <a:prstDash val="solid"/>
           </a:ln>
         </p:spPr>
+        <p:txBody>
+          <a:bodyPr/>
+          <a:lstStyle/>
+          <a:p>
+            <a:endParaRPr lang="en-US"/>
+          </a:p>
+        </p:txBody>
       </p:sp>
       <p:sp>
         <p:nvSpPr>
@@ -16131,17 +16406,24 @@
             <a:prstDash val="solid"/>
           </a:ln>
         </p:spPr>
+        <p:txBody>
+          <a:bodyPr/>
+          <a:lstStyle/>
+          <a:p>
+            <a:endParaRPr lang="en-US"/>
+          </a:p>
+        </p:txBody>
       </p:sp>
       <p:pic>
         <p:nvPicPr>
-          <p:cNvPr id="18" name="Image 2" descr="preencoded.png">    </p:cNvPr>
+          <p:cNvPr id="18" name="Image 2" descr="preencoded.png"/>
           <p:cNvPicPr>
             <a:picLocks noChangeAspect="1"/>
           </p:cNvPicPr>
           <p:nvPr/>
         </p:nvPicPr>
         <p:blipFill>
-          <a:blip r:embed="rId3"/>
+          <a:blip r:embed="rId5"/>
           <a:stretch>
             <a:fillRect/>
           </a:stretch>
@@ -16177,7 +16459,7 @@
           <a:bodyPr wrap="square" lIns="0" tIns="0" rIns="0" bIns="0" rtlCol="0" anchor="ctr"/>
           <a:lstStyle/>
           <a:p>
-            <a:pPr indent="0" marL="0">
+            <a:pPr marL="0" indent="0">
               <a:buNone/>
             </a:pPr>
             <a:r>
@@ -16216,7 +16498,7 @@
           <a:bodyPr wrap="square" lIns="0" tIns="0" rIns="0" bIns="0" rtlCol="0" anchor="t"/>
           <a:lstStyle/>
           <a:p>
-            <a:pPr indent="0" marL="0">
+            <a:pPr marL="0" indent="0">
               <a:buNone/>
             </a:pPr>
             <a:r>
@@ -16255,7 +16537,7 @@
           <a:bodyPr wrap="square" lIns="0" tIns="0" rIns="0" bIns="0" rtlCol="0" anchor="t"/>
           <a:lstStyle/>
           <a:p>
-            <a:pPr indent="0" marL="0">
+            <a:pPr marL="0" indent="0">
               <a:buNone/>
             </a:pPr>
             <a:r>
@@ -16299,6 +16581,13 @@
             <a:prstDash val="solid"/>
           </a:ln>
         </p:spPr>
+        <p:txBody>
+          <a:bodyPr/>
+          <a:lstStyle/>
+          <a:p>
+            <a:endParaRPr lang="en-US"/>
+          </a:p>
+        </p:txBody>
       </p:sp>
       <p:sp>
         <p:nvSpPr>
@@ -16324,17 +16613,24 @@
             <a:prstDash val="solid"/>
           </a:ln>
         </p:spPr>
+        <p:txBody>
+          <a:bodyPr/>
+          <a:lstStyle/>
+          <a:p>
+            <a:endParaRPr lang="en-US"/>
+          </a:p>
+        </p:txBody>
       </p:sp>
       <p:pic>
         <p:nvPicPr>
-          <p:cNvPr id="24" name="Image 3" descr="preencoded.png">    </p:cNvPr>
+          <p:cNvPr id="24" name="Image 3" descr="preencoded.png"/>
           <p:cNvPicPr>
             <a:picLocks noChangeAspect="1"/>
           </p:cNvPicPr>
           <p:nvPr/>
         </p:nvPicPr>
         <p:blipFill>
-          <a:blip r:embed="rId4"/>
+          <a:blip r:embed="rId6"/>
           <a:stretch>
             <a:fillRect/>
           </a:stretch>
@@ -16370,7 +16666,7 @@
           <a:bodyPr wrap="square" lIns="0" tIns="0" rIns="0" bIns="0" rtlCol="0" anchor="ctr"/>
           <a:lstStyle/>
           <a:p>
-            <a:pPr indent="0" marL="0">
+            <a:pPr marL="0" indent="0">
               <a:buNone/>
             </a:pPr>
             <a:r>
@@ -16409,7 +16705,7 @@
           <a:bodyPr wrap="square" lIns="0" tIns="0" rIns="0" bIns="0" rtlCol="0" anchor="ctr"/>
           <a:lstStyle/>
           <a:p>
-            <a:pPr indent="0" marL="0">
+            <a:pPr marL="0" indent="0">
               <a:buNone/>
             </a:pPr>
             <a:r>
@@ -16429,7 +16725,7 @@
       </p:sp>
       <p:sp>
         <p:nvSpPr>
-          <p:cNvPr id="25" name="Slide Number Placeholder 0"/>
+          <p:cNvPr id="27" name="Slide Number Placeholder 0"/>
           <p:cNvSpPr>
             <a:spLocks noGrp="1"/>
           </p:cNvSpPr>
@@ -16447,7 +16743,7 @@
           </a:prstGeom>
           <a:extLst>
             <a:ext uri="{C572A759-6A51-4108-AA02-DFA0A04FC94B}">
-              <ma14:wrappingTextBoxFlag xmlns:ma14="http://schemas.microsoft.com/office/mac/drawingml/2011/main" val="0"/>
+              <ma14:wrappingTextBoxFlag xmlns:ma14="http://schemas.microsoft.com/office/mac/drawingml/2011/main" xmlns="" val="0"/>
             </a:ext>
           </a:extLst>
         </p:spPr>
@@ -16468,7 +16764,7 @@
           <a:p>
             <a:pPr algn="r"/>
             <a:fld id="{F7021451-1387-4CA6-816F-3879F97B5CBC}" type="slidenum">
-              <a:rPr b="0" lang="en-US"/>
+              <a:rPr lang="en-US" b="0"/>
               <a:t>9</a:t>
             </a:fld>
             <a:endParaRPr lang="en-US"/>
@@ -16776,4 +17072,319 @@
     </a:ext>
   </a:extLst>
 </a:theme>
+</file>
+
+<file path=ppt/theme/theme2.xml><?xml version="1.0" encoding="utf-8"?>
+<a:theme xmlns:a="http://schemas.openxmlformats.org/drawingml/2006/main" name="Office Theme">
+  <a:themeElements>
+    <a:clrScheme name="Office">
+      <a:dk1>
+        <a:sysClr val="windowText" lastClr="000000"/>
+      </a:dk1>
+      <a:lt1>
+        <a:sysClr val="window" lastClr="FFFFFF"/>
+      </a:lt1>
+      <a:dk2>
+        <a:srgbClr val="0E2841"/>
+      </a:dk2>
+      <a:lt2>
+        <a:srgbClr val="E8E8E8"/>
+      </a:lt2>
+      <a:accent1>
+        <a:srgbClr val="156082"/>
+      </a:accent1>
+      <a:accent2>
+        <a:srgbClr val="E97132"/>
+      </a:accent2>
+      <a:accent3>
+        <a:srgbClr val="196B24"/>
+      </a:accent3>
+      <a:accent4>
+        <a:srgbClr val="0F9ED5"/>
+      </a:accent4>
+      <a:accent5>
+        <a:srgbClr val="A02B93"/>
+      </a:accent5>
+      <a:accent6>
+        <a:srgbClr val="4EA72E"/>
+      </a:accent6>
+      <a:hlink>
+        <a:srgbClr val="467886"/>
+      </a:hlink>
+      <a:folHlink>
+        <a:srgbClr val="96607D"/>
+      </a:folHlink>
+    </a:clrScheme>
+    <a:fontScheme name="Office">
+      <a:majorFont>
+        <a:latin typeface="Aptos Display" panose="02110004020202020204"/>
+        <a:ea typeface=""/>
+        <a:cs typeface=""/>
+        <a:font script="Jpan" typeface="游ゴシック Light"/>
+        <a:font script="Hang" typeface="맑은 고딕"/>
+        <a:font script="Hans" typeface="等线 Light"/>
+        <a:font script="Hant" typeface="新細明體"/>
+        <a:font script="Arab" typeface="Times New Roman"/>
+        <a:font script="Hebr" typeface="Times New Roman"/>
+        <a:font script="Thai" typeface="Angsana New"/>
+        <a:font script="Ethi" typeface="Nyala"/>
+        <a:font script="Beng" typeface="Vrinda"/>
+        <a:font script="Gujr" typeface="Shruti"/>
+        <a:font script="Khmr" typeface="MoolBoran"/>
+        <a:font script="Knda" typeface="Tunga"/>
+        <a:font script="Guru" typeface="Raavi"/>
+        <a:font script="Cans" typeface="Euphemia"/>
+        <a:font script="Cher" typeface="Plantagenet Cherokee"/>
+        <a:font script="Yiii" typeface="Microsoft Yi Baiti"/>
+        <a:font script="Tibt" typeface="Microsoft Himalaya"/>
+        <a:font script="Thaa" typeface="MV Boli"/>
+        <a:font script="Deva" typeface="Mangal"/>
+        <a:font script="Telu" typeface="Gautami"/>
+        <a:font script="Taml" typeface="Latha"/>
+        <a:font script="Syrc" typeface="Estrangelo Edessa"/>
+        <a:font script="Orya" typeface="Kalinga"/>
+        <a:font script="Mlym" typeface="Kartika"/>
+        <a:font script="Laoo" typeface="DokChampa"/>
+        <a:font script="Sinh" typeface="Iskoola Pota"/>
+        <a:font script="Mong" typeface="Mongolian Baiti"/>
+        <a:font script="Viet" typeface="Times New Roman"/>
+        <a:font script="Uigh" typeface="Microsoft Uighur"/>
+        <a:font script="Geor" typeface="Sylfaen"/>
+        <a:font script="Armn" typeface="Arial"/>
+        <a:font script="Bugi" typeface="Leelawadee UI"/>
+        <a:font script="Bopo" typeface="Microsoft JhengHei"/>
+        <a:font script="Java" typeface="Javanese Text"/>
+        <a:font script="Lisu" typeface="Segoe UI"/>
+        <a:font script="Mymr" typeface="Myanmar Text"/>
+        <a:font script="Nkoo" typeface="Ebrima"/>
+        <a:font script="Olck" typeface="Nirmala UI"/>
+        <a:font script="Osma" typeface="Ebrima"/>
+        <a:font script="Phag" typeface="Phagspa"/>
+        <a:font script="Syrn" typeface="Estrangelo Edessa"/>
+        <a:font script="Syrj" typeface="Estrangelo Edessa"/>
+        <a:font script="Syre" typeface="Estrangelo Edessa"/>
+        <a:font script="Sora" typeface="Nirmala UI"/>
+        <a:font script="Tale" typeface="Microsoft Tai Le"/>
+        <a:font script="Talu" typeface="Microsoft New Tai Lue"/>
+        <a:font script="Tfng" typeface="Ebrima"/>
+      </a:majorFont>
+      <a:minorFont>
+        <a:latin typeface="Aptos" panose="02110004020202020204"/>
+        <a:ea typeface=""/>
+        <a:cs typeface=""/>
+        <a:font script="Jpan" typeface="游ゴシック"/>
+        <a:font script="Hang" typeface="맑은 고딕"/>
+        <a:font script="Hans" typeface="等线"/>
+        <a:font script="Hant" typeface="新細明體"/>
+        <a:font script="Arab" typeface="Arial"/>
+        <a:font script="Hebr" typeface="Arial"/>
+        <a:font script="Thai" typeface="Cordia New"/>
+        <a:font script="Ethi" typeface="Nyala"/>
+        <a:font script="Beng" typeface="Vrinda"/>
+        <a:font script="Gujr" typeface="Shruti"/>
+        <a:font script="Khmr" typeface="DaunPenh"/>
+        <a:font script="Knda" typeface="Tunga"/>
+        <a:font script="Guru" typeface="Raavi"/>
+        <a:font script="Cans" typeface="Euphemia"/>
+        <a:font script="Cher" typeface="Plantagenet Cherokee"/>
+        <a:font script="Yiii" typeface="Microsoft Yi Baiti"/>
+        <a:font script="Tibt" typeface="Microsoft Himalaya"/>
+        <a:font script="Thaa" typeface="MV Boli"/>
+        <a:font script="Deva" typeface="Mangal"/>
+        <a:font script="Telu" typeface="Gautami"/>
+        <a:font script="Taml" typeface="Latha"/>
+        <a:font script="Syrc" typeface="Estrangelo Edessa"/>
+        <a:font script="Orya" typeface="Kalinga"/>
+        <a:font script="Mlym" typeface="Kartika"/>
+        <a:font script="Laoo" typeface="DokChampa"/>
+        <a:font script="Sinh" typeface="Iskoola Pota"/>
+        <a:font script="Mong" typeface="Mongolian Baiti"/>
+        <a:font script="Viet" typeface="Arial"/>
+        <a:font script="Uigh" typeface="Microsoft Uighur"/>
+        <a:font script="Geor" typeface="Sylfaen"/>
+        <a:font script="Armn" typeface="Arial"/>
+        <a:font script="Bugi" typeface="Leelawadee UI"/>
+        <a:font script="Bopo" typeface="Microsoft JhengHei"/>
+        <a:font script="Java" typeface="Javanese Text"/>
+        <a:font script="Lisu" typeface="Segoe UI"/>
+        <a:font script="Mymr" typeface="Myanmar Text"/>
+        <a:font script="Nkoo" typeface="Ebrima"/>
+        <a:font script="Olck" typeface="Nirmala UI"/>
+        <a:font script="Osma" typeface="Ebrima"/>
+        <a:font script="Phag" typeface="Phagspa"/>
+        <a:font script="Syrn" typeface="Estrangelo Edessa"/>
+        <a:font script="Syrj" typeface="Estrangelo Edessa"/>
+        <a:font script="Syre" typeface="Estrangelo Edessa"/>
+        <a:font script="Sora" typeface="Nirmala UI"/>
+        <a:font script="Tale" typeface="Microsoft Tai Le"/>
+        <a:font script="Talu" typeface="Microsoft New Tai Lue"/>
+        <a:font script="Tfng" typeface="Ebrima"/>
+      </a:minorFont>
+    </a:fontScheme>
+    <a:fmtScheme name="Office">
+      <a:fillStyleLst>
+        <a:solidFill>
+          <a:schemeClr val="phClr"/>
+        </a:solidFill>
+        <a:gradFill rotWithShape="1">
+          <a:gsLst>
+            <a:gs pos="0">
+              <a:schemeClr val="phClr">
+                <a:lumMod val="110000"/>
+                <a:satMod val="105000"/>
+                <a:tint val="67000"/>
+              </a:schemeClr>
+            </a:gs>
+            <a:gs pos="50000">
+              <a:schemeClr val="phClr">
+                <a:lumMod val="105000"/>
+                <a:satMod val="103000"/>
+                <a:tint val="73000"/>
+              </a:schemeClr>
+            </a:gs>
+            <a:gs pos="100000">
+              <a:schemeClr val="phClr">
+                <a:lumMod val="105000"/>
+                <a:satMod val="109000"/>
+                <a:tint val="81000"/>
+              </a:schemeClr>
+            </a:gs>
+          </a:gsLst>
+          <a:lin ang="5400000" scaled="0"/>
+        </a:gradFill>
+        <a:gradFill rotWithShape="1">
+          <a:gsLst>
+            <a:gs pos="0">
+              <a:schemeClr val="phClr">
+                <a:satMod val="103000"/>
+                <a:lumMod val="102000"/>
+                <a:tint val="94000"/>
+              </a:schemeClr>
+            </a:gs>
+            <a:gs pos="50000">
+              <a:schemeClr val="phClr">
+                <a:satMod val="110000"/>
+                <a:lumMod val="100000"/>
+                <a:shade val="100000"/>
+              </a:schemeClr>
+            </a:gs>
+            <a:gs pos="100000">
+              <a:schemeClr val="phClr">
+                <a:lumMod val="99000"/>
+                <a:satMod val="120000"/>
+                <a:shade val="78000"/>
+              </a:schemeClr>
+            </a:gs>
+          </a:gsLst>
+          <a:lin ang="5400000" scaled="0"/>
+        </a:gradFill>
+      </a:fillStyleLst>
+      <a:lnStyleLst>
+        <a:ln w="12700" cap="flat" cmpd="sng" algn="ctr">
+          <a:solidFill>
+            <a:schemeClr val="phClr"/>
+          </a:solidFill>
+          <a:prstDash val="solid"/>
+          <a:miter lim="800000"/>
+        </a:ln>
+        <a:ln w="19050" cap="flat" cmpd="sng" algn="ctr">
+          <a:solidFill>
+            <a:schemeClr val="phClr"/>
+          </a:solidFill>
+          <a:prstDash val="solid"/>
+          <a:miter lim="800000"/>
+        </a:ln>
+        <a:ln w="25400" cap="flat" cmpd="sng" algn="ctr">
+          <a:solidFill>
+            <a:schemeClr val="phClr"/>
+          </a:solidFill>
+          <a:prstDash val="solid"/>
+          <a:miter lim="800000"/>
+        </a:ln>
+      </a:lnStyleLst>
+      <a:effectStyleLst>
+        <a:effectStyle>
+          <a:effectLst/>
+        </a:effectStyle>
+        <a:effectStyle>
+          <a:effectLst/>
+        </a:effectStyle>
+        <a:effectStyle>
+          <a:effectLst>
+            <a:outerShdw blurRad="57150" dist="19050" dir="5400000" algn="ctr" rotWithShape="0">
+              <a:srgbClr val="000000">
+                <a:alpha val="63000"/>
+              </a:srgbClr>
+            </a:outerShdw>
+          </a:effectLst>
+        </a:effectStyle>
+      </a:effectStyleLst>
+      <a:bgFillStyleLst>
+        <a:solidFill>
+          <a:schemeClr val="phClr"/>
+        </a:solidFill>
+        <a:solidFill>
+          <a:schemeClr val="phClr">
+            <a:tint val="95000"/>
+            <a:satMod val="170000"/>
+          </a:schemeClr>
+        </a:solidFill>
+        <a:gradFill rotWithShape="1">
+          <a:gsLst>
+            <a:gs pos="0">
+              <a:schemeClr val="phClr">
+                <a:tint val="93000"/>
+                <a:satMod val="150000"/>
+                <a:shade val="98000"/>
+                <a:lumMod val="102000"/>
+              </a:schemeClr>
+            </a:gs>
+            <a:gs pos="50000">
+              <a:schemeClr val="phClr">
+                <a:tint val="98000"/>
+                <a:satMod val="130000"/>
+                <a:shade val="90000"/>
+                <a:lumMod val="103000"/>
+              </a:schemeClr>
+            </a:gs>
+            <a:gs pos="100000">
+              <a:schemeClr val="phClr">
+                <a:shade val="63000"/>
+                <a:satMod val="120000"/>
+              </a:schemeClr>
+            </a:gs>
+          </a:gsLst>
+          <a:lin ang="5400000" scaled="0"/>
+        </a:gradFill>
+      </a:bgFillStyleLst>
+    </a:fmtScheme>
+  </a:themeElements>
+  <a:objectDefaults>
+    <a:lnDef>
+      <a:spPr/>
+      <a:bodyPr/>
+      <a:lstStyle/>
+      <a:style>
+        <a:lnRef idx="2">
+          <a:schemeClr val="accent1"/>
+        </a:lnRef>
+        <a:fillRef idx="0">
+          <a:schemeClr val="accent1"/>
+        </a:fillRef>
+        <a:effectRef idx="1">
+          <a:schemeClr val="accent1"/>
+        </a:effectRef>
+        <a:fontRef idx="minor">
+          <a:schemeClr val="tx1"/>
+        </a:fontRef>
+      </a:style>
+    </a:lnDef>
+  </a:objectDefaults>
+  <a:extraClrSchemeLst/>
+  <a:extLst>
+    <a:ext uri="{05A4C25C-085E-4340-85A3-A5531E510DB2}">
+      <thm15:themeFamily xmlns:thm15="http://schemas.microsoft.com/office/thememl/2012/main" name="Office Theme" id="{2E142A2C-CD16-42D6-873A-C26D2A0506FA}" vid="{1BDDFF52-6CD6-40A5-AB3C-68EB2F1E4D0A}"/>
+    </a:ext>
+  </a:extLst>
+</a:theme>
 </file>
--- a/presentation/climate-futures-pricing-proposal.pptx
+++ b/presentation/climate-futures-pricing-proposal.pptx
@@ -11,12 +11,12 @@
     <p:sldId id="256" r:id="rId2"/>
     <p:sldId id="257" r:id="rId3"/>
     <p:sldId id="258" r:id="rId4"/>
-    <p:sldId id="259" r:id="rId5"/>
-    <p:sldId id="260" r:id="rId6"/>
-    <p:sldId id="261" r:id="rId7"/>
-    <p:sldId id="262" r:id="rId8"/>
-    <p:sldId id="263" r:id="rId9"/>
-    <p:sldId id="264" r:id="rId10"/>
+    <p:sldId id="260" r:id="rId5"/>
+    <p:sldId id="261" r:id="rId6"/>
+    <p:sldId id="262" r:id="rId7"/>
+    <p:sldId id="263" r:id="rId8"/>
+    <p:sldId id="264" r:id="rId9"/>
+    <p:sldId id="259" r:id="rId10"/>
     <p:sldId id="265" r:id="rId11"/>
     <p:sldId id="266" r:id="rId12"/>
     <p:sldId id="267" r:id="rId13"/>
@@ -2185,14 +2185,14 @@
           <a:p>
             <a:r>
               <a:rPr lang="en-US" dirty="0"/>
-              <a:t>0:45  ·  leave by 2:45
-• Traders and funds — price risk, signals
-• Food and beverage makers — procurement, hedging
-• Grain handlers, barge and rail, ports — physical disruption
-• Farmers and co-ops — hedging, marketing
-• Insurers and lenders — crop insurance, ag credit
-• Policymakers and consumers — food security, prices
-• Land this: a validated score helps everyone who does not trade</a:t>
+              <a:t>1:05  ·  leave by 3:50
+• All free and public, 15+ years of history
+• NASA POWER — daily temperature and rain, any location
+• Drought Monitor — weekly by county and state, published Thursdays → lets me test timing
+• Yahoo Finance — corn, soy, wheat, coffee, cocoa, OJ; Teucrium CORN avoids roll jumps
+• FAO yields via Our World in Data — the answer key
+• Next: NOAA Storm Events, and USDA county production (free key) for weights
+• Everything but USDA already pulled and checked</a:t>
             </a:r>
           </a:p>
         </p:txBody>
@@ -2279,14 +2279,12 @@
           <a:p>
             <a:r>
               <a:rPr lang="en-US" dirty="0"/>
-              <a:t>1:05  ·  leave by 3:50
-• All free and public, 15+ years of history
-• NASA POWER — daily temperature and rain, any location
-• Drought Monitor — weekly by county and state, published Thursdays → lets me test timing
-• Yahoo Finance — corn, soy, wheat, coffee, cocoa, OJ; Teucrium CORN avoids roll jumps
-• FAO yields via Our World in Data — the answer key
-• Next: NOAA Storm Events, and USDA county production (free key) for weights
-• Everything but USDA already pulled and checked</a:t>
+              <a:t>0:50  ·  leave by 4:40
+• Feasibility check before committing to the project
+• 5 corn-belt points, equal weights; index = July heat + summer rain + peak drought
+• r = −0.73 against yield vs trend
+• Without 2012: −0.43, still significant. July heat alone −0.78
+• Point: the measurement works even this crude</a:t>
             </a:r>
           </a:p>
         </p:txBody>
@@ -2373,12 +2371,13 @@
           <a:p>
             <a:r>
               <a:rPr lang="en-US" dirty="0"/>
-              <a:t>0:50  ·  leave by 4:40
-• Feasibility check before committing to the project
-• 5 corn-belt points, equal weights; index = July heat + summer rain + peak drought
-• r = −0.73 against yield vs trend
-• Without 2012: −0.43, still significant. July heat alone −0.78
-• Point: the measurement works even this crude</a:t>
+              <a:t>0:55  ·  leave by 5:35
+• Worst corn-belt drought in decades
+• Green = corn futures; red = share of Iowa in severe drought
+• July 3: corn +30%, but only 1% of Iowa in severe drought
+• Half the rally done by July 2 — two weeks before the map showed half the state
+• Maps publish two days after their date
+• Drought was real: yields −22% vs trend. The market did not wait for the data</a:t>
             </a:r>
           </a:p>
         </p:txBody>
@@ -2465,13 +2464,13 @@
           <a:p>
             <a:r>
               <a:rPr lang="en-US" dirty="0"/>
-              <a:t>0:55  ·  leave by 5:35
-• Worst corn-belt drought in decades
-• Green = corn futures; red = share of Iowa in severe drought
-• July 3: corn +30%, but only 1% of Iowa in severe drought
-• Half the rally done by July 2 — two weeks before the map showed half the state
-• Maps publish two days after their date
-• Drought was real: yields −22% vs trend. The market did not wait for the data</a:t>
+              <a:t>1:00  ·  leave by 6:35
+• Bars = correlation of weekly corn returns with drought change, by timing
+• Green (1–3 weeks before publication) strongest; publication week ≈ 0
+• Drought builds slowly → also estimated every lead and lag jointly
+• Still leads by 1–2 weeks, nothing after publication significant, holds without 2012
+• Annual story is almost all 2012: +0.42 → +0.07
+• So the market may already know — the project measures how early</a:t>
             </a:r>
           </a:p>
         </p:txBody>
@@ -2558,13 +2557,13 @@
           <a:p>
             <a:r>
               <a:rPr lang="en-US" dirty="0"/>
-              <a:t>1:00  ·  leave by 6:35
-• Bars = correlation of weekly corn returns with drought change, by timing
-• Green (1–3 weeks before publication) strongest; publication week ≈ 0
-• Drought builds slowly → also estimated every lead and lag jointly
-• Still leads by 1–2 weeks, nothing after publication significant, holds without 2012
-• Annual story is almost all 2012: +0.42 → +0.07
-• So the market may already know — the project measures how early</a:t>
+              <a:t>0:45  ·  leave by 7:20
+• BCG 10-20-70 — 10% algorithms, 20% data and tech, 70% people and process
+• My algorithms are deliberately simple
+• Most of the semester is the 20%: exposure, pipeline, publication dates
+• The 70% is the stakeholder slide: whose decision changes, and when
+• If the market already prices weather, that was only the 10%
+• Caveat: enterprise rule, I am one person — it guides effort, not a change programme</a:t>
             </a:r>
           </a:p>
         </p:txBody>
@@ -2651,13 +2650,14 @@
           <a:p>
             <a:r>
               <a:rPr lang="en-US" dirty="0"/>
-              <a:t>0:45  ·  leave by 7:20
-• BCG 10-20-70 — 10% algorithms, 20% data and tech, 70% people and process
-• My algorithms are deliberately simple
-• Most of the semester is the 20%: exposure, pipeline, publication dates
-• The 70% is the stakeholder slide: whose decision changes, and when
-• If the market already prices weather, that was only the 10%
-• Caveat: enterprise rule, I am one person — it guides effort, not a change programme</a:t>
+              <a:t>0:45  ·  leave by 2:45
+• Traders and funds — price risk, signals
+• Food and beverage makers — procurement, hedging
+• Grain handlers, barge and rail, ports — physical disruption
+• Farmers and co-ops — hedging, marketing
+• Insurers and lenders — crop insurance, ag credit
+• Policymakers and consumers — food security, prices
+• Land this: a validated score helps everyone who does not trade</a:t>
             </a:r>
           </a:p>
         </p:txBody>
@@ -3203,7 +3203,7 @@
                 <a:ea typeface="Georgia" pitchFamily="34" charset="-122"/>
                 <a:cs typeface="Georgia" pitchFamily="34" charset="-120"/>
               </a:rPr>
-              <a:t>Climate Futures Pricing</a:t>
+              <a:t>Climate Impacts on Futures Pricing</a:t>
             </a:r>
             <a:endParaRPr lang="en-US" sz="5400" dirty="0"/>
           </a:p>
@@ -10061,1204 +10061,6 @@
 </file>
 
 <file path=ppt/slides/slide4.xml><?xml version="1.0" encoding="utf-8"?>
-<p:sld xmlns:a="http://schemas.openxmlformats.org/drawingml/2006/main" xmlns:r="http://schemas.openxmlformats.org/officeDocument/2006/relationships" xmlns:p="http://schemas.openxmlformats.org/presentationml/2006/main">
-  <p:cSld name="Slide 4">
-    <p:spTree>
-      <p:nvGrpSpPr>
-        <p:cNvPr id="1" name=""/>
-        <p:cNvGrpSpPr/>
-        <p:nvPr/>
-      </p:nvGrpSpPr>
-      <p:grpSpPr>
-        <a:xfrm>
-          <a:off x="0" y="0"/>
-          <a:ext cx="0" cy="0"/>
-          <a:chOff x="0" y="0"/>
-          <a:chExt cx="0" cy="0"/>
-        </a:xfrm>
-      </p:grpSpPr>
-      <p:sp>
-        <p:nvSpPr>
-          <p:cNvPr id="2" name="Text 0"/>
-          <p:cNvSpPr txBox="1"/>
-          <p:nvPr/>
-        </p:nvSpPr>
-        <p:spPr>
-          <a:xfrm>
-            <a:off x="548640" y="384048"/>
-            <a:ext cx="11094415" cy="658368"/>
-          </a:xfrm>
-          <a:prstGeom prst="rect">
-            <a:avLst/>
-          </a:prstGeom>
-          <a:noFill/>
-          <a:ln/>
-        </p:spPr>
-        <p:txBody>
-          <a:bodyPr wrap="square" lIns="0" tIns="0" rIns="0" bIns="0" rtlCol="0" anchor="ctr"/>
-          <a:lstStyle/>
-          <a:p>
-            <a:pPr marL="0" indent="0">
-              <a:buNone/>
-            </a:pPr>
-            <a:r>
-              <a:rPr lang="en-US" sz="3600" b="1" dirty="0">
-                <a:solidFill>
-                  <a:srgbClr val="1D2723"/>
-                </a:solidFill>
-                <a:latin typeface="Georgia" pitchFamily="34" charset="0"/>
-                <a:ea typeface="Georgia" pitchFamily="34" charset="-122"/>
-                <a:cs typeface="Georgia" pitchFamily="34" charset="-120"/>
-              </a:rPr>
-              <a:t>Stakeholders</a:t>
-            </a:r>
-            <a:endParaRPr lang="en-US" sz="3600" dirty="0"/>
-          </a:p>
-        </p:txBody>
-      </p:sp>
-      <p:sp>
-        <p:nvSpPr>
-          <p:cNvPr id="3" name="Text 1"/>
-          <p:cNvSpPr txBox="1"/>
-          <p:nvPr/>
-        </p:nvSpPr>
-        <p:spPr>
-          <a:xfrm>
-            <a:off x="548640" y="1042416"/>
-            <a:ext cx="11094415" cy="402336"/>
-          </a:xfrm>
-          <a:prstGeom prst="rect">
-            <a:avLst/>
-          </a:prstGeom>
-          <a:noFill/>
-          <a:ln/>
-        </p:spPr>
-        <p:txBody>
-          <a:bodyPr wrap="square" lIns="0" tIns="0" rIns="0" bIns="0" rtlCol="0" anchor="ctr"/>
-          <a:lstStyle/>
-          <a:p>
-            <a:pPr marL="0" indent="0">
-              <a:buNone/>
-            </a:pPr>
-            <a:r>
-              <a:rPr lang="en-US" sz="1800" dirty="0">
-                <a:solidFill>
-                  <a:srgbClr val="5E6A64"/>
-                </a:solidFill>
-                <a:latin typeface="Arial" pitchFamily="34" charset="0"/>
-                <a:ea typeface="Arial" pitchFamily="34" charset="-122"/>
-                <a:cs typeface="Arial" pitchFamily="34" charset="-120"/>
-              </a:rPr>
-              <a:t>Who needs to know when weather becomes a supply shock</a:t>
-            </a:r>
-            <a:endParaRPr lang="en-US" sz="1800" dirty="0"/>
-          </a:p>
-        </p:txBody>
-      </p:sp>
-      <p:sp>
-        <p:nvSpPr>
-          <p:cNvPr id="4" name="Shape 2"/>
-          <p:cNvSpPr/>
-          <p:nvPr/>
-        </p:nvSpPr>
-        <p:spPr>
-          <a:xfrm>
-            <a:off x="548640" y="1737360"/>
-            <a:ext cx="3515258" cy="1874520"/>
-          </a:xfrm>
-          <a:prstGeom prst="roundRect">
-            <a:avLst>
-              <a:gd name="adj" fmla="val 3902"/>
-            </a:avLst>
-          </a:prstGeom>
-          <a:solidFill>
-            <a:srgbClr val="F2F5F3"/>
-          </a:solidFill>
-          <a:ln w="9525">
-            <a:solidFill>
-              <a:srgbClr val="F2F5F3"/>
-            </a:solidFill>
-            <a:prstDash val="solid"/>
-          </a:ln>
-        </p:spPr>
-        <p:txBody>
-          <a:bodyPr/>
-          <a:lstStyle/>
-          <a:p>
-            <a:endParaRPr lang="en-US"/>
-          </a:p>
-        </p:txBody>
-      </p:sp>
-      <p:sp>
-        <p:nvSpPr>
-          <p:cNvPr id="5" name="Shape 3"/>
-          <p:cNvSpPr/>
-          <p:nvPr/>
-        </p:nvSpPr>
-        <p:spPr>
-          <a:xfrm>
-            <a:off x="822960" y="2029968"/>
-            <a:ext cx="731520" cy="731520"/>
-          </a:xfrm>
-          <a:prstGeom prst="ellipse">
-            <a:avLst/>
-          </a:prstGeom>
-          <a:solidFill>
-            <a:srgbClr val="16302A"/>
-          </a:solidFill>
-          <a:ln w="9525">
-            <a:solidFill>
-              <a:srgbClr val="16302A"/>
-            </a:solidFill>
-            <a:prstDash val="solid"/>
-          </a:ln>
-        </p:spPr>
-        <p:txBody>
-          <a:bodyPr/>
-          <a:lstStyle/>
-          <a:p>
-            <a:endParaRPr lang="en-US"/>
-          </a:p>
-        </p:txBody>
-      </p:sp>
-      <p:pic>
-        <p:nvPicPr>
-          <p:cNvPr id="6" name="Image 0" descr="preencoded.png"/>
-          <p:cNvPicPr>
-            <a:picLocks noChangeAspect="1"/>
-          </p:cNvPicPr>
-          <p:nvPr/>
-        </p:nvPicPr>
-        <p:blipFill>
-          <a:blip r:embed="rId3"/>
-          <a:stretch>
-            <a:fillRect/>
-          </a:stretch>
-        </p:blipFill>
-        <p:spPr>
-          <a:xfrm>
-            <a:off x="998525" y="2205533"/>
-            <a:ext cx="380390" cy="380390"/>
-          </a:xfrm>
-          <a:prstGeom prst="rect">
-            <a:avLst/>
-          </a:prstGeom>
-        </p:spPr>
-      </p:pic>
-      <p:sp>
-        <p:nvSpPr>
-          <p:cNvPr id="7" name="Text 4"/>
-          <p:cNvSpPr txBox="1"/>
-          <p:nvPr/>
-        </p:nvSpPr>
-        <p:spPr>
-          <a:xfrm>
-            <a:off x="1737360" y="2029968"/>
-            <a:ext cx="2097938" cy="731520"/>
-          </a:xfrm>
-          <a:prstGeom prst="rect">
-            <a:avLst/>
-          </a:prstGeom>
-          <a:noFill/>
-          <a:ln/>
-        </p:spPr>
-        <p:txBody>
-          <a:bodyPr wrap="square" lIns="0" tIns="0" rIns="0" bIns="0" rtlCol="0" anchor="ctr"/>
-          <a:lstStyle/>
-          <a:p>
-            <a:pPr marL="0" indent="0">
-              <a:buNone/>
-            </a:pPr>
-            <a:r>
-              <a:rPr lang="en-US" sz="1700" b="1" dirty="0">
-                <a:solidFill>
-                  <a:srgbClr val="1D2723"/>
-                </a:solidFill>
-                <a:latin typeface="Arial" pitchFamily="34" charset="0"/>
-                <a:ea typeface="Arial" pitchFamily="34" charset="-122"/>
-                <a:cs typeface="Arial" pitchFamily="34" charset="-120"/>
-              </a:rPr>
-              <a:t>Commodity traders and funds</a:t>
-            </a:r>
-            <a:endParaRPr lang="en-US" sz="1700" dirty="0"/>
-          </a:p>
-        </p:txBody>
-      </p:sp>
-      <p:sp>
-        <p:nvSpPr>
-          <p:cNvPr id="8" name="Text 5"/>
-          <p:cNvSpPr txBox="1"/>
-          <p:nvPr/>
-        </p:nvSpPr>
-        <p:spPr>
-          <a:xfrm>
-            <a:off x="822960" y="2926080"/>
-            <a:ext cx="2966618" cy="548640"/>
-          </a:xfrm>
-          <a:prstGeom prst="rect">
-            <a:avLst/>
-          </a:prstGeom>
-          <a:noFill/>
-          <a:ln/>
-        </p:spPr>
-        <p:txBody>
-          <a:bodyPr wrap="square" lIns="0" tIns="0" rIns="0" bIns="0" rtlCol="0" anchor="t"/>
-          <a:lstStyle/>
-          <a:p>
-            <a:pPr marL="0" indent="0">
-              <a:buNone/>
-            </a:pPr>
-            <a:r>
-              <a:rPr lang="en-US" sz="1400" dirty="0">
-                <a:solidFill>
-                  <a:srgbClr val="5E6A64"/>
-                </a:solidFill>
-                <a:latin typeface="Arial" pitchFamily="34" charset="0"/>
-                <a:ea typeface="Arial" pitchFamily="34" charset="-122"/>
-                <a:cs typeface="Arial" pitchFamily="34" charset="-120"/>
-              </a:rPr>
-              <a:t>Price risk and trading signals</a:t>
-            </a:r>
-            <a:endParaRPr lang="en-US" sz="1400" dirty="0"/>
-          </a:p>
-        </p:txBody>
-      </p:sp>
-      <p:sp>
-        <p:nvSpPr>
-          <p:cNvPr id="9" name="Shape 6"/>
-          <p:cNvSpPr/>
-          <p:nvPr/>
-        </p:nvSpPr>
-        <p:spPr>
-          <a:xfrm>
-            <a:off x="4338218" y="1737360"/>
-            <a:ext cx="3515258" cy="1874520"/>
-          </a:xfrm>
-          <a:prstGeom prst="roundRect">
-            <a:avLst>
-              <a:gd name="adj" fmla="val 3902"/>
-            </a:avLst>
-          </a:prstGeom>
-          <a:solidFill>
-            <a:srgbClr val="F2F5F3"/>
-          </a:solidFill>
-          <a:ln w="9525">
-            <a:solidFill>
-              <a:srgbClr val="F2F5F3"/>
-            </a:solidFill>
-            <a:prstDash val="solid"/>
-          </a:ln>
-        </p:spPr>
-        <p:txBody>
-          <a:bodyPr/>
-          <a:lstStyle/>
-          <a:p>
-            <a:endParaRPr lang="en-US"/>
-          </a:p>
-        </p:txBody>
-      </p:sp>
-      <p:sp>
-        <p:nvSpPr>
-          <p:cNvPr id="10" name="Shape 7"/>
-          <p:cNvSpPr/>
-          <p:nvPr/>
-        </p:nvSpPr>
-        <p:spPr>
-          <a:xfrm>
-            <a:off x="4612538" y="2029968"/>
-            <a:ext cx="731520" cy="731520"/>
-          </a:xfrm>
-          <a:prstGeom prst="ellipse">
-            <a:avLst/>
-          </a:prstGeom>
-          <a:solidFill>
-            <a:srgbClr val="16302A"/>
-          </a:solidFill>
-          <a:ln w="9525">
-            <a:solidFill>
-              <a:srgbClr val="16302A"/>
-            </a:solidFill>
-            <a:prstDash val="solid"/>
-          </a:ln>
-        </p:spPr>
-        <p:txBody>
-          <a:bodyPr/>
-          <a:lstStyle/>
-          <a:p>
-            <a:endParaRPr lang="en-US"/>
-          </a:p>
-        </p:txBody>
-      </p:sp>
-      <p:pic>
-        <p:nvPicPr>
-          <p:cNvPr id="11" name="Image 1" descr="preencoded.png"/>
-          <p:cNvPicPr>
-            <a:picLocks noChangeAspect="1"/>
-          </p:cNvPicPr>
-          <p:nvPr/>
-        </p:nvPicPr>
-        <p:blipFill>
-          <a:blip r:embed="rId4"/>
-          <a:stretch>
-            <a:fillRect/>
-          </a:stretch>
-        </p:blipFill>
-        <p:spPr>
-          <a:xfrm>
-            <a:off x="4788103" y="2205533"/>
-            <a:ext cx="380390" cy="380390"/>
-          </a:xfrm>
-          <a:prstGeom prst="rect">
-            <a:avLst/>
-          </a:prstGeom>
-        </p:spPr>
-      </p:pic>
-      <p:sp>
-        <p:nvSpPr>
-          <p:cNvPr id="12" name="Text 8"/>
-          <p:cNvSpPr txBox="1"/>
-          <p:nvPr/>
-        </p:nvSpPr>
-        <p:spPr>
-          <a:xfrm>
-            <a:off x="5526938" y="2029968"/>
-            <a:ext cx="2097938" cy="731520"/>
-          </a:xfrm>
-          <a:prstGeom prst="rect">
-            <a:avLst/>
-          </a:prstGeom>
-          <a:noFill/>
-          <a:ln/>
-        </p:spPr>
-        <p:txBody>
-          <a:bodyPr wrap="square" lIns="0" tIns="0" rIns="0" bIns="0" rtlCol="0" anchor="ctr"/>
-          <a:lstStyle/>
-          <a:p>
-            <a:pPr marL="0" indent="0">
-              <a:buNone/>
-            </a:pPr>
-            <a:r>
-              <a:rPr lang="en-US" sz="1700" b="1" dirty="0">
-                <a:solidFill>
-                  <a:srgbClr val="1D2723"/>
-                </a:solidFill>
-                <a:latin typeface="Arial" pitchFamily="34" charset="0"/>
-                <a:ea typeface="Arial" pitchFamily="34" charset="-122"/>
-                <a:cs typeface="Arial" pitchFamily="34" charset="-120"/>
-              </a:rPr>
-              <a:t>Food and beverage manufacturers</a:t>
-            </a:r>
-            <a:endParaRPr lang="en-US" sz="1700" dirty="0"/>
-          </a:p>
-        </p:txBody>
-      </p:sp>
-      <p:sp>
-        <p:nvSpPr>
-          <p:cNvPr id="13" name="Text 9"/>
-          <p:cNvSpPr txBox="1"/>
-          <p:nvPr/>
-        </p:nvSpPr>
-        <p:spPr>
-          <a:xfrm>
-            <a:off x="4612538" y="2926080"/>
-            <a:ext cx="2966618" cy="548640"/>
-          </a:xfrm>
-          <a:prstGeom prst="rect">
-            <a:avLst/>
-          </a:prstGeom>
-          <a:noFill/>
-          <a:ln/>
-        </p:spPr>
-        <p:txBody>
-          <a:bodyPr wrap="square" lIns="0" tIns="0" rIns="0" bIns="0" rtlCol="0" anchor="t"/>
-          <a:lstStyle/>
-          <a:p>
-            <a:pPr marL="0" indent="0">
-              <a:buNone/>
-            </a:pPr>
-            <a:r>
-              <a:rPr lang="en-US" sz="1400" dirty="0">
-                <a:solidFill>
-                  <a:srgbClr val="5E6A64"/>
-                </a:solidFill>
-                <a:latin typeface="Arial" pitchFamily="34" charset="0"/>
-                <a:ea typeface="Arial" pitchFamily="34" charset="-122"/>
-                <a:cs typeface="Arial" pitchFamily="34" charset="-120"/>
-              </a:rPr>
-              <a:t>Procurement costs and hedging</a:t>
-            </a:r>
-            <a:endParaRPr lang="en-US" sz="1400" dirty="0"/>
-          </a:p>
-        </p:txBody>
-      </p:sp>
-      <p:sp>
-        <p:nvSpPr>
-          <p:cNvPr id="14" name="Shape 10"/>
-          <p:cNvSpPr/>
-          <p:nvPr/>
-        </p:nvSpPr>
-        <p:spPr>
-          <a:xfrm>
-            <a:off x="8127797" y="1737360"/>
-            <a:ext cx="3515258" cy="1874520"/>
-          </a:xfrm>
-          <a:prstGeom prst="roundRect">
-            <a:avLst>
-              <a:gd name="adj" fmla="val 3902"/>
-            </a:avLst>
-          </a:prstGeom>
-          <a:solidFill>
-            <a:srgbClr val="F2F5F3"/>
-          </a:solidFill>
-          <a:ln w="9525">
-            <a:solidFill>
-              <a:srgbClr val="F2F5F3"/>
-            </a:solidFill>
-            <a:prstDash val="solid"/>
-          </a:ln>
-        </p:spPr>
-        <p:txBody>
-          <a:bodyPr/>
-          <a:lstStyle/>
-          <a:p>
-            <a:endParaRPr lang="en-US"/>
-          </a:p>
-        </p:txBody>
-      </p:sp>
-      <p:sp>
-        <p:nvSpPr>
-          <p:cNvPr id="15" name="Shape 11"/>
-          <p:cNvSpPr/>
-          <p:nvPr/>
-        </p:nvSpPr>
-        <p:spPr>
-          <a:xfrm>
-            <a:off x="8402117" y="2029968"/>
-            <a:ext cx="731520" cy="731520"/>
-          </a:xfrm>
-          <a:prstGeom prst="ellipse">
-            <a:avLst/>
-          </a:prstGeom>
-          <a:solidFill>
-            <a:srgbClr val="16302A"/>
-          </a:solidFill>
-          <a:ln w="9525">
-            <a:solidFill>
-              <a:srgbClr val="16302A"/>
-            </a:solidFill>
-            <a:prstDash val="solid"/>
-          </a:ln>
-        </p:spPr>
-        <p:txBody>
-          <a:bodyPr/>
-          <a:lstStyle/>
-          <a:p>
-            <a:endParaRPr lang="en-US"/>
-          </a:p>
-        </p:txBody>
-      </p:sp>
-      <p:pic>
-        <p:nvPicPr>
-          <p:cNvPr id="16" name="Image 2" descr="preencoded.png"/>
-          <p:cNvPicPr>
-            <a:picLocks noChangeAspect="1"/>
-          </p:cNvPicPr>
-          <p:nvPr/>
-        </p:nvPicPr>
-        <p:blipFill>
-          <a:blip r:embed="rId5"/>
-          <a:stretch>
-            <a:fillRect/>
-          </a:stretch>
-        </p:blipFill>
-        <p:spPr>
-          <a:xfrm>
-            <a:off x="8577682" y="2205533"/>
-            <a:ext cx="380390" cy="380390"/>
-          </a:xfrm>
-          <a:prstGeom prst="rect">
-            <a:avLst/>
-          </a:prstGeom>
-        </p:spPr>
-      </p:pic>
-      <p:sp>
-        <p:nvSpPr>
-          <p:cNvPr id="17" name="Text 12"/>
-          <p:cNvSpPr txBox="1"/>
-          <p:nvPr/>
-        </p:nvSpPr>
-        <p:spPr>
-          <a:xfrm>
-            <a:off x="9316517" y="2029968"/>
-            <a:ext cx="2097938" cy="731520"/>
-          </a:xfrm>
-          <a:prstGeom prst="rect">
-            <a:avLst/>
-          </a:prstGeom>
-          <a:noFill/>
-          <a:ln/>
-        </p:spPr>
-        <p:txBody>
-          <a:bodyPr wrap="square" lIns="0" tIns="0" rIns="0" bIns="0" rtlCol="0" anchor="ctr"/>
-          <a:lstStyle/>
-          <a:p>
-            <a:pPr marL="0" indent="0">
-              <a:buNone/>
-            </a:pPr>
-            <a:r>
-              <a:rPr lang="en-US" sz="1700" b="1" dirty="0">
-                <a:solidFill>
-                  <a:srgbClr val="1D2723"/>
-                </a:solidFill>
-                <a:latin typeface="Arial" pitchFamily="34" charset="0"/>
-                <a:ea typeface="Arial" pitchFamily="34" charset="-122"/>
-                <a:cs typeface="Arial" pitchFamily="34" charset="-120"/>
-              </a:rPr>
-              <a:t>Agribusiness and logistics</a:t>
-            </a:r>
-            <a:endParaRPr lang="en-US" sz="1700" dirty="0"/>
-          </a:p>
-        </p:txBody>
-      </p:sp>
-      <p:sp>
-        <p:nvSpPr>
-          <p:cNvPr id="18" name="Text 13"/>
-          <p:cNvSpPr txBox="1"/>
-          <p:nvPr/>
-        </p:nvSpPr>
-        <p:spPr>
-          <a:xfrm>
-            <a:off x="8402117" y="2926080"/>
-            <a:ext cx="2966618" cy="548640"/>
-          </a:xfrm>
-          <a:prstGeom prst="rect">
-            <a:avLst/>
-          </a:prstGeom>
-          <a:noFill/>
-          <a:ln/>
-        </p:spPr>
-        <p:txBody>
-          <a:bodyPr wrap="square" lIns="0" tIns="0" rIns="0" bIns="0" rtlCol="0" anchor="t"/>
-          <a:lstStyle/>
-          <a:p>
-            <a:pPr marL="0" indent="0">
-              <a:buNone/>
-            </a:pPr>
-            <a:r>
-              <a:rPr lang="en-US" sz="1400" dirty="0">
-                <a:solidFill>
-                  <a:srgbClr val="5E6A64"/>
-                </a:solidFill>
-                <a:latin typeface="Arial" pitchFamily="34" charset="0"/>
-                <a:ea typeface="Arial" pitchFamily="34" charset="-122"/>
-                <a:cs typeface="Arial" pitchFamily="34" charset="-120"/>
-              </a:rPr>
-              <a:t>Grain handlers, barge and rail operators, ports</a:t>
-            </a:r>
-            <a:endParaRPr lang="en-US" sz="1400" dirty="0"/>
-          </a:p>
-        </p:txBody>
-      </p:sp>
-      <p:sp>
-        <p:nvSpPr>
-          <p:cNvPr id="19" name="Shape 14"/>
-          <p:cNvSpPr/>
-          <p:nvPr/>
-        </p:nvSpPr>
-        <p:spPr>
-          <a:xfrm>
-            <a:off x="548640" y="3886200"/>
-            <a:ext cx="3515258" cy="1874520"/>
-          </a:xfrm>
-          <a:prstGeom prst="roundRect">
-            <a:avLst>
-              <a:gd name="adj" fmla="val 3902"/>
-            </a:avLst>
-          </a:prstGeom>
-          <a:solidFill>
-            <a:srgbClr val="F2F5F3"/>
-          </a:solidFill>
-          <a:ln w="9525">
-            <a:solidFill>
-              <a:srgbClr val="F2F5F3"/>
-            </a:solidFill>
-            <a:prstDash val="solid"/>
-          </a:ln>
-        </p:spPr>
-        <p:txBody>
-          <a:bodyPr/>
-          <a:lstStyle/>
-          <a:p>
-            <a:endParaRPr lang="en-US"/>
-          </a:p>
-        </p:txBody>
-      </p:sp>
-      <p:sp>
-        <p:nvSpPr>
-          <p:cNvPr id="20" name="Shape 15"/>
-          <p:cNvSpPr/>
-          <p:nvPr/>
-        </p:nvSpPr>
-        <p:spPr>
-          <a:xfrm>
-            <a:off x="822960" y="4178808"/>
-            <a:ext cx="731520" cy="731520"/>
-          </a:xfrm>
-          <a:prstGeom prst="ellipse">
-            <a:avLst/>
-          </a:prstGeom>
-          <a:solidFill>
-            <a:srgbClr val="16302A"/>
-          </a:solidFill>
-          <a:ln w="9525">
-            <a:solidFill>
-              <a:srgbClr val="16302A"/>
-            </a:solidFill>
-            <a:prstDash val="solid"/>
-          </a:ln>
-        </p:spPr>
-        <p:txBody>
-          <a:bodyPr/>
-          <a:lstStyle/>
-          <a:p>
-            <a:endParaRPr lang="en-US"/>
-          </a:p>
-        </p:txBody>
-      </p:sp>
-      <p:pic>
-        <p:nvPicPr>
-          <p:cNvPr id="21" name="Image 3" descr="preencoded.png"/>
-          <p:cNvPicPr>
-            <a:picLocks noChangeAspect="1"/>
-          </p:cNvPicPr>
-          <p:nvPr/>
-        </p:nvPicPr>
-        <p:blipFill>
-          <a:blip r:embed="rId6"/>
-          <a:stretch>
-            <a:fillRect/>
-          </a:stretch>
-        </p:blipFill>
-        <p:spPr>
-          <a:xfrm>
-            <a:off x="998525" y="4354373"/>
-            <a:ext cx="380390" cy="380390"/>
-          </a:xfrm>
-          <a:prstGeom prst="rect">
-            <a:avLst/>
-          </a:prstGeom>
-        </p:spPr>
-      </p:pic>
-      <p:sp>
-        <p:nvSpPr>
-          <p:cNvPr id="22" name="Text 16"/>
-          <p:cNvSpPr txBox="1"/>
-          <p:nvPr/>
-        </p:nvSpPr>
-        <p:spPr>
-          <a:xfrm>
-            <a:off x="1737360" y="4178808"/>
-            <a:ext cx="2097938" cy="731520"/>
-          </a:xfrm>
-          <a:prstGeom prst="rect">
-            <a:avLst/>
-          </a:prstGeom>
-          <a:noFill/>
-          <a:ln/>
-        </p:spPr>
-        <p:txBody>
-          <a:bodyPr wrap="square" lIns="0" tIns="0" rIns="0" bIns="0" rtlCol="0" anchor="ctr"/>
-          <a:lstStyle/>
-          <a:p>
-            <a:pPr marL="0" indent="0">
-              <a:buNone/>
-            </a:pPr>
-            <a:r>
-              <a:rPr lang="en-US" sz="1700" b="1" dirty="0">
-                <a:solidFill>
-                  <a:srgbClr val="1D2723"/>
-                </a:solidFill>
-                <a:latin typeface="Arial" pitchFamily="34" charset="0"/>
-                <a:ea typeface="Arial" pitchFamily="34" charset="-122"/>
-                <a:cs typeface="Arial" pitchFamily="34" charset="-120"/>
-              </a:rPr>
-              <a:t>Farmers and cooperatives</a:t>
-            </a:r>
-            <a:endParaRPr lang="en-US" sz="1700" dirty="0"/>
-          </a:p>
-        </p:txBody>
-      </p:sp>
-      <p:sp>
-        <p:nvSpPr>
-          <p:cNvPr id="23" name="Text 17"/>
-          <p:cNvSpPr txBox="1"/>
-          <p:nvPr/>
-        </p:nvSpPr>
-        <p:spPr>
-          <a:xfrm>
-            <a:off x="822960" y="5074920"/>
-            <a:ext cx="2966618" cy="548640"/>
-          </a:xfrm>
-          <a:prstGeom prst="rect">
-            <a:avLst/>
-          </a:prstGeom>
-          <a:noFill/>
-          <a:ln/>
-        </p:spPr>
-        <p:txBody>
-          <a:bodyPr wrap="square" lIns="0" tIns="0" rIns="0" bIns="0" rtlCol="0" anchor="t"/>
-          <a:lstStyle/>
-          <a:p>
-            <a:pPr marL="0" indent="0">
-              <a:buNone/>
-            </a:pPr>
-            <a:r>
-              <a:rPr lang="en-US" sz="1400" dirty="0">
-                <a:solidFill>
-                  <a:srgbClr val="5E6A64"/>
-                </a:solidFill>
-                <a:latin typeface="Arial" pitchFamily="34" charset="0"/>
-                <a:ea typeface="Arial" pitchFamily="34" charset="-122"/>
-                <a:cs typeface="Arial" pitchFamily="34" charset="-120"/>
-              </a:rPr>
-              <a:t>Hedging and marketing decisions</a:t>
-            </a:r>
-            <a:endParaRPr lang="en-US" sz="1400" dirty="0"/>
-          </a:p>
-        </p:txBody>
-      </p:sp>
-      <p:sp>
-        <p:nvSpPr>
-          <p:cNvPr id="24" name="Shape 18"/>
-          <p:cNvSpPr/>
-          <p:nvPr/>
-        </p:nvSpPr>
-        <p:spPr>
-          <a:xfrm>
-            <a:off x="4338218" y="3886200"/>
-            <a:ext cx="3515258" cy="1874520"/>
-          </a:xfrm>
-          <a:prstGeom prst="roundRect">
-            <a:avLst>
-              <a:gd name="adj" fmla="val 3902"/>
-            </a:avLst>
-          </a:prstGeom>
-          <a:solidFill>
-            <a:srgbClr val="F2F5F3"/>
-          </a:solidFill>
-          <a:ln w="9525">
-            <a:solidFill>
-              <a:srgbClr val="F2F5F3"/>
-            </a:solidFill>
-            <a:prstDash val="solid"/>
-          </a:ln>
-        </p:spPr>
-        <p:txBody>
-          <a:bodyPr/>
-          <a:lstStyle/>
-          <a:p>
-            <a:endParaRPr lang="en-US"/>
-          </a:p>
-        </p:txBody>
-      </p:sp>
-      <p:sp>
-        <p:nvSpPr>
-          <p:cNvPr id="25" name="Shape 19"/>
-          <p:cNvSpPr/>
-          <p:nvPr/>
-        </p:nvSpPr>
-        <p:spPr>
-          <a:xfrm>
-            <a:off x="4612538" y="4178808"/>
-            <a:ext cx="731520" cy="731520"/>
-          </a:xfrm>
-          <a:prstGeom prst="ellipse">
-            <a:avLst/>
-          </a:prstGeom>
-          <a:solidFill>
-            <a:srgbClr val="16302A"/>
-          </a:solidFill>
-          <a:ln w="9525">
-            <a:solidFill>
-              <a:srgbClr val="16302A"/>
-            </a:solidFill>
-            <a:prstDash val="solid"/>
-          </a:ln>
-        </p:spPr>
-        <p:txBody>
-          <a:bodyPr/>
-          <a:lstStyle/>
-          <a:p>
-            <a:endParaRPr lang="en-US"/>
-          </a:p>
-        </p:txBody>
-      </p:sp>
-      <p:pic>
-        <p:nvPicPr>
-          <p:cNvPr id="26" name="Image 4" descr="preencoded.png"/>
-          <p:cNvPicPr>
-            <a:picLocks noChangeAspect="1"/>
-          </p:cNvPicPr>
-          <p:nvPr/>
-        </p:nvPicPr>
-        <p:blipFill>
-          <a:blip r:embed="rId7"/>
-          <a:stretch>
-            <a:fillRect/>
-          </a:stretch>
-        </p:blipFill>
-        <p:spPr>
-          <a:xfrm>
-            <a:off x="4788103" y="4354373"/>
-            <a:ext cx="380390" cy="380390"/>
-          </a:xfrm>
-          <a:prstGeom prst="rect">
-            <a:avLst/>
-          </a:prstGeom>
-        </p:spPr>
-      </p:pic>
-      <p:sp>
-        <p:nvSpPr>
-          <p:cNvPr id="27" name="Text 20"/>
-          <p:cNvSpPr txBox="1"/>
-          <p:nvPr/>
-        </p:nvSpPr>
-        <p:spPr>
-          <a:xfrm>
-            <a:off x="5526938" y="4178808"/>
-            <a:ext cx="2097938" cy="731520"/>
-          </a:xfrm>
-          <a:prstGeom prst="rect">
-            <a:avLst/>
-          </a:prstGeom>
-          <a:noFill/>
-          <a:ln/>
-        </p:spPr>
-        <p:txBody>
-          <a:bodyPr wrap="square" lIns="0" tIns="0" rIns="0" bIns="0" rtlCol="0" anchor="ctr"/>
-          <a:lstStyle/>
-          <a:p>
-            <a:pPr marL="0" indent="0">
-              <a:buNone/>
-            </a:pPr>
-            <a:r>
-              <a:rPr lang="en-US" sz="1700" b="1" dirty="0">
-                <a:solidFill>
-                  <a:srgbClr val="1D2723"/>
-                </a:solidFill>
-                <a:latin typeface="Arial" pitchFamily="34" charset="0"/>
-                <a:ea typeface="Arial" pitchFamily="34" charset="-122"/>
-                <a:cs typeface="Arial" pitchFamily="34" charset="-120"/>
-              </a:rPr>
-              <a:t>Insurers and lenders</a:t>
-            </a:r>
-            <a:endParaRPr lang="en-US" sz="1700" dirty="0"/>
-          </a:p>
-        </p:txBody>
-      </p:sp>
-      <p:sp>
-        <p:nvSpPr>
-          <p:cNvPr id="28" name="Text 21"/>
-          <p:cNvSpPr txBox="1"/>
-          <p:nvPr/>
-        </p:nvSpPr>
-        <p:spPr>
-          <a:xfrm>
-            <a:off x="4612538" y="5074920"/>
-            <a:ext cx="2966618" cy="548640"/>
-          </a:xfrm>
-          <a:prstGeom prst="rect">
-            <a:avLst/>
-          </a:prstGeom>
-          <a:noFill/>
-          <a:ln/>
-        </p:spPr>
-        <p:txBody>
-          <a:bodyPr wrap="square" lIns="0" tIns="0" rIns="0" bIns="0" rtlCol="0" anchor="t"/>
-          <a:lstStyle/>
-          <a:p>
-            <a:pPr marL="0" indent="0">
-              <a:buNone/>
-            </a:pPr>
-            <a:r>
-              <a:rPr lang="en-US" sz="1400" dirty="0">
-                <a:solidFill>
-                  <a:srgbClr val="5E6A64"/>
-                </a:solidFill>
-                <a:latin typeface="Arial" pitchFamily="34" charset="0"/>
-                <a:ea typeface="Arial" pitchFamily="34" charset="-122"/>
-                <a:cs typeface="Arial" pitchFamily="34" charset="-120"/>
-              </a:rPr>
-              <a:t>Crop insurance and agricultural credit risk</a:t>
-            </a:r>
-            <a:endParaRPr lang="en-US" sz="1400" dirty="0"/>
-          </a:p>
-        </p:txBody>
-      </p:sp>
-      <p:sp>
-        <p:nvSpPr>
-          <p:cNvPr id="29" name="Shape 22"/>
-          <p:cNvSpPr/>
-          <p:nvPr/>
-        </p:nvSpPr>
-        <p:spPr>
-          <a:xfrm>
-            <a:off x="8127797" y="3886200"/>
-            <a:ext cx="3515258" cy="1874520"/>
-          </a:xfrm>
-          <a:prstGeom prst="roundRect">
-            <a:avLst>
-              <a:gd name="adj" fmla="val 3902"/>
-            </a:avLst>
-          </a:prstGeom>
-          <a:solidFill>
-            <a:srgbClr val="F2F5F3"/>
-          </a:solidFill>
-          <a:ln w="9525">
-            <a:solidFill>
-              <a:srgbClr val="F2F5F3"/>
-            </a:solidFill>
-            <a:prstDash val="solid"/>
-          </a:ln>
-        </p:spPr>
-        <p:txBody>
-          <a:bodyPr/>
-          <a:lstStyle/>
-          <a:p>
-            <a:endParaRPr lang="en-US"/>
-          </a:p>
-        </p:txBody>
-      </p:sp>
-      <p:sp>
-        <p:nvSpPr>
-          <p:cNvPr id="30" name="Shape 23"/>
-          <p:cNvSpPr/>
-          <p:nvPr/>
-        </p:nvSpPr>
-        <p:spPr>
-          <a:xfrm>
-            <a:off x="8402117" y="4178808"/>
-            <a:ext cx="731520" cy="731520"/>
-          </a:xfrm>
-          <a:prstGeom prst="ellipse">
-            <a:avLst/>
-          </a:prstGeom>
-          <a:solidFill>
-            <a:srgbClr val="16302A"/>
-          </a:solidFill>
-          <a:ln w="9525">
-            <a:solidFill>
-              <a:srgbClr val="16302A"/>
-            </a:solidFill>
-            <a:prstDash val="solid"/>
-          </a:ln>
-        </p:spPr>
-        <p:txBody>
-          <a:bodyPr/>
-          <a:lstStyle/>
-          <a:p>
-            <a:endParaRPr lang="en-US"/>
-          </a:p>
-        </p:txBody>
-      </p:sp>
-      <p:pic>
-        <p:nvPicPr>
-          <p:cNvPr id="31" name="Image 5" descr="preencoded.png"/>
-          <p:cNvPicPr>
-            <a:picLocks noChangeAspect="1"/>
-          </p:cNvPicPr>
-          <p:nvPr/>
-        </p:nvPicPr>
-        <p:blipFill>
-          <a:blip r:embed="rId8"/>
-          <a:stretch>
-            <a:fillRect/>
-          </a:stretch>
-        </p:blipFill>
-        <p:spPr>
-          <a:xfrm>
-            <a:off x="8577682" y="4354373"/>
-            <a:ext cx="380390" cy="380390"/>
-          </a:xfrm>
-          <a:prstGeom prst="rect">
-            <a:avLst/>
-          </a:prstGeom>
-        </p:spPr>
-      </p:pic>
-      <p:sp>
-        <p:nvSpPr>
-          <p:cNvPr id="32" name="Text 24"/>
-          <p:cNvSpPr txBox="1"/>
-          <p:nvPr/>
-        </p:nvSpPr>
-        <p:spPr>
-          <a:xfrm>
-            <a:off x="9316517" y="4178808"/>
-            <a:ext cx="2097938" cy="731520"/>
-          </a:xfrm>
-          <a:prstGeom prst="rect">
-            <a:avLst/>
-          </a:prstGeom>
-          <a:noFill/>
-          <a:ln/>
-        </p:spPr>
-        <p:txBody>
-          <a:bodyPr wrap="square" lIns="0" tIns="0" rIns="0" bIns="0" rtlCol="0" anchor="ctr"/>
-          <a:lstStyle/>
-          <a:p>
-            <a:pPr marL="0" indent="0">
-              <a:buNone/>
-            </a:pPr>
-            <a:r>
-              <a:rPr lang="en-US" sz="1700" b="1" dirty="0">
-                <a:solidFill>
-                  <a:srgbClr val="1D2723"/>
-                </a:solidFill>
-                <a:latin typeface="Arial" pitchFamily="34" charset="0"/>
-                <a:ea typeface="Arial" pitchFamily="34" charset="-122"/>
-                <a:cs typeface="Arial" pitchFamily="34" charset="-120"/>
-              </a:rPr>
-              <a:t>Policymakers and consumers</a:t>
-            </a:r>
-            <a:endParaRPr lang="en-US" sz="1700" dirty="0"/>
-          </a:p>
-        </p:txBody>
-      </p:sp>
-      <p:sp>
-        <p:nvSpPr>
-          <p:cNvPr id="33" name="Text 25"/>
-          <p:cNvSpPr txBox="1"/>
-          <p:nvPr/>
-        </p:nvSpPr>
-        <p:spPr>
-          <a:xfrm>
-            <a:off x="8402117" y="5074920"/>
-            <a:ext cx="2966618" cy="548640"/>
-          </a:xfrm>
-          <a:prstGeom prst="rect">
-            <a:avLst/>
-          </a:prstGeom>
-          <a:noFill/>
-          <a:ln/>
-        </p:spPr>
-        <p:txBody>
-          <a:bodyPr wrap="square" lIns="0" tIns="0" rIns="0" bIns="0" rtlCol="0" anchor="t"/>
-          <a:lstStyle/>
-          <a:p>
-            <a:pPr marL="0" indent="0">
-              <a:buNone/>
-            </a:pPr>
-            <a:r>
-              <a:rPr lang="en-US" sz="1400" dirty="0">
-                <a:solidFill>
-                  <a:srgbClr val="5E6A64"/>
-                </a:solidFill>
-                <a:latin typeface="Arial" pitchFamily="34" charset="0"/>
-                <a:ea typeface="Arial" pitchFamily="34" charset="-122"/>
-                <a:cs typeface="Arial" pitchFamily="34" charset="-120"/>
-              </a:rPr>
-              <a:t>Food security and food prices</a:t>
-            </a:r>
-            <a:endParaRPr lang="en-US" sz="1400" dirty="0"/>
-          </a:p>
-        </p:txBody>
-      </p:sp>
-      <p:sp>
-        <p:nvSpPr>
-          <p:cNvPr id="34" name="Text 26"/>
-          <p:cNvSpPr txBox="1"/>
-          <p:nvPr/>
-        </p:nvSpPr>
-        <p:spPr>
-          <a:xfrm>
-            <a:off x="548640" y="5870448"/>
-            <a:ext cx="10424160" cy="365760"/>
-          </a:xfrm>
-          <a:prstGeom prst="rect">
-            <a:avLst/>
-          </a:prstGeom>
-          <a:noFill/>
-          <a:ln/>
-        </p:spPr>
-        <p:txBody>
-          <a:bodyPr wrap="square" lIns="0" tIns="0" rIns="0" bIns="0" rtlCol="0" anchor="ctr"/>
-          <a:lstStyle/>
-          <a:p>
-            <a:pPr marL="0" indent="0">
-              <a:buNone/>
-            </a:pPr>
-            <a:r>
-              <a:rPr lang="en-US" sz="1500" i="1" dirty="0">
-                <a:solidFill>
-                  <a:srgbClr val="2E6B4F"/>
-                </a:solidFill>
-                <a:latin typeface="Arial" pitchFamily="34" charset="0"/>
-                <a:ea typeface="Arial" pitchFamily="34" charset="-122"/>
-                <a:cs typeface="Arial" pitchFamily="34" charset="-120"/>
-              </a:rPr>
-              <a:t>Even if traders already price the weather, a validated risk score helps everyone who does not trade.</a:t>
-            </a:r>
-            <a:endParaRPr lang="en-US" sz="1500" dirty="0"/>
-          </a:p>
-        </p:txBody>
-      </p:sp>
-      <p:sp>
-        <p:nvSpPr>
-          <p:cNvPr id="35" name="Slide Number Placeholder 0"/>
-          <p:cNvSpPr>
-            <a:spLocks noGrp="1"/>
-          </p:cNvSpPr>
-          <p:nvPr>
-            <p:ph type="sldNum" sz="quarter" idx="4294967295"/>
-          </p:nvPr>
-        </p:nvSpPr>
-        <p:spPr>
-          <a:xfrm>
-            <a:off x="11183112" y="6309360"/>
-            <a:ext cx="457200" cy="274320"/>
-          </a:xfrm>
-          <a:prstGeom prst="rect">
-            <a:avLst/>
-          </a:prstGeom>
-          <a:extLst>
-            <a:ext uri="{C572A759-6A51-4108-AA02-DFA0A04FC94B}">
-              <ma14:wrappingTextBoxFlag xmlns:ma14="http://schemas.microsoft.com/office/mac/drawingml/2011/main" xmlns="" val="0"/>
-            </a:ext>
-          </a:extLst>
-        </p:spPr>
-        <p:txBody>
-          <a:bodyPr/>
-          <a:lstStyle>
-            <a:lvl1pPr>
-              <a:defRPr sz="1000">
-                <a:solidFill>
-                  <a:srgbClr val="5E6A64"/>
-                </a:solidFill>
-                <a:latin typeface="Arial"/>
-                <a:ea typeface="Arial"/>
-                <a:cs typeface="Arial"/>
-              </a:defRPr>
-            </a:lvl1pPr>
-          </a:lstStyle>
-          <a:p>
-            <a:pPr algn="r"/>
-            <a:fld id="{F7021451-1387-4CA6-816F-3879F97B5CBC}" type="slidenum">
-              <a:rPr lang="en-US" b="0"/>
-              <a:t>4</a:t>
-            </a:fld>
-            <a:endParaRPr lang="en-US"/>
-          </a:p>
-        </p:txBody>
-      </p:sp>
-    </p:spTree>
-  </p:cSld>
-  <p:clrMapOvr>
-    <a:masterClrMapping/>
-  </p:clrMapOvr>
-</p:sld>
-</file>
-
-<file path=ppt/slides/slide5.xml><?xml version="1.0" encoding="utf-8"?>
 <p:sld xmlns:a="http://schemas.openxmlformats.org/drawingml/2006/main" xmlns:r="http://schemas.openxmlformats.org/officeDocument/2006/relationships" xmlns:p="http://schemas.openxmlformats.org/presentationml/2006/main">
   <p:cSld name="Slide 5">
     <p:spTree>
@@ -14350,7 +13152,7 @@
             <a:pPr algn="r"/>
             <a:fld id="{F7021451-1387-4CA6-816F-3879F97B5CBC}" type="slidenum">
               <a:rPr lang="en-US" b="0"/>
-              <a:t>5</a:t>
+              <a:t>4</a:t>
             </a:fld>
             <a:endParaRPr lang="en-US"/>
           </a:p>
@@ -14364,7 +13166,7 @@
 </p:sld>
 </file>
 
-<file path=ppt/slides/slide6.xml><?xml version="1.0" encoding="utf-8"?>
+<file path=ppt/slides/slide5.xml><?xml version="1.0" encoding="utf-8"?>
 <p:sld xmlns:a="http://schemas.openxmlformats.org/drawingml/2006/main" xmlns:r="http://schemas.openxmlformats.org/officeDocument/2006/relationships" xmlns:p="http://schemas.openxmlformats.org/presentationml/2006/main">
   <p:cSld name="Slide 6">
     <p:spTree>
@@ -14911,7 +13713,7 @@
             <a:pPr algn="r"/>
             <a:fld id="{F7021451-1387-4CA6-816F-3879F97B5CBC}" type="slidenum">
               <a:rPr lang="en-US" b="0"/>
-              <a:t>6</a:t>
+              <a:t>5</a:t>
             </a:fld>
             <a:endParaRPr lang="en-US"/>
           </a:p>
@@ -14925,7 +13727,7 @@
 </p:sld>
 </file>
 
-<file path=ppt/slides/slide7.xml><?xml version="1.0" encoding="utf-8"?>
+<file path=ppt/slides/slide6.xml><?xml version="1.0" encoding="utf-8"?>
 <p:sld xmlns:a="http://schemas.openxmlformats.org/drawingml/2006/main" xmlns:r="http://schemas.openxmlformats.org/officeDocument/2006/relationships" xmlns:p="http://schemas.openxmlformats.org/presentationml/2006/main">
   <p:cSld name="Slide 7">
     <p:spTree>
@@ -15351,7 +14153,7 @@
             <a:pPr algn="r"/>
             <a:fld id="{F7021451-1387-4CA6-816F-3879F97B5CBC}" type="slidenum">
               <a:rPr lang="en-US" b="0"/>
-              <a:t>7</a:t>
+              <a:t>6</a:t>
             </a:fld>
             <a:endParaRPr lang="en-US"/>
           </a:p>
@@ -15365,7 +14167,7 @@
 </p:sld>
 </file>
 
-<file path=ppt/slides/slide8.xml><?xml version="1.0" encoding="utf-8"?>
+<file path=ppt/slides/slide7.xml><?xml version="1.0" encoding="utf-8"?>
 <p:sld xmlns:a="http://schemas.openxmlformats.org/drawingml/2006/main" xmlns:r="http://schemas.openxmlformats.org/officeDocument/2006/relationships" xmlns:p="http://schemas.openxmlformats.org/presentationml/2006/main">
   <p:cSld name="Slide 8">
     <p:spTree>
@@ -15825,7 +14627,7 @@
             <a:pPr algn="r"/>
             <a:fld id="{F7021451-1387-4CA6-816F-3879F97B5CBC}" type="slidenum">
               <a:rPr lang="en-US" b="0"/>
-              <a:t>8</a:t>
+              <a:t>7</a:t>
             </a:fld>
             <a:endParaRPr lang="en-US"/>
           </a:p>
@@ -15839,7 +14641,7 @@
 </p:sld>
 </file>
 
-<file path=ppt/slides/slide9.xml><?xml version="1.0" encoding="utf-8"?>
+<file path=ppt/slides/slide8.xml><?xml version="1.0" encoding="utf-8"?>
 <p:sld xmlns:a="http://schemas.openxmlformats.org/drawingml/2006/main" xmlns:r="http://schemas.openxmlformats.org/officeDocument/2006/relationships" xmlns:p="http://schemas.openxmlformats.org/presentationml/2006/main">
   <p:cSld name="Slide 9">
     <p:spTree>
@@ -16726,6 +15528,1204 @@
       <p:sp>
         <p:nvSpPr>
           <p:cNvPr id="27" name="Slide Number Placeholder 0"/>
+          <p:cNvSpPr>
+            <a:spLocks noGrp="1"/>
+          </p:cNvSpPr>
+          <p:nvPr>
+            <p:ph type="sldNum" sz="quarter" idx="4294967295"/>
+          </p:nvPr>
+        </p:nvSpPr>
+        <p:spPr>
+          <a:xfrm>
+            <a:off x="11183112" y="6309360"/>
+            <a:ext cx="457200" cy="274320"/>
+          </a:xfrm>
+          <a:prstGeom prst="rect">
+            <a:avLst/>
+          </a:prstGeom>
+          <a:extLst>
+            <a:ext uri="{C572A759-6A51-4108-AA02-DFA0A04FC94B}">
+              <ma14:wrappingTextBoxFlag xmlns:ma14="http://schemas.microsoft.com/office/mac/drawingml/2011/main" xmlns="" val="0"/>
+            </a:ext>
+          </a:extLst>
+        </p:spPr>
+        <p:txBody>
+          <a:bodyPr/>
+          <a:lstStyle>
+            <a:lvl1pPr>
+              <a:defRPr sz="1000">
+                <a:solidFill>
+                  <a:srgbClr val="5E6A64"/>
+                </a:solidFill>
+                <a:latin typeface="Arial"/>
+                <a:ea typeface="Arial"/>
+                <a:cs typeface="Arial"/>
+              </a:defRPr>
+            </a:lvl1pPr>
+          </a:lstStyle>
+          <a:p>
+            <a:pPr algn="r"/>
+            <a:fld id="{F7021451-1387-4CA6-816F-3879F97B5CBC}" type="slidenum">
+              <a:rPr lang="en-US" b="0"/>
+              <a:t>8</a:t>
+            </a:fld>
+            <a:endParaRPr lang="en-US"/>
+          </a:p>
+        </p:txBody>
+      </p:sp>
+    </p:spTree>
+  </p:cSld>
+  <p:clrMapOvr>
+    <a:masterClrMapping/>
+  </p:clrMapOvr>
+</p:sld>
+</file>
+
+<file path=ppt/slides/slide9.xml><?xml version="1.0" encoding="utf-8"?>
+<p:sld xmlns:a="http://schemas.openxmlformats.org/drawingml/2006/main" xmlns:r="http://schemas.openxmlformats.org/officeDocument/2006/relationships" xmlns:p="http://schemas.openxmlformats.org/presentationml/2006/main">
+  <p:cSld name="Slide 4">
+    <p:spTree>
+      <p:nvGrpSpPr>
+        <p:cNvPr id="1" name=""/>
+        <p:cNvGrpSpPr/>
+        <p:nvPr/>
+      </p:nvGrpSpPr>
+      <p:grpSpPr>
+        <a:xfrm>
+          <a:off x="0" y="0"/>
+          <a:ext cx="0" cy="0"/>
+          <a:chOff x="0" y="0"/>
+          <a:chExt cx="0" cy="0"/>
+        </a:xfrm>
+      </p:grpSpPr>
+      <p:sp>
+        <p:nvSpPr>
+          <p:cNvPr id="2" name="Text 0"/>
+          <p:cNvSpPr txBox="1"/>
+          <p:nvPr/>
+        </p:nvSpPr>
+        <p:spPr>
+          <a:xfrm>
+            <a:off x="548640" y="384048"/>
+            <a:ext cx="11094415" cy="658368"/>
+          </a:xfrm>
+          <a:prstGeom prst="rect">
+            <a:avLst/>
+          </a:prstGeom>
+          <a:noFill/>
+          <a:ln/>
+        </p:spPr>
+        <p:txBody>
+          <a:bodyPr wrap="square" lIns="0" tIns="0" rIns="0" bIns="0" rtlCol="0" anchor="ctr"/>
+          <a:lstStyle/>
+          <a:p>
+            <a:pPr marL="0" indent="0">
+              <a:buNone/>
+            </a:pPr>
+            <a:r>
+              <a:rPr lang="en-US" sz="3600" b="1" dirty="0">
+                <a:solidFill>
+                  <a:srgbClr val="1D2723"/>
+                </a:solidFill>
+                <a:latin typeface="Georgia" pitchFamily="34" charset="0"/>
+                <a:ea typeface="Georgia" pitchFamily="34" charset="-122"/>
+                <a:cs typeface="Georgia" pitchFamily="34" charset="-120"/>
+              </a:rPr>
+              <a:t>Stakeholders</a:t>
+            </a:r>
+            <a:endParaRPr lang="en-US" sz="3600" dirty="0"/>
+          </a:p>
+        </p:txBody>
+      </p:sp>
+      <p:sp>
+        <p:nvSpPr>
+          <p:cNvPr id="3" name="Text 1"/>
+          <p:cNvSpPr txBox="1"/>
+          <p:nvPr/>
+        </p:nvSpPr>
+        <p:spPr>
+          <a:xfrm>
+            <a:off x="548640" y="1042416"/>
+            <a:ext cx="11094415" cy="402336"/>
+          </a:xfrm>
+          <a:prstGeom prst="rect">
+            <a:avLst/>
+          </a:prstGeom>
+          <a:noFill/>
+          <a:ln/>
+        </p:spPr>
+        <p:txBody>
+          <a:bodyPr wrap="square" lIns="0" tIns="0" rIns="0" bIns="0" rtlCol="0" anchor="ctr"/>
+          <a:lstStyle/>
+          <a:p>
+            <a:pPr marL="0" indent="0">
+              <a:buNone/>
+            </a:pPr>
+            <a:r>
+              <a:rPr lang="en-US" sz="1800" dirty="0">
+                <a:solidFill>
+                  <a:srgbClr val="5E6A64"/>
+                </a:solidFill>
+                <a:latin typeface="Arial" pitchFamily="34" charset="0"/>
+                <a:ea typeface="Arial" pitchFamily="34" charset="-122"/>
+                <a:cs typeface="Arial" pitchFamily="34" charset="-120"/>
+              </a:rPr>
+              <a:t>Who needs to know when weather becomes a supply shock</a:t>
+            </a:r>
+            <a:endParaRPr lang="en-US" sz="1800" dirty="0"/>
+          </a:p>
+        </p:txBody>
+      </p:sp>
+      <p:sp>
+        <p:nvSpPr>
+          <p:cNvPr id="4" name="Shape 2"/>
+          <p:cNvSpPr/>
+          <p:nvPr/>
+        </p:nvSpPr>
+        <p:spPr>
+          <a:xfrm>
+            <a:off x="548640" y="1737360"/>
+            <a:ext cx="3515258" cy="1874520"/>
+          </a:xfrm>
+          <a:prstGeom prst="roundRect">
+            <a:avLst>
+              <a:gd name="adj" fmla="val 3902"/>
+            </a:avLst>
+          </a:prstGeom>
+          <a:solidFill>
+            <a:srgbClr val="F2F5F3"/>
+          </a:solidFill>
+          <a:ln w="9525">
+            <a:solidFill>
+              <a:srgbClr val="F2F5F3"/>
+            </a:solidFill>
+            <a:prstDash val="solid"/>
+          </a:ln>
+        </p:spPr>
+        <p:txBody>
+          <a:bodyPr/>
+          <a:lstStyle/>
+          <a:p>
+            <a:endParaRPr lang="en-US"/>
+          </a:p>
+        </p:txBody>
+      </p:sp>
+      <p:sp>
+        <p:nvSpPr>
+          <p:cNvPr id="5" name="Shape 3"/>
+          <p:cNvSpPr/>
+          <p:nvPr/>
+        </p:nvSpPr>
+        <p:spPr>
+          <a:xfrm>
+            <a:off x="822960" y="2029968"/>
+            <a:ext cx="731520" cy="731520"/>
+          </a:xfrm>
+          <a:prstGeom prst="ellipse">
+            <a:avLst/>
+          </a:prstGeom>
+          <a:solidFill>
+            <a:srgbClr val="16302A"/>
+          </a:solidFill>
+          <a:ln w="9525">
+            <a:solidFill>
+              <a:srgbClr val="16302A"/>
+            </a:solidFill>
+            <a:prstDash val="solid"/>
+          </a:ln>
+        </p:spPr>
+        <p:txBody>
+          <a:bodyPr/>
+          <a:lstStyle/>
+          <a:p>
+            <a:endParaRPr lang="en-US"/>
+          </a:p>
+        </p:txBody>
+      </p:sp>
+      <p:pic>
+        <p:nvPicPr>
+          <p:cNvPr id="6" name="Image 0" descr="preencoded.png"/>
+          <p:cNvPicPr>
+            <a:picLocks noChangeAspect="1"/>
+          </p:cNvPicPr>
+          <p:nvPr/>
+        </p:nvPicPr>
+        <p:blipFill>
+          <a:blip r:embed="rId3"/>
+          <a:stretch>
+            <a:fillRect/>
+          </a:stretch>
+        </p:blipFill>
+        <p:spPr>
+          <a:xfrm>
+            <a:off x="998525" y="2205533"/>
+            <a:ext cx="380390" cy="380390"/>
+          </a:xfrm>
+          <a:prstGeom prst="rect">
+            <a:avLst/>
+          </a:prstGeom>
+        </p:spPr>
+      </p:pic>
+      <p:sp>
+        <p:nvSpPr>
+          <p:cNvPr id="7" name="Text 4"/>
+          <p:cNvSpPr txBox="1"/>
+          <p:nvPr/>
+        </p:nvSpPr>
+        <p:spPr>
+          <a:xfrm>
+            <a:off x="1737360" y="2029968"/>
+            <a:ext cx="2097938" cy="731520"/>
+          </a:xfrm>
+          <a:prstGeom prst="rect">
+            <a:avLst/>
+          </a:prstGeom>
+          <a:noFill/>
+          <a:ln/>
+        </p:spPr>
+        <p:txBody>
+          <a:bodyPr wrap="square" lIns="0" tIns="0" rIns="0" bIns="0" rtlCol="0" anchor="ctr"/>
+          <a:lstStyle/>
+          <a:p>
+            <a:pPr marL="0" indent="0">
+              <a:buNone/>
+            </a:pPr>
+            <a:r>
+              <a:rPr lang="en-US" sz="1700" b="1" dirty="0">
+                <a:solidFill>
+                  <a:srgbClr val="1D2723"/>
+                </a:solidFill>
+                <a:latin typeface="Arial" pitchFamily="34" charset="0"/>
+                <a:ea typeface="Arial" pitchFamily="34" charset="-122"/>
+                <a:cs typeface="Arial" pitchFamily="34" charset="-120"/>
+              </a:rPr>
+              <a:t>Commodity traders and funds</a:t>
+            </a:r>
+            <a:endParaRPr lang="en-US" sz="1700" dirty="0"/>
+          </a:p>
+        </p:txBody>
+      </p:sp>
+      <p:sp>
+        <p:nvSpPr>
+          <p:cNvPr id="8" name="Text 5"/>
+          <p:cNvSpPr txBox="1"/>
+          <p:nvPr/>
+        </p:nvSpPr>
+        <p:spPr>
+          <a:xfrm>
+            <a:off x="822960" y="2926080"/>
+            <a:ext cx="2966618" cy="548640"/>
+          </a:xfrm>
+          <a:prstGeom prst="rect">
+            <a:avLst/>
+          </a:prstGeom>
+          <a:noFill/>
+          <a:ln/>
+        </p:spPr>
+        <p:txBody>
+          <a:bodyPr wrap="square" lIns="0" tIns="0" rIns="0" bIns="0" rtlCol="0" anchor="t"/>
+          <a:lstStyle/>
+          <a:p>
+            <a:pPr marL="0" indent="0">
+              <a:buNone/>
+            </a:pPr>
+            <a:r>
+              <a:rPr lang="en-US" sz="1400" dirty="0">
+                <a:solidFill>
+                  <a:srgbClr val="5E6A64"/>
+                </a:solidFill>
+                <a:latin typeface="Arial" pitchFamily="34" charset="0"/>
+                <a:ea typeface="Arial" pitchFamily="34" charset="-122"/>
+                <a:cs typeface="Arial" pitchFamily="34" charset="-120"/>
+              </a:rPr>
+              <a:t>Price risk and trading signals</a:t>
+            </a:r>
+            <a:endParaRPr lang="en-US" sz="1400" dirty="0"/>
+          </a:p>
+        </p:txBody>
+      </p:sp>
+      <p:sp>
+        <p:nvSpPr>
+          <p:cNvPr id="9" name="Shape 6"/>
+          <p:cNvSpPr/>
+          <p:nvPr/>
+        </p:nvSpPr>
+        <p:spPr>
+          <a:xfrm>
+            <a:off x="4338218" y="1737360"/>
+            <a:ext cx="3515258" cy="1874520"/>
+          </a:xfrm>
+          <a:prstGeom prst="roundRect">
+            <a:avLst>
+              <a:gd name="adj" fmla="val 3902"/>
+            </a:avLst>
+          </a:prstGeom>
+          <a:solidFill>
+            <a:srgbClr val="F2F5F3"/>
+          </a:solidFill>
+          <a:ln w="9525">
+            <a:solidFill>
+              <a:srgbClr val="F2F5F3"/>
+            </a:solidFill>
+            <a:prstDash val="solid"/>
+          </a:ln>
+        </p:spPr>
+        <p:txBody>
+          <a:bodyPr/>
+          <a:lstStyle/>
+          <a:p>
+            <a:endParaRPr lang="en-US"/>
+          </a:p>
+        </p:txBody>
+      </p:sp>
+      <p:sp>
+        <p:nvSpPr>
+          <p:cNvPr id="10" name="Shape 7"/>
+          <p:cNvSpPr/>
+          <p:nvPr/>
+        </p:nvSpPr>
+        <p:spPr>
+          <a:xfrm>
+            <a:off x="4612538" y="2029968"/>
+            <a:ext cx="731520" cy="731520"/>
+          </a:xfrm>
+          <a:prstGeom prst="ellipse">
+            <a:avLst/>
+          </a:prstGeom>
+          <a:solidFill>
+            <a:srgbClr val="16302A"/>
+          </a:solidFill>
+          <a:ln w="9525">
+            <a:solidFill>
+              <a:srgbClr val="16302A"/>
+            </a:solidFill>
+            <a:prstDash val="solid"/>
+          </a:ln>
+        </p:spPr>
+        <p:txBody>
+          <a:bodyPr/>
+          <a:lstStyle/>
+          <a:p>
+            <a:endParaRPr lang="en-US"/>
+          </a:p>
+        </p:txBody>
+      </p:sp>
+      <p:pic>
+        <p:nvPicPr>
+          <p:cNvPr id="11" name="Image 1" descr="preencoded.png"/>
+          <p:cNvPicPr>
+            <a:picLocks noChangeAspect="1"/>
+          </p:cNvPicPr>
+          <p:nvPr/>
+        </p:nvPicPr>
+        <p:blipFill>
+          <a:blip r:embed="rId4"/>
+          <a:stretch>
+            <a:fillRect/>
+          </a:stretch>
+        </p:blipFill>
+        <p:spPr>
+          <a:xfrm>
+            <a:off x="4788103" y="2205533"/>
+            <a:ext cx="380390" cy="380390"/>
+          </a:xfrm>
+          <a:prstGeom prst="rect">
+            <a:avLst/>
+          </a:prstGeom>
+        </p:spPr>
+      </p:pic>
+      <p:sp>
+        <p:nvSpPr>
+          <p:cNvPr id="12" name="Text 8"/>
+          <p:cNvSpPr txBox="1"/>
+          <p:nvPr/>
+        </p:nvSpPr>
+        <p:spPr>
+          <a:xfrm>
+            <a:off x="5526938" y="2029968"/>
+            <a:ext cx="2097938" cy="731520"/>
+          </a:xfrm>
+          <a:prstGeom prst="rect">
+            <a:avLst/>
+          </a:prstGeom>
+          <a:noFill/>
+          <a:ln/>
+        </p:spPr>
+        <p:txBody>
+          <a:bodyPr wrap="square" lIns="0" tIns="0" rIns="0" bIns="0" rtlCol="0" anchor="ctr"/>
+          <a:lstStyle/>
+          <a:p>
+            <a:pPr marL="0" indent="0">
+              <a:buNone/>
+            </a:pPr>
+            <a:r>
+              <a:rPr lang="en-US" sz="1700" b="1" dirty="0">
+                <a:solidFill>
+                  <a:srgbClr val="1D2723"/>
+                </a:solidFill>
+                <a:latin typeface="Arial" pitchFamily="34" charset="0"/>
+                <a:ea typeface="Arial" pitchFamily="34" charset="-122"/>
+                <a:cs typeface="Arial" pitchFamily="34" charset="-120"/>
+              </a:rPr>
+              <a:t>Food and beverage manufacturers</a:t>
+            </a:r>
+            <a:endParaRPr lang="en-US" sz="1700" dirty="0"/>
+          </a:p>
+        </p:txBody>
+      </p:sp>
+      <p:sp>
+        <p:nvSpPr>
+          <p:cNvPr id="13" name="Text 9"/>
+          <p:cNvSpPr txBox="1"/>
+          <p:nvPr/>
+        </p:nvSpPr>
+        <p:spPr>
+          <a:xfrm>
+            <a:off x="4612538" y="2926080"/>
+            <a:ext cx="2966618" cy="548640"/>
+          </a:xfrm>
+          <a:prstGeom prst="rect">
+            <a:avLst/>
+          </a:prstGeom>
+          <a:noFill/>
+          <a:ln/>
+        </p:spPr>
+        <p:txBody>
+          <a:bodyPr wrap="square" lIns="0" tIns="0" rIns="0" bIns="0" rtlCol="0" anchor="t"/>
+          <a:lstStyle/>
+          <a:p>
+            <a:pPr marL="0" indent="0">
+              <a:buNone/>
+            </a:pPr>
+            <a:r>
+              <a:rPr lang="en-US" sz="1400" dirty="0">
+                <a:solidFill>
+                  <a:srgbClr val="5E6A64"/>
+                </a:solidFill>
+                <a:latin typeface="Arial" pitchFamily="34" charset="0"/>
+                <a:ea typeface="Arial" pitchFamily="34" charset="-122"/>
+                <a:cs typeface="Arial" pitchFamily="34" charset="-120"/>
+              </a:rPr>
+              <a:t>Procurement costs and hedging</a:t>
+            </a:r>
+            <a:endParaRPr lang="en-US" sz="1400" dirty="0"/>
+          </a:p>
+        </p:txBody>
+      </p:sp>
+      <p:sp>
+        <p:nvSpPr>
+          <p:cNvPr id="14" name="Shape 10"/>
+          <p:cNvSpPr/>
+          <p:nvPr/>
+        </p:nvSpPr>
+        <p:spPr>
+          <a:xfrm>
+            <a:off x="8127797" y="1737360"/>
+            <a:ext cx="3515258" cy="1874520"/>
+          </a:xfrm>
+          <a:prstGeom prst="roundRect">
+            <a:avLst>
+              <a:gd name="adj" fmla="val 3902"/>
+            </a:avLst>
+          </a:prstGeom>
+          <a:solidFill>
+            <a:srgbClr val="F2F5F3"/>
+          </a:solidFill>
+          <a:ln w="9525">
+            <a:solidFill>
+              <a:srgbClr val="F2F5F3"/>
+            </a:solidFill>
+            <a:prstDash val="solid"/>
+          </a:ln>
+        </p:spPr>
+        <p:txBody>
+          <a:bodyPr/>
+          <a:lstStyle/>
+          <a:p>
+            <a:endParaRPr lang="en-US"/>
+          </a:p>
+        </p:txBody>
+      </p:sp>
+      <p:sp>
+        <p:nvSpPr>
+          <p:cNvPr id="15" name="Shape 11"/>
+          <p:cNvSpPr/>
+          <p:nvPr/>
+        </p:nvSpPr>
+        <p:spPr>
+          <a:xfrm>
+            <a:off x="8402117" y="2029968"/>
+            <a:ext cx="731520" cy="731520"/>
+          </a:xfrm>
+          <a:prstGeom prst="ellipse">
+            <a:avLst/>
+          </a:prstGeom>
+          <a:solidFill>
+            <a:srgbClr val="16302A"/>
+          </a:solidFill>
+          <a:ln w="9525">
+            <a:solidFill>
+              <a:srgbClr val="16302A"/>
+            </a:solidFill>
+            <a:prstDash val="solid"/>
+          </a:ln>
+        </p:spPr>
+        <p:txBody>
+          <a:bodyPr/>
+          <a:lstStyle/>
+          <a:p>
+            <a:endParaRPr lang="en-US"/>
+          </a:p>
+        </p:txBody>
+      </p:sp>
+      <p:pic>
+        <p:nvPicPr>
+          <p:cNvPr id="16" name="Image 2" descr="preencoded.png"/>
+          <p:cNvPicPr>
+            <a:picLocks noChangeAspect="1"/>
+          </p:cNvPicPr>
+          <p:nvPr/>
+        </p:nvPicPr>
+        <p:blipFill>
+          <a:blip r:embed="rId5"/>
+          <a:stretch>
+            <a:fillRect/>
+          </a:stretch>
+        </p:blipFill>
+        <p:spPr>
+          <a:xfrm>
+            <a:off x="8577682" y="2205533"/>
+            <a:ext cx="380390" cy="380390"/>
+          </a:xfrm>
+          <a:prstGeom prst="rect">
+            <a:avLst/>
+          </a:prstGeom>
+        </p:spPr>
+      </p:pic>
+      <p:sp>
+        <p:nvSpPr>
+          <p:cNvPr id="17" name="Text 12"/>
+          <p:cNvSpPr txBox="1"/>
+          <p:nvPr/>
+        </p:nvSpPr>
+        <p:spPr>
+          <a:xfrm>
+            <a:off x="9316517" y="2029968"/>
+            <a:ext cx="2097938" cy="731520"/>
+          </a:xfrm>
+          <a:prstGeom prst="rect">
+            <a:avLst/>
+          </a:prstGeom>
+          <a:noFill/>
+          <a:ln/>
+        </p:spPr>
+        <p:txBody>
+          <a:bodyPr wrap="square" lIns="0" tIns="0" rIns="0" bIns="0" rtlCol="0" anchor="ctr"/>
+          <a:lstStyle/>
+          <a:p>
+            <a:pPr marL="0" indent="0">
+              <a:buNone/>
+            </a:pPr>
+            <a:r>
+              <a:rPr lang="en-US" sz="1700" b="1" dirty="0">
+                <a:solidFill>
+                  <a:srgbClr val="1D2723"/>
+                </a:solidFill>
+                <a:latin typeface="Arial" pitchFamily="34" charset="0"/>
+                <a:ea typeface="Arial" pitchFamily="34" charset="-122"/>
+                <a:cs typeface="Arial" pitchFamily="34" charset="-120"/>
+              </a:rPr>
+              <a:t>Agribusiness and logistics</a:t>
+            </a:r>
+            <a:endParaRPr lang="en-US" sz="1700" dirty="0"/>
+          </a:p>
+        </p:txBody>
+      </p:sp>
+      <p:sp>
+        <p:nvSpPr>
+          <p:cNvPr id="18" name="Text 13"/>
+          <p:cNvSpPr txBox="1"/>
+          <p:nvPr/>
+        </p:nvSpPr>
+        <p:spPr>
+          <a:xfrm>
+            <a:off x="8402117" y="2926080"/>
+            <a:ext cx="2966618" cy="548640"/>
+          </a:xfrm>
+          <a:prstGeom prst="rect">
+            <a:avLst/>
+          </a:prstGeom>
+          <a:noFill/>
+          <a:ln/>
+        </p:spPr>
+        <p:txBody>
+          <a:bodyPr wrap="square" lIns="0" tIns="0" rIns="0" bIns="0" rtlCol="0" anchor="t"/>
+          <a:lstStyle/>
+          <a:p>
+            <a:pPr marL="0" indent="0">
+              <a:buNone/>
+            </a:pPr>
+            <a:r>
+              <a:rPr lang="en-US" sz="1400" dirty="0">
+                <a:solidFill>
+                  <a:srgbClr val="5E6A64"/>
+                </a:solidFill>
+                <a:latin typeface="Arial" pitchFamily="34" charset="0"/>
+                <a:ea typeface="Arial" pitchFamily="34" charset="-122"/>
+                <a:cs typeface="Arial" pitchFamily="34" charset="-120"/>
+              </a:rPr>
+              <a:t>Grain handlers, barge and rail operators, ports</a:t>
+            </a:r>
+            <a:endParaRPr lang="en-US" sz="1400" dirty="0"/>
+          </a:p>
+        </p:txBody>
+      </p:sp>
+      <p:sp>
+        <p:nvSpPr>
+          <p:cNvPr id="19" name="Shape 14"/>
+          <p:cNvSpPr/>
+          <p:nvPr/>
+        </p:nvSpPr>
+        <p:spPr>
+          <a:xfrm>
+            <a:off x="548640" y="3886200"/>
+            <a:ext cx="3515258" cy="1874520"/>
+          </a:xfrm>
+          <a:prstGeom prst="roundRect">
+            <a:avLst>
+              <a:gd name="adj" fmla="val 3902"/>
+            </a:avLst>
+          </a:prstGeom>
+          <a:solidFill>
+            <a:srgbClr val="F2F5F3"/>
+          </a:solidFill>
+          <a:ln w="9525">
+            <a:solidFill>
+              <a:srgbClr val="F2F5F3"/>
+            </a:solidFill>
+            <a:prstDash val="solid"/>
+          </a:ln>
+        </p:spPr>
+        <p:txBody>
+          <a:bodyPr/>
+          <a:lstStyle/>
+          <a:p>
+            <a:endParaRPr lang="en-US"/>
+          </a:p>
+        </p:txBody>
+      </p:sp>
+      <p:sp>
+        <p:nvSpPr>
+          <p:cNvPr id="20" name="Shape 15"/>
+          <p:cNvSpPr/>
+          <p:nvPr/>
+        </p:nvSpPr>
+        <p:spPr>
+          <a:xfrm>
+            <a:off x="822960" y="4178808"/>
+            <a:ext cx="731520" cy="731520"/>
+          </a:xfrm>
+          <a:prstGeom prst="ellipse">
+            <a:avLst/>
+          </a:prstGeom>
+          <a:solidFill>
+            <a:srgbClr val="16302A"/>
+          </a:solidFill>
+          <a:ln w="9525">
+            <a:solidFill>
+              <a:srgbClr val="16302A"/>
+            </a:solidFill>
+            <a:prstDash val="solid"/>
+          </a:ln>
+        </p:spPr>
+        <p:txBody>
+          <a:bodyPr/>
+          <a:lstStyle/>
+          <a:p>
+            <a:endParaRPr lang="en-US"/>
+          </a:p>
+        </p:txBody>
+      </p:sp>
+      <p:pic>
+        <p:nvPicPr>
+          <p:cNvPr id="21" name="Image 3" descr="preencoded.png"/>
+          <p:cNvPicPr>
+            <a:picLocks noChangeAspect="1"/>
+          </p:cNvPicPr>
+          <p:nvPr/>
+        </p:nvPicPr>
+        <p:blipFill>
+          <a:blip r:embed="rId6"/>
+          <a:stretch>
+            <a:fillRect/>
+          </a:stretch>
+        </p:blipFill>
+        <p:spPr>
+          <a:xfrm>
+            <a:off x="998525" y="4354373"/>
+            <a:ext cx="380390" cy="380390"/>
+          </a:xfrm>
+          <a:prstGeom prst="rect">
+            <a:avLst/>
+          </a:prstGeom>
+        </p:spPr>
+      </p:pic>
+      <p:sp>
+        <p:nvSpPr>
+          <p:cNvPr id="22" name="Text 16"/>
+          <p:cNvSpPr txBox="1"/>
+          <p:nvPr/>
+        </p:nvSpPr>
+        <p:spPr>
+          <a:xfrm>
+            <a:off x="1737360" y="4178808"/>
+            <a:ext cx="2097938" cy="731520"/>
+          </a:xfrm>
+          <a:prstGeom prst="rect">
+            <a:avLst/>
+          </a:prstGeom>
+          <a:noFill/>
+          <a:ln/>
+        </p:spPr>
+        <p:txBody>
+          <a:bodyPr wrap="square" lIns="0" tIns="0" rIns="0" bIns="0" rtlCol="0" anchor="ctr"/>
+          <a:lstStyle/>
+          <a:p>
+            <a:pPr marL="0" indent="0">
+              <a:buNone/>
+            </a:pPr>
+            <a:r>
+              <a:rPr lang="en-US" sz="1700" b="1" dirty="0">
+                <a:solidFill>
+                  <a:srgbClr val="1D2723"/>
+                </a:solidFill>
+                <a:latin typeface="Arial" pitchFamily="34" charset="0"/>
+                <a:ea typeface="Arial" pitchFamily="34" charset="-122"/>
+                <a:cs typeface="Arial" pitchFamily="34" charset="-120"/>
+              </a:rPr>
+              <a:t>Farmers and cooperatives</a:t>
+            </a:r>
+            <a:endParaRPr lang="en-US" sz="1700" dirty="0"/>
+          </a:p>
+        </p:txBody>
+      </p:sp>
+      <p:sp>
+        <p:nvSpPr>
+          <p:cNvPr id="23" name="Text 17"/>
+          <p:cNvSpPr txBox="1"/>
+          <p:nvPr/>
+        </p:nvSpPr>
+        <p:spPr>
+          <a:xfrm>
+            <a:off x="822960" y="5074920"/>
+            <a:ext cx="2966618" cy="548640"/>
+          </a:xfrm>
+          <a:prstGeom prst="rect">
+            <a:avLst/>
+          </a:prstGeom>
+          <a:noFill/>
+          <a:ln/>
+        </p:spPr>
+        <p:txBody>
+          <a:bodyPr wrap="square" lIns="0" tIns="0" rIns="0" bIns="0" rtlCol="0" anchor="t"/>
+          <a:lstStyle/>
+          <a:p>
+            <a:pPr marL="0" indent="0">
+              <a:buNone/>
+            </a:pPr>
+            <a:r>
+              <a:rPr lang="en-US" sz="1400" dirty="0">
+                <a:solidFill>
+                  <a:srgbClr val="5E6A64"/>
+                </a:solidFill>
+                <a:latin typeface="Arial" pitchFamily="34" charset="0"/>
+                <a:ea typeface="Arial" pitchFamily="34" charset="-122"/>
+                <a:cs typeface="Arial" pitchFamily="34" charset="-120"/>
+              </a:rPr>
+              <a:t>Hedging and marketing decisions</a:t>
+            </a:r>
+            <a:endParaRPr lang="en-US" sz="1400" dirty="0"/>
+          </a:p>
+        </p:txBody>
+      </p:sp>
+      <p:sp>
+        <p:nvSpPr>
+          <p:cNvPr id="24" name="Shape 18"/>
+          <p:cNvSpPr/>
+          <p:nvPr/>
+        </p:nvSpPr>
+        <p:spPr>
+          <a:xfrm>
+            <a:off x="4338218" y="3886200"/>
+            <a:ext cx="3515258" cy="1874520"/>
+          </a:xfrm>
+          <a:prstGeom prst="roundRect">
+            <a:avLst>
+              <a:gd name="adj" fmla="val 3902"/>
+            </a:avLst>
+          </a:prstGeom>
+          <a:solidFill>
+            <a:srgbClr val="F2F5F3"/>
+          </a:solidFill>
+          <a:ln w="9525">
+            <a:solidFill>
+              <a:srgbClr val="F2F5F3"/>
+            </a:solidFill>
+            <a:prstDash val="solid"/>
+          </a:ln>
+        </p:spPr>
+        <p:txBody>
+          <a:bodyPr/>
+          <a:lstStyle/>
+          <a:p>
+            <a:endParaRPr lang="en-US"/>
+          </a:p>
+        </p:txBody>
+      </p:sp>
+      <p:sp>
+        <p:nvSpPr>
+          <p:cNvPr id="25" name="Shape 19"/>
+          <p:cNvSpPr/>
+          <p:nvPr/>
+        </p:nvSpPr>
+        <p:spPr>
+          <a:xfrm>
+            <a:off x="4612538" y="4178808"/>
+            <a:ext cx="731520" cy="731520"/>
+          </a:xfrm>
+          <a:prstGeom prst="ellipse">
+            <a:avLst/>
+          </a:prstGeom>
+          <a:solidFill>
+            <a:srgbClr val="16302A"/>
+          </a:solidFill>
+          <a:ln w="9525">
+            <a:solidFill>
+              <a:srgbClr val="16302A"/>
+            </a:solidFill>
+            <a:prstDash val="solid"/>
+          </a:ln>
+        </p:spPr>
+        <p:txBody>
+          <a:bodyPr/>
+          <a:lstStyle/>
+          <a:p>
+            <a:endParaRPr lang="en-US"/>
+          </a:p>
+        </p:txBody>
+      </p:sp>
+      <p:pic>
+        <p:nvPicPr>
+          <p:cNvPr id="26" name="Image 4" descr="preencoded.png"/>
+          <p:cNvPicPr>
+            <a:picLocks noChangeAspect="1"/>
+          </p:cNvPicPr>
+          <p:nvPr/>
+        </p:nvPicPr>
+        <p:blipFill>
+          <a:blip r:embed="rId7"/>
+          <a:stretch>
+            <a:fillRect/>
+          </a:stretch>
+        </p:blipFill>
+        <p:spPr>
+          <a:xfrm>
+            <a:off x="4788103" y="4354373"/>
+            <a:ext cx="380390" cy="380390"/>
+          </a:xfrm>
+          <a:prstGeom prst="rect">
+            <a:avLst/>
+          </a:prstGeom>
+        </p:spPr>
+      </p:pic>
+      <p:sp>
+        <p:nvSpPr>
+          <p:cNvPr id="27" name="Text 20"/>
+          <p:cNvSpPr txBox="1"/>
+          <p:nvPr/>
+        </p:nvSpPr>
+        <p:spPr>
+          <a:xfrm>
+            <a:off x="5526938" y="4178808"/>
+            <a:ext cx="2097938" cy="731520"/>
+          </a:xfrm>
+          <a:prstGeom prst="rect">
+            <a:avLst/>
+          </a:prstGeom>
+          <a:noFill/>
+          <a:ln/>
+        </p:spPr>
+        <p:txBody>
+          <a:bodyPr wrap="square" lIns="0" tIns="0" rIns="0" bIns="0" rtlCol="0" anchor="ctr"/>
+          <a:lstStyle/>
+          <a:p>
+            <a:pPr marL="0" indent="0">
+              <a:buNone/>
+            </a:pPr>
+            <a:r>
+              <a:rPr lang="en-US" sz="1700" b="1" dirty="0">
+                <a:solidFill>
+                  <a:srgbClr val="1D2723"/>
+                </a:solidFill>
+                <a:latin typeface="Arial" pitchFamily="34" charset="0"/>
+                <a:ea typeface="Arial" pitchFamily="34" charset="-122"/>
+                <a:cs typeface="Arial" pitchFamily="34" charset="-120"/>
+              </a:rPr>
+              <a:t>Insurers and lenders</a:t>
+            </a:r>
+            <a:endParaRPr lang="en-US" sz="1700" dirty="0"/>
+          </a:p>
+        </p:txBody>
+      </p:sp>
+      <p:sp>
+        <p:nvSpPr>
+          <p:cNvPr id="28" name="Text 21"/>
+          <p:cNvSpPr txBox="1"/>
+          <p:nvPr/>
+        </p:nvSpPr>
+        <p:spPr>
+          <a:xfrm>
+            <a:off x="4612538" y="5074920"/>
+            <a:ext cx="2966618" cy="548640"/>
+          </a:xfrm>
+          <a:prstGeom prst="rect">
+            <a:avLst/>
+          </a:prstGeom>
+          <a:noFill/>
+          <a:ln/>
+        </p:spPr>
+        <p:txBody>
+          <a:bodyPr wrap="square" lIns="0" tIns="0" rIns="0" bIns="0" rtlCol="0" anchor="t"/>
+          <a:lstStyle/>
+          <a:p>
+            <a:pPr marL="0" indent="0">
+              <a:buNone/>
+            </a:pPr>
+            <a:r>
+              <a:rPr lang="en-US" sz="1400" dirty="0">
+                <a:solidFill>
+                  <a:srgbClr val="5E6A64"/>
+                </a:solidFill>
+                <a:latin typeface="Arial" pitchFamily="34" charset="0"/>
+                <a:ea typeface="Arial" pitchFamily="34" charset="-122"/>
+                <a:cs typeface="Arial" pitchFamily="34" charset="-120"/>
+              </a:rPr>
+              <a:t>Crop insurance and agricultural credit risk</a:t>
+            </a:r>
+            <a:endParaRPr lang="en-US" sz="1400" dirty="0"/>
+          </a:p>
+        </p:txBody>
+      </p:sp>
+      <p:sp>
+        <p:nvSpPr>
+          <p:cNvPr id="29" name="Shape 22"/>
+          <p:cNvSpPr/>
+          <p:nvPr/>
+        </p:nvSpPr>
+        <p:spPr>
+          <a:xfrm>
+            <a:off x="8127797" y="3886200"/>
+            <a:ext cx="3515258" cy="1874520"/>
+          </a:xfrm>
+          <a:prstGeom prst="roundRect">
+            <a:avLst>
+              <a:gd name="adj" fmla="val 3902"/>
+            </a:avLst>
+          </a:prstGeom>
+          <a:solidFill>
+            <a:srgbClr val="F2F5F3"/>
+          </a:solidFill>
+          <a:ln w="9525">
+            <a:solidFill>
+              <a:srgbClr val="F2F5F3"/>
+            </a:solidFill>
+            <a:prstDash val="solid"/>
+          </a:ln>
+        </p:spPr>
+        <p:txBody>
+          <a:bodyPr/>
+          <a:lstStyle/>
+          <a:p>
+            <a:endParaRPr lang="en-US"/>
+          </a:p>
+        </p:txBody>
+      </p:sp>
+      <p:sp>
+        <p:nvSpPr>
+          <p:cNvPr id="30" name="Shape 23"/>
+          <p:cNvSpPr/>
+          <p:nvPr/>
+        </p:nvSpPr>
+        <p:spPr>
+          <a:xfrm>
+            <a:off x="8402117" y="4178808"/>
+            <a:ext cx="731520" cy="731520"/>
+          </a:xfrm>
+          <a:prstGeom prst="ellipse">
+            <a:avLst/>
+          </a:prstGeom>
+          <a:solidFill>
+            <a:srgbClr val="16302A"/>
+          </a:solidFill>
+          <a:ln w="9525">
+            <a:solidFill>
+              <a:srgbClr val="16302A"/>
+            </a:solidFill>
+            <a:prstDash val="solid"/>
+          </a:ln>
+        </p:spPr>
+        <p:txBody>
+          <a:bodyPr/>
+          <a:lstStyle/>
+          <a:p>
+            <a:endParaRPr lang="en-US"/>
+          </a:p>
+        </p:txBody>
+      </p:sp>
+      <p:pic>
+        <p:nvPicPr>
+          <p:cNvPr id="31" name="Image 5" descr="preencoded.png"/>
+          <p:cNvPicPr>
+            <a:picLocks noChangeAspect="1"/>
+          </p:cNvPicPr>
+          <p:nvPr/>
+        </p:nvPicPr>
+        <p:blipFill>
+          <a:blip r:embed="rId8"/>
+          <a:stretch>
+            <a:fillRect/>
+          </a:stretch>
+        </p:blipFill>
+        <p:spPr>
+          <a:xfrm>
+            <a:off x="8577682" y="4354373"/>
+            <a:ext cx="380390" cy="380390"/>
+          </a:xfrm>
+          <a:prstGeom prst="rect">
+            <a:avLst/>
+          </a:prstGeom>
+        </p:spPr>
+      </p:pic>
+      <p:sp>
+        <p:nvSpPr>
+          <p:cNvPr id="32" name="Text 24"/>
+          <p:cNvSpPr txBox="1"/>
+          <p:nvPr/>
+        </p:nvSpPr>
+        <p:spPr>
+          <a:xfrm>
+            <a:off x="9316517" y="4178808"/>
+            <a:ext cx="2097938" cy="731520"/>
+          </a:xfrm>
+          <a:prstGeom prst="rect">
+            <a:avLst/>
+          </a:prstGeom>
+          <a:noFill/>
+          <a:ln/>
+        </p:spPr>
+        <p:txBody>
+          <a:bodyPr wrap="square" lIns="0" tIns="0" rIns="0" bIns="0" rtlCol="0" anchor="ctr"/>
+          <a:lstStyle/>
+          <a:p>
+            <a:pPr marL="0" indent="0">
+              <a:buNone/>
+            </a:pPr>
+            <a:r>
+              <a:rPr lang="en-US" sz="1700" b="1" dirty="0">
+                <a:solidFill>
+                  <a:srgbClr val="1D2723"/>
+                </a:solidFill>
+                <a:latin typeface="Arial" pitchFamily="34" charset="0"/>
+                <a:ea typeface="Arial" pitchFamily="34" charset="-122"/>
+                <a:cs typeface="Arial" pitchFamily="34" charset="-120"/>
+              </a:rPr>
+              <a:t>Policymakers and consumers</a:t>
+            </a:r>
+            <a:endParaRPr lang="en-US" sz="1700" dirty="0"/>
+          </a:p>
+        </p:txBody>
+      </p:sp>
+      <p:sp>
+        <p:nvSpPr>
+          <p:cNvPr id="33" name="Text 25"/>
+          <p:cNvSpPr txBox="1"/>
+          <p:nvPr/>
+        </p:nvSpPr>
+        <p:spPr>
+          <a:xfrm>
+            <a:off x="8402117" y="5074920"/>
+            <a:ext cx="2966618" cy="548640"/>
+          </a:xfrm>
+          <a:prstGeom prst="rect">
+            <a:avLst/>
+          </a:prstGeom>
+          <a:noFill/>
+          <a:ln/>
+        </p:spPr>
+        <p:txBody>
+          <a:bodyPr wrap="square" lIns="0" tIns="0" rIns="0" bIns="0" rtlCol="0" anchor="t"/>
+          <a:lstStyle/>
+          <a:p>
+            <a:pPr marL="0" indent="0">
+              <a:buNone/>
+            </a:pPr>
+            <a:r>
+              <a:rPr lang="en-US" sz="1400" dirty="0">
+                <a:solidFill>
+                  <a:srgbClr val="5E6A64"/>
+                </a:solidFill>
+                <a:latin typeface="Arial" pitchFamily="34" charset="0"/>
+                <a:ea typeface="Arial" pitchFamily="34" charset="-122"/>
+                <a:cs typeface="Arial" pitchFamily="34" charset="-120"/>
+              </a:rPr>
+              <a:t>Food security and food prices</a:t>
+            </a:r>
+            <a:endParaRPr lang="en-US" sz="1400" dirty="0"/>
+          </a:p>
+        </p:txBody>
+      </p:sp>
+      <p:sp>
+        <p:nvSpPr>
+          <p:cNvPr id="34" name="Text 26"/>
+          <p:cNvSpPr txBox="1"/>
+          <p:nvPr/>
+        </p:nvSpPr>
+        <p:spPr>
+          <a:xfrm>
+            <a:off x="548640" y="5870448"/>
+            <a:ext cx="10424160" cy="365760"/>
+          </a:xfrm>
+          <a:prstGeom prst="rect">
+            <a:avLst/>
+          </a:prstGeom>
+          <a:noFill/>
+          <a:ln/>
+        </p:spPr>
+        <p:txBody>
+          <a:bodyPr wrap="square" lIns="0" tIns="0" rIns="0" bIns="0" rtlCol="0" anchor="ctr"/>
+          <a:lstStyle/>
+          <a:p>
+            <a:pPr marL="0" indent="0">
+              <a:buNone/>
+            </a:pPr>
+            <a:r>
+              <a:rPr lang="en-US" sz="1500" i="1" dirty="0">
+                <a:solidFill>
+                  <a:srgbClr val="2E6B4F"/>
+                </a:solidFill>
+                <a:latin typeface="Arial" pitchFamily="34" charset="0"/>
+                <a:ea typeface="Arial" pitchFamily="34" charset="-122"/>
+                <a:cs typeface="Arial" pitchFamily="34" charset="-120"/>
+              </a:rPr>
+              <a:t>Even if traders already price the weather, a validated risk score helps everyone who does not trade.</a:t>
+            </a:r>
+            <a:endParaRPr lang="en-US" sz="1500" dirty="0"/>
+          </a:p>
+        </p:txBody>
+      </p:sp>
+      <p:sp>
+        <p:nvSpPr>
+          <p:cNvPr id="35" name="Slide Number Placeholder 0"/>
           <p:cNvSpPr>
             <a:spLocks noGrp="1"/>
           </p:cNvSpPr>
